--- a/Temporal_IO_pt.pptx
+++ b/Temporal_IO_pt.pptx
@@ -5,21 +5,20 @@
     <p:sldMasterId id="2147483648" r:id="rId1"/>
   </p:sldMasterIdLst>
   <p:notesMasterIdLst>
-    <p:notesMasterId r:id="rId14"/>
+    <p:notesMasterId r:id="rId13"/>
   </p:notesMasterIdLst>
   <p:sldIdLst>
     <p:sldId id="256" r:id="rId2"/>
     <p:sldId id="257" r:id="rId3"/>
     <p:sldId id="258" r:id="rId4"/>
-    <p:sldId id="259" r:id="rId5"/>
-    <p:sldId id="260" r:id="rId6"/>
-    <p:sldId id="261" r:id="rId7"/>
-    <p:sldId id="262" r:id="rId8"/>
-    <p:sldId id="263" r:id="rId9"/>
-    <p:sldId id="264" r:id="rId10"/>
-    <p:sldId id="265" r:id="rId11"/>
-    <p:sldId id="266" r:id="rId12"/>
-    <p:sldId id="267" r:id="rId13"/>
+    <p:sldId id="268" r:id="rId5"/>
+    <p:sldId id="259" r:id="rId6"/>
+    <p:sldId id="260" r:id="rId7"/>
+    <p:sldId id="261" r:id="rId8"/>
+    <p:sldId id="264" r:id="rId9"/>
+    <p:sldId id="265" r:id="rId10"/>
+    <p:sldId id="266" r:id="rId11"/>
+    <p:sldId id="267" r:id="rId12"/>
   </p:sldIdLst>
   <p:sldSz cx="9144000" cy="5143500" type="screen16x9"/>
   <p:notesSz cx="5143500" cy="9144000"/>
@@ -500,90 +499,6 @@
 </p:notes>
 </file>
 
-<file path=ppt/notesSlides/notesSlide12.xml><?xml version="1.0" encoding="utf-8"?>
-<p:notes xmlns:a="http://schemas.openxmlformats.org/drawingml/2006/main" xmlns:r="http://schemas.openxmlformats.org/officeDocument/2006/relationships" xmlns:p="http://schemas.openxmlformats.org/presentationml/2006/main">
-  <p:cSld>
-    <p:spTree>
-      <p:nvGrpSpPr>
-        <p:cNvPr id="1" name=""/>
-        <p:cNvGrpSpPr/>
-        <p:nvPr/>
-      </p:nvGrpSpPr>
-      <p:grpSpPr>
-        <a:xfrm>
-          <a:off x="0" y="0"/>
-          <a:ext cx="0" cy="0"/>
-          <a:chOff x="0" y="0"/>
-          <a:chExt cx="0" cy="0"/>
-        </a:xfrm>
-      </p:grpSpPr>
-      <p:sp>
-        <p:nvSpPr>
-          <p:cNvPr id="2" name="Slide Image Placeholder 1"/>
-          <p:cNvSpPr>
-            <a:spLocks noGrp="1" noRot="1" noChangeAspect="1"/>
-          </p:cNvSpPr>
-          <p:nvPr>
-            <p:ph type="sldImg"/>
-          </p:nvPr>
-        </p:nvSpPr>
-        <p:spPr/>
-      </p:sp>
-      <p:sp>
-        <p:nvSpPr>
-          <p:cNvPr id="3" name="Notes Placeholder 2"/>
-          <p:cNvSpPr>
-            <a:spLocks noGrp="1"/>
-          </p:cNvSpPr>
-          <p:nvPr>
-            <p:ph type="body" idx="1"/>
-          </p:nvPr>
-        </p:nvSpPr>
-        <p:spPr/>
-        <p:txBody>
-          <a:bodyPr/>
-          <a:lstStyle/>
-          <a:p>
-            <a:endParaRPr lang="en-US" dirty="0"/>
-          </a:p>
-        </p:txBody>
-      </p:sp>
-      <p:sp>
-        <p:nvSpPr>
-          <p:cNvPr id="4" name="Slide Number Placeholder 3"/>
-          <p:cNvSpPr>
-            <a:spLocks noGrp="1"/>
-          </p:cNvSpPr>
-          <p:nvPr>
-            <p:ph type="sldNum" sz="quarter" idx="10"/>
-          </p:nvPr>
-        </p:nvSpPr>
-        <p:spPr/>
-        <p:txBody>
-          <a:bodyPr/>
-          <a:lstStyle/>
-          <a:p>
-            <a:fld id="{F7021451-1387-4CA6-816F-3879F97B5CBC}" type="slidenum">
-              <a:rPr lang="en-US"/>
-              <a:t>12</a:t>
-            </a:fld>
-            <a:endParaRPr lang="en-US"/>
-          </a:p>
-        </p:txBody>
-      </p:sp>
-    </p:spTree>
-    <p:extLst>
-      <p:ext uri="{BB962C8B-B14F-4D97-AF65-F5344CB8AC3E}">
-        <p14:creationId xmlns:p14="http://schemas.microsoft.com/office/powerpoint/2010/main" val="1024086991"/>
-      </p:ext>
-    </p:extLst>
-  </p:cSld>
-  <p:clrMapOvr>
-    <a:masterClrMapping/>
-  </p:clrMapOvr>
-</p:notes>
-</file>
-
 <file path=ppt/notesSlides/notesSlide2.xml><?xml version="1.0" encoding="utf-8"?>
 <p:notes xmlns:a="http://schemas.openxmlformats.org/drawingml/2006/main" xmlns:r="http://schemas.openxmlformats.org/officeDocument/2006/relationships" xmlns:p="http://schemas.openxmlformats.org/presentationml/2006/main">
   <p:cSld>
@@ -757,7 +672,13 @@
   <p:cSld>
     <p:spTree>
       <p:nvGrpSpPr>
-        <p:cNvPr id="1" name=""/>
+        <p:cNvPr id="1" name="">
+          <a:extLst>
+            <a:ext uri="{FF2B5EF4-FFF2-40B4-BE49-F238E27FC236}">
+              <a16:creationId xmlns:a16="http://schemas.microsoft.com/office/drawing/2014/main" id="{482D1124-F660-C6C8-7958-8F694056A934}"/>
+            </a:ext>
+          </a:extLst>
+        </p:cNvPr>
         <p:cNvGrpSpPr/>
         <p:nvPr/>
       </p:nvGrpSpPr>
@@ -771,7 +692,13 @@
       </p:grpSpPr>
       <p:sp>
         <p:nvSpPr>
-          <p:cNvPr id="2" name="Slide Image Placeholder 1"/>
+          <p:cNvPr id="2" name="Slide Image Placeholder 1">
+            <a:extLst>
+              <a:ext uri="{FF2B5EF4-FFF2-40B4-BE49-F238E27FC236}">
+                <a16:creationId xmlns:a16="http://schemas.microsoft.com/office/drawing/2014/main" id="{0C3DC7DB-02BD-4B8A-3FFE-C1E12C63D43A}"/>
+              </a:ext>
+            </a:extLst>
+          </p:cNvPr>
           <p:cNvSpPr>
             <a:spLocks noGrp="1" noRot="1" noChangeAspect="1"/>
           </p:cNvSpPr>
@@ -783,7 +710,13 @@
       </p:sp>
       <p:sp>
         <p:nvSpPr>
-          <p:cNvPr id="3" name="Notes Placeholder 2"/>
+          <p:cNvPr id="3" name="Notes Placeholder 2">
+            <a:extLst>
+              <a:ext uri="{FF2B5EF4-FFF2-40B4-BE49-F238E27FC236}">
+                <a16:creationId xmlns:a16="http://schemas.microsoft.com/office/drawing/2014/main" id="{B44151BA-512A-A33C-2BFE-B65A0B28BA02}"/>
+              </a:ext>
+            </a:extLst>
+          </p:cNvPr>
           <p:cNvSpPr>
             <a:spLocks noGrp="1"/>
           </p:cNvSpPr>
@@ -802,7 +735,13 @@
       </p:sp>
       <p:sp>
         <p:nvSpPr>
-          <p:cNvPr id="4" name="Slide Number Placeholder 3"/>
+          <p:cNvPr id="4" name="Slide Number Placeholder 3">
+            <a:extLst>
+              <a:ext uri="{FF2B5EF4-FFF2-40B4-BE49-F238E27FC236}">
+                <a16:creationId xmlns:a16="http://schemas.microsoft.com/office/drawing/2014/main" id="{26B5ED7D-E7A3-F4E8-E528-D3AFF4050D3D}"/>
+              </a:ext>
+            </a:extLst>
+          </p:cNvPr>
           <p:cNvSpPr>
             <a:spLocks noGrp="1"/>
           </p:cNvSpPr>
@@ -826,7 +765,7 @@
     </p:spTree>
     <p:extLst>
       <p:ext uri="{BB962C8B-B14F-4D97-AF65-F5344CB8AC3E}">
-        <p14:creationId xmlns:p14="http://schemas.microsoft.com/office/powerpoint/2010/main" val="1024086991"/>
+        <p14:creationId xmlns:p14="http://schemas.microsoft.com/office/powerpoint/2010/main" val="3901548064"/>
       </p:ext>
     </p:extLst>
   </p:cSld>
@@ -1850,8 +1789,8 @@
         </p:nvSpPr>
         <p:spPr>
           <a:xfrm>
-            <a:off x="457200" y="2743200"/>
-            <a:ext cx="6858000" cy="640080"/>
+            <a:off x="429768" y="2629286"/>
+            <a:ext cx="6428232" cy="827123"/>
           </a:xfrm>
           <a:prstGeom prst="rect">
             <a:avLst/>
@@ -1867,7 +1806,7 @@
               <a:buNone/>
             </a:pPr>
             <a:r>
-              <a:rPr lang="en-US" sz="2200" dirty="0">
+              <a:rPr lang="en-US" sz="2200" dirty="0" err="1">
                 <a:solidFill>
                   <a:srgbClr val="2D9CDB"/>
                 </a:solidFill>
@@ -1875,7 +1814,95 @@
                 <a:ea typeface="Calibri" pitchFamily="34" charset="-122"/>
                 <a:cs typeface="Calibri" pitchFamily="34" charset="-120"/>
               </a:rPr>
-              <a:t>Workflows duráveis para sistemas distribuídos</a:t>
+              <a:t>Fluxos</a:t>
+            </a:r>
+            <a:r>
+              <a:rPr lang="en-US" sz="2200" dirty="0">
+                <a:solidFill>
+                  <a:srgbClr val="2D9CDB"/>
+                </a:solidFill>
+                <a:latin typeface="Calibri" pitchFamily="34" charset="0"/>
+                <a:ea typeface="Calibri" pitchFamily="34" charset="-122"/>
+                <a:cs typeface="Calibri" pitchFamily="34" charset="-120"/>
+              </a:rPr>
+              <a:t> de </a:t>
+            </a:r>
+            <a:r>
+              <a:rPr lang="en-US" sz="2200" dirty="0" err="1">
+                <a:solidFill>
+                  <a:srgbClr val="2D9CDB"/>
+                </a:solidFill>
+                <a:latin typeface="Calibri" pitchFamily="34" charset="0"/>
+                <a:ea typeface="Calibri" pitchFamily="34" charset="-122"/>
+                <a:cs typeface="Calibri" pitchFamily="34" charset="-120"/>
+              </a:rPr>
+              <a:t>trabalho</a:t>
+            </a:r>
+            <a:r>
+              <a:rPr lang="en-US" sz="2200" dirty="0">
+                <a:solidFill>
+                  <a:srgbClr val="2D9CDB"/>
+                </a:solidFill>
+                <a:latin typeface="Calibri" pitchFamily="34" charset="0"/>
+                <a:ea typeface="Calibri" pitchFamily="34" charset="-122"/>
+                <a:cs typeface="Calibri" pitchFamily="34" charset="-120"/>
+              </a:rPr>
+              <a:t> </a:t>
+            </a:r>
+            <a:r>
+              <a:rPr lang="en-US" sz="2200" dirty="0" err="1">
+                <a:solidFill>
+                  <a:srgbClr val="2D9CDB"/>
+                </a:solidFill>
+                <a:latin typeface="Calibri" pitchFamily="34" charset="0"/>
+                <a:ea typeface="Calibri" pitchFamily="34" charset="-122"/>
+                <a:cs typeface="Calibri" pitchFamily="34" charset="-120"/>
+              </a:rPr>
+              <a:t>duráveis</a:t>
+            </a:r>
+            <a:r>
+              <a:rPr lang="en-US" sz="2200" dirty="0">
+                <a:solidFill>
+                  <a:srgbClr val="2D9CDB"/>
+                </a:solidFill>
+                <a:latin typeface="Calibri" pitchFamily="34" charset="0"/>
+                <a:ea typeface="Calibri" pitchFamily="34" charset="-122"/>
+                <a:cs typeface="Calibri" pitchFamily="34" charset="-120"/>
+              </a:rPr>
+              <a:t> ​​para </a:t>
+            </a:r>
+            <a:r>
+              <a:rPr lang="en-US" sz="2200" dirty="0" err="1">
+                <a:solidFill>
+                  <a:srgbClr val="2D9CDB"/>
+                </a:solidFill>
+                <a:latin typeface="Calibri" pitchFamily="34" charset="0"/>
+                <a:ea typeface="Calibri" pitchFamily="34" charset="-122"/>
+                <a:cs typeface="Calibri" pitchFamily="34" charset="-120"/>
+              </a:rPr>
+              <a:t>sistemas</a:t>
+            </a:r>
+            <a:r>
+              <a:rPr lang="en-US" sz="2200" dirty="0">
+                <a:solidFill>
+                  <a:srgbClr val="2D9CDB"/>
+                </a:solidFill>
+                <a:latin typeface="Calibri" pitchFamily="34" charset="0"/>
+                <a:ea typeface="Calibri" pitchFamily="34" charset="-122"/>
+                <a:cs typeface="Calibri" pitchFamily="34" charset="-120"/>
+              </a:rPr>
+              <a:t> </a:t>
+            </a:r>
+            <a:r>
+              <a:rPr lang="en-US" sz="2200" dirty="0" err="1">
+                <a:solidFill>
+                  <a:srgbClr val="2D9CDB"/>
+                </a:solidFill>
+                <a:latin typeface="Calibri" pitchFamily="34" charset="0"/>
+                <a:ea typeface="Calibri" pitchFamily="34" charset="-122"/>
+                <a:cs typeface="Calibri" pitchFamily="34" charset="-120"/>
+              </a:rPr>
+              <a:t>distribuídos</a:t>
             </a:r>
             <a:endParaRPr lang="en-US" sz="2200" dirty="0"/>
           </a:p>
@@ -1956,1203 +1983,6 @@
 </file>
 
 <file path=ppt/slides/slide10.xml><?xml version="1.0" encoding="utf-8"?>
-<p:sld xmlns:a="http://schemas.openxmlformats.org/drawingml/2006/main" xmlns:r="http://schemas.openxmlformats.org/officeDocument/2006/relationships" xmlns:p="http://schemas.openxmlformats.org/presentationml/2006/main">
-  <p:cSld name="Slide 10">
-    <p:bg>
-      <p:bgPr>
-        <a:gradFill>
-          <a:gsLst>
-            <a:gs pos="0">
-              <a:schemeClr val="accent3">
-                <a:lumMod val="5000"/>
-                <a:lumOff val="95000"/>
-              </a:schemeClr>
-            </a:gs>
-            <a:gs pos="74000">
-              <a:schemeClr val="accent3">
-                <a:lumMod val="45000"/>
-                <a:lumOff val="55000"/>
-              </a:schemeClr>
-            </a:gs>
-            <a:gs pos="83000">
-              <a:schemeClr val="accent3">
-                <a:lumMod val="45000"/>
-                <a:lumOff val="55000"/>
-              </a:schemeClr>
-            </a:gs>
-            <a:gs pos="100000">
-              <a:schemeClr val="accent3">
-                <a:lumMod val="30000"/>
-                <a:lumOff val="70000"/>
-              </a:schemeClr>
-            </a:gs>
-          </a:gsLst>
-          <a:lin ang="5400000" scaled="1"/>
-        </a:gradFill>
-        <a:effectLst/>
-      </p:bgPr>
-    </p:bg>
-    <p:spTree>
-      <p:nvGrpSpPr>
-        <p:cNvPr id="1" name=""/>
-        <p:cNvGrpSpPr/>
-        <p:nvPr/>
-      </p:nvGrpSpPr>
-      <p:grpSpPr>
-        <a:xfrm>
-          <a:off x="0" y="0"/>
-          <a:ext cx="0" cy="0"/>
-          <a:chOff x="0" y="0"/>
-          <a:chExt cx="0" cy="0"/>
-        </a:xfrm>
-      </p:grpSpPr>
-      <p:sp>
-        <p:nvSpPr>
-          <p:cNvPr id="2" name="Shape 0"/>
-          <p:cNvSpPr/>
-          <p:nvPr/>
-        </p:nvSpPr>
-        <p:spPr>
-          <a:xfrm>
-            <a:off x="0" y="0"/>
-            <a:ext cx="9144000" cy="822960"/>
-          </a:xfrm>
-          <a:prstGeom prst="rect">
-            <a:avLst/>
-          </a:prstGeom>
-          <a:solidFill>
-            <a:srgbClr val="1B6CA8"/>
-          </a:solidFill>
-          <a:ln w="12700">
-            <a:solidFill>
-              <a:srgbClr val="1B6CA8"/>
-            </a:solidFill>
-            <a:prstDash val="solid"/>
-          </a:ln>
-        </p:spPr>
-        <p:txBody>
-          <a:bodyPr/>
-          <a:lstStyle/>
-          <a:p>
-            <a:endParaRPr lang="pt-PT"/>
-          </a:p>
-        </p:txBody>
-      </p:sp>
-      <p:sp>
-        <p:nvSpPr>
-          <p:cNvPr id="3" name="Text 1"/>
-          <p:cNvSpPr/>
-          <p:nvPr/>
-        </p:nvSpPr>
-        <p:spPr>
-          <a:xfrm>
-            <a:off x="457200" y="0"/>
-            <a:ext cx="8229600" cy="822960"/>
-          </a:xfrm>
-          <a:prstGeom prst="rect">
-            <a:avLst/>
-          </a:prstGeom>
-          <a:noFill/>
-          <a:ln/>
-        </p:spPr>
-        <p:txBody>
-          <a:bodyPr wrap="square" lIns="0" tIns="0" rIns="0" bIns="0" rtlCol="0" anchor="ctr"/>
-          <a:lstStyle/>
-          <a:p>
-            <a:pPr marL="0" indent="0">
-              <a:buNone/>
-            </a:pPr>
-            <a:r>
-              <a:rPr lang="en-US" sz="2400" b="1" dirty="0">
-                <a:solidFill>
-                  <a:srgbClr val="FFFFFF"/>
-                </a:solidFill>
-              </a:rPr>
-              <a:t>05  /  Fluxo de Execução</a:t>
-            </a:r>
-            <a:endParaRPr lang="en-US" sz="2400" dirty="0"/>
-          </a:p>
-        </p:txBody>
-      </p:sp>
-      <p:sp>
-        <p:nvSpPr>
-          <p:cNvPr id="4" name="Shape 2"/>
-          <p:cNvSpPr/>
-          <p:nvPr/>
-        </p:nvSpPr>
-        <p:spPr>
-          <a:xfrm>
-            <a:off x="274320" y="1005840"/>
-            <a:ext cx="2743200" cy="1325880"/>
-          </a:xfrm>
-          <a:prstGeom prst="rect">
-            <a:avLst/>
-          </a:prstGeom>
-          <a:solidFill>
-            <a:srgbClr val="112236"/>
-          </a:solidFill>
-          <a:ln w="19050">
-            <a:solidFill>
-              <a:srgbClr val="2D9CDB"/>
-            </a:solidFill>
-            <a:prstDash val="solid"/>
-          </a:ln>
-          <a:effectLst>
-            <a:outerShdw blurRad="101600" dist="38100" dir="8100000" algn="bl" rotWithShape="0">
-              <a:srgbClr val="000000">
-                <a:alpha val="18000"/>
-              </a:srgbClr>
-            </a:outerShdw>
-          </a:effectLst>
-        </p:spPr>
-        <p:txBody>
-          <a:bodyPr/>
-          <a:lstStyle/>
-          <a:p>
-            <a:endParaRPr lang="pt-PT"/>
-          </a:p>
-        </p:txBody>
-      </p:sp>
-      <p:sp>
-        <p:nvSpPr>
-          <p:cNvPr id="5" name="Shape 3"/>
-          <p:cNvSpPr/>
-          <p:nvPr/>
-        </p:nvSpPr>
-        <p:spPr>
-          <a:xfrm>
-            <a:off x="365760" y="1097280"/>
-            <a:ext cx="502920" cy="502920"/>
-          </a:xfrm>
-          <a:prstGeom prst="ellipse">
-            <a:avLst/>
-          </a:prstGeom>
-          <a:solidFill>
-            <a:srgbClr val="2D9CDB"/>
-          </a:solidFill>
-          <a:ln w="12700">
-            <a:solidFill>
-              <a:srgbClr val="2D9CDB"/>
-            </a:solidFill>
-            <a:prstDash val="solid"/>
-          </a:ln>
-        </p:spPr>
-        <p:txBody>
-          <a:bodyPr/>
-          <a:lstStyle/>
-          <a:p>
-            <a:endParaRPr lang="pt-PT"/>
-          </a:p>
-        </p:txBody>
-      </p:sp>
-      <p:sp>
-        <p:nvSpPr>
-          <p:cNvPr id="6" name="Text 4"/>
-          <p:cNvSpPr/>
-          <p:nvPr/>
-        </p:nvSpPr>
-        <p:spPr>
-          <a:xfrm>
-            <a:off x="365760" y="1097280"/>
-            <a:ext cx="502920" cy="502920"/>
-          </a:xfrm>
-          <a:prstGeom prst="rect">
-            <a:avLst/>
-          </a:prstGeom>
-          <a:noFill/>
-          <a:ln/>
-        </p:spPr>
-        <p:txBody>
-          <a:bodyPr wrap="square" lIns="0" tIns="0" rIns="0" bIns="0" rtlCol="0" anchor="ctr"/>
-          <a:lstStyle/>
-          <a:p>
-            <a:pPr marL="0" indent="0" algn="ctr">
-              <a:buNone/>
-            </a:pPr>
-            <a:r>
-              <a:rPr lang="en-US" sz="1600" b="1" dirty="0">
-                <a:solidFill>
-                  <a:srgbClr val="0D1B2A"/>
-                </a:solidFill>
-              </a:rPr>
-              <a:t>1</a:t>
-            </a:r>
-            <a:endParaRPr lang="en-US" sz="1600" dirty="0"/>
-          </a:p>
-        </p:txBody>
-      </p:sp>
-      <p:sp>
-        <p:nvSpPr>
-          <p:cNvPr id="7" name="Text 5"/>
-          <p:cNvSpPr/>
-          <p:nvPr/>
-        </p:nvSpPr>
-        <p:spPr>
-          <a:xfrm>
-            <a:off x="960120" y="1078992"/>
-            <a:ext cx="1965960" cy="1097280"/>
-          </a:xfrm>
-          <a:prstGeom prst="rect">
-            <a:avLst/>
-          </a:prstGeom>
-          <a:noFill/>
-          <a:ln/>
-        </p:spPr>
-        <p:txBody>
-          <a:bodyPr wrap="square" rtlCol="0" anchor="ctr"/>
-          <a:lstStyle/>
-          <a:p>
-            <a:pPr marL="0" indent="0">
-              <a:buNone/>
-            </a:pPr>
-            <a:r>
-              <a:rPr lang="en-US" sz="1200" dirty="0">
-                <a:solidFill>
-                  <a:srgbClr val="FFFFFF"/>
-                </a:solidFill>
-              </a:rPr>
-              <a:t>Client inicia o workflow</a:t>
-            </a:r>
-            <a:endParaRPr lang="en-US" sz="1200" dirty="0"/>
-          </a:p>
-        </p:txBody>
-      </p:sp>
-      <p:sp>
-        <p:nvSpPr>
-          <p:cNvPr id="8" name="Text 6"/>
-          <p:cNvSpPr/>
-          <p:nvPr/>
-        </p:nvSpPr>
-        <p:spPr>
-          <a:xfrm>
-            <a:off x="3017520" y="1463040"/>
-            <a:ext cx="228600" cy="411480"/>
-          </a:xfrm>
-          <a:prstGeom prst="rect">
-            <a:avLst/>
-          </a:prstGeom>
-          <a:noFill/>
-          <a:ln/>
-        </p:spPr>
-        <p:txBody>
-          <a:bodyPr wrap="square" rtlCol="0" anchor="ctr"/>
-          <a:lstStyle/>
-          <a:p>
-            <a:pPr marL="0" indent="0" algn="ctr">
-              <a:buNone/>
-            </a:pPr>
-            <a:r>
-              <a:rPr lang="en-US" sz="1600" dirty="0">
-                <a:solidFill>
-                  <a:srgbClr val="8FA3B3"/>
-                </a:solidFill>
-              </a:rPr>
-              <a:t>→</a:t>
-            </a:r>
-            <a:endParaRPr lang="en-US" sz="1600" dirty="0"/>
-          </a:p>
-        </p:txBody>
-      </p:sp>
-      <p:sp>
-        <p:nvSpPr>
-          <p:cNvPr id="9" name="Shape 7"/>
-          <p:cNvSpPr/>
-          <p:nvPr/>
-        </p:nvSpPr>
-        <p:spPr>
-          <a:xfrm>
-            <a:off x="3200400" y="1005840"/>
-            <a:ext cx="2743200" cy="1325880"/>
-          </a:xfrm>
-          <a:prstGeom prst="rect">
-            <a:avLst/>
-          </a:prstGeom>
-          <a:solidFill>
-            <a:srgbClr val="112236"/>
-          </a:solidFill>
-          <a:ln w="19050">
-            <a:solidFill>
-              <a:srgbClr val="1B6CA8"/>
-            </a:solidFill>
-            <a:prstDash val="solid"/>
-          </a:ln>
-          <a:effectLst>
-            <a:outerShdw blurRad="101600" dist="38100" dir="8100000" algn="bl" rotWithShape="0">
-              <a:srgbClr val="000000">
-                <a:alpha val="18000"/>
-              </a:srgbClr>
-            </a:outerShdw>
-          </a:effectLst>
-        </p:spPr>
-        <p:txBody>
-          <a:bodyPr/>
-          <a:lstStyle/>
-          <a:p>
-            <a:endParaRPr lang="pt-PT"/>
-          </a:p>
-        </p:txBody>
-      </p:sp>
-      <p:sp>
-        <p:nvSpPr>
-          <p:cNvPr id="10" name="Shape 8"/>
-          <p:cNvSpPr/>
-          <p:nvPr/>
-        </p:nvSpPr>
-        <p:spPr>
-          <a:xfrm>
-            <a:off x="3291840" y="1097280"/>
-            <a:ext cx="502920" cy="502920"/>
-          </a:xfrm>
-          <a:prstGeom prst="ellipse">
-            <a:avLst/>
-          </a:prstGeom>
-          <a:solidFill>
-            <a:srgbClr val="1B6CA8"/>
-          </a:solidFill>
-          <a:ln w="12700">
-            <a:solidFill>
-              <a:srgbClr val="1B6CA8"/>
-            </a:solidFill>
-            <a:prstDash val="solid"/>
-          </a:ln>
-        </p:spPr>
-        <p:txBody>
-          <a:bodyPr/>
-          <a:lstStyle/>
-          <a:p>
-            <a:endParaRPr lang="pt-PT"/>
-          </a:p>
-        </p:txBody>
-      </p:sp>
-      <p:sp>
-        <p:nvSpPr>
-          <p:cNvPr id="11" name="Text 9"/>
-          <p:cNvSpPr/>
-          <p:nvPr/>
-        </p:nvSpPr>
-        <p:spPr>
-          <a:xfrm>
-            <a:off x="3291840" y="1097280"/>
-            <a:ext cx="502920" cy="502920"/>
-          </a:xfrm>
-          <a:prstGeom prst="rect">
-            <a:avLst/>
-          </a:prstGeom>
-          <a:noFill/>
-          <a:ln/>
-        </p:spPr>
-        <p:txBody>
-          <a:bodyPr wrap="square" lIns="0" tIns="0" rIns="0" bIns="0" rtlCol="0" anchor="ctr"/>
-          <a:lstStyle/>
-          <a:p>
-            <a:pPr marL="0" indent="0" algn="ctr">
-              <a:buNone/>
-            </a:pPr>
-            <a:r>
-              <a:rPr lang="en-US" sz="1600" b="1" dirty="0">
-                <a:solidFill>
-                  <a:srgbClr val="0D1B2A"/>
-                </a:solidFill>
-              </a:rPr>
-              <a:t>2</a:t>
-            </a:r>
-            <a:endParaRPr lang="en-US" sz="1600" dirty="0"/>
-          </a:p>
-        </p:txBody>
-      </p:sp>
-      <p:sp>
-        <p:nvSpPr>
-          <p:cNvPr id="12" name="Text 10"/>
-          <p:cNvSpPr/>
-          <p:nvPr/>
-        </p:nvSpPr>
-        <p:spPr>
-          <a:xfrm>
-            <a:off x="3886200" y="1078992"/>
-            <a:ext cx="1965960" cy="1097280"/>
-          </a:xfrm>
-          <a:prstGeom prst="rect">
-            <a:avLst/>
-          </a:prstGeom>
-          <a:noFill/>
-          <a:ln/>
-        </p:spPr>
-        <p:txBody>
-          <a:bodyPr wrap="square" rtlCol="0" anchor="ctr"/>
-          <a:lstStyle/>
-          <a:p>
-            <a:pPr marL="0" indent="0">
-              <a:buNone/>
-            </a:pPr>
-            <a:r>
-              <a:rPr lang="en-US" sz="1200" dirty="0">
-                <a:solidFill>
-                  <a:srgbClr val="FFFFFF"/>
-                </a:solidFill>
-              </a:rPr>
-              <a:t>Temporal Service regista o evento</a:t>
-            </a:r>
-            <a:endParaRPr lang="en-US" sz="1200" dirty="0"/>
-          </a:p>
-        </p:txBody>
-      </p:sp>
-      <p:sp>
-        <p:nvSpPr>
-          <p:cNvPr id="13" name="Text 11"/>
-          <p:cNvSpPr/>
-          <p:nvPr/>
-        </p:nvSpPr>
-        <p:spPr>
-          <a:xfrm>
-            <a:off x="5943600" y="1463040"/>
-            <a:ext cx="228600" cy="411480"/>
-          </a:xfrm>
-          <a:prstGeom prst="rect">
-            <a:avLst/>
-          </a:prstGeom>
-          <a:noFill/>
-          <a:ln/>
-        </p:spPr>
-        <p:txBody>
-          <a:bodyPr wrap="square" rtlCol="0" anchor="ctr"/>
-          <a:lstStyle/>
-          <a:p>
-            <a:pPr marL="0" indent="0" algn="ctr">
-              <a:buNone/>
-            </a:pPr>
-            <a:r>
-              <a:rPr lang="en-US" sz="1600" dirty="0">
-                <a:solidFill>
-                  <a:srgbClr val="8FA3B3"/>
-                </a:solidFill>
-              </a:rPr>
-              <a:t>→</a:t>
-            </a:r>
-            <a:endParaRPr lang="en-US" sz="1600" dirty="0"/>
-          </a:p>
-        </p:txBody>
-      </p:sp>
-      <p:sp>
-        <p:nvSpPr>
-          <p:cNvPr id="14" name="Shape 12"/>
-          <p:cNvSpPr/>
-          <p:nvPr/>
-        </p:nvSpPr>
-        <p:spPr>
-          <a:xfrm>
-            <a:off x="6126480" y="1005840"/>
-            <a:ext cx="2743200" cy="1325880"/>
-          </a:xfrm>
-          <a:prstGeom prst="rect">
-            <a:avLst/>
-          </a:prstGeom>
-          <a:solidFill>
-            <a:srgbClr val="112236"/>
-          </a:solidFill>
-          <a:ln w="19050">
-            <a:solidFill>
-              <a:srgbClr val="9B59B6"/>
-            </a:solidFill>
-            <a:prstDash val="solid"/>
-          </a:ln>
-          <a:effectLst>
-            <a:outerShdw blurRad="101600" dist="38100" dir="8100000" algn="bl" rotWithShape="0">
-              <a:srgbClr val="000000">
-                <a:alpha val="18000"/>
-              </a:srgbClr>
-            </a:outerShdw>
-          </a:effectLst>
-        </p:spPr>
-        <p:txBody>
-          <a:bodyPr/>
-          <a:lstStyle/>
-          <a:p>
-            <a:endParaRPr lang="pt-PT"/>
-          </a:p>
-        </p:txBody>
-      </p:sp>
-      <p:sp>
-        <p:nvSpPr>
-          <p:cNvPr id="15" name="Shape 13"/>
-          <p:cNvSpPr/>
-          <p:nvPr/>
-        </p:nvSpPr>
-        <p:spPr>
-          <a:xfrm>
-            <a:off x="6217920" y="1097280"/>
-            <a:ext cx="502920" cy="502920"/>
-          </a:xfrm>
-          <a:prstGeom prst="ellipse">
-            <a:avLst/>
-          </a:prstGeom>
-          <a:solidFill>
-            <a:srgbClr val="9B59B6"/>
-          </a:solidFill>
-          <a:ln w="12700">
-            <a:solidFill>
-              <a:srgbClr val="9B59B6"/>
-            </a:solidFill>
-            <a:prstDash val="solid"/>
-          </a:ln>
-        </p:spPr>
-        <p:txBody>
-          <a:bodyPr/>
-          <a:lstStyle/>
-          <a:p>
-            <a:endParaRPr lang="pt-PT"/>
-          </a:p>
-        </p:txBody>
-      </p:sp>
-      <p:sp>
-        <p:nvSpPr>
-          <p:cNvPr id="16" name="Text 14"/>
-          <p:cNvSpPr/>
-          <p:nvPr/>
-        </p:nvSpPr>
-        <p:spPr>
-          <a:xfrm>
-            <a:off x="6217920" y="1097280"/>
-            <a:ext cx="502920" cy="502920"/>
-          </a:xfrm>
-          <a:prstGeom prst="rect">
-            <a:avLst/>
-          </a:prstGeom>
-          <a:noFill/>
-          <a:ln/>
-        </p:spPr>
-        <p:txBody>
-          <a:bodyPr wrap="square" lIns="0" tIns="0" rIns="0" bIns="0" rtlCol="0" anchor="ctr"/>
-          <a:lstStyle/>
-          <a:p>
-            <a:pPr marL="0" indent="0" algn="ctr">
-              <a:buNone/>
-            </a:pPr>
-            <a:r>
-              <a:rPr lang="en-US" sz="1600" b="1" dirty="0">
-                <a:solidFill>
-                  <a:srgbClr val="0D1B2A"/>
-                </a:solidFill>
-              </a:rPr>
-              <a:t>3</a:t>
-            </a:r>
-            <a:endParaRPr lang="en-US" sz="1600" dirty="0"/>
-          </a:p>
-        </p:txBody>
-      </p:sp>
-      <p:sp>
-        <p:nvSpPr>
-          <p:cNvPr id="17" name="Text 15"/>
-          <p:cNvSpPr/>
-          <p:nvPr/>
-        </p:nvSpPr>
-        <p:spPr>
-          <a:xfrm>
-            <a:off x="6812280" y="1078992"/>
-            <a:ext cx="1965960" cy="1097280"/>
-          </a:xfrm>
-          <a:prstGeom prst="rect">
-            <a:avLst/>
-          </a:prstGeom>
-          <a:noFill/>
-          <a:ln/>
-        </p:spPr>
-        <p:txBody>
-          <a:bodyPr wrap="square" rtlCol="0" anchor="ctr"/>
-          <a:lstStyle/>
-          <a:p>
-            <a:pPr marL="0" indent="0">
-              <a:buNone/>
-            </a:pPr>
-            <a:r>
-              <a:rPr lang="en-US" sz="1200" dirty="0">
-                <a:solidFill>
-                  <a:srgbClr val="FFFFFF"/>
-                </a:solidFill>
-              </a:rPr>
-              <a:t>Tarefas são agendadas na Task Queue</a:t>
-            </a:r>
-            <a:endParaRPr lang="en-US" sz="1200" dirty="0"/>
-          </a:p>
-        </p:txBody>
-      </p:sp>
-      <p:sp>
-        <p:nvSpPr>
-          <p:cNvPr id="18" name="Shape 16"/>
-          <p:cNvSpPr/>
-          <p:nvPr/>
-        </p:nvSpPr>
-        <p:spPr>
-          <a:xfrm>
-            <a:off x="274320" y="2651760"/>
-            <a:ext cx="2743200" cy="1325880"/>
-          </a:xfrm>
-          <a:prstGeom prst="rect">
-            <a:avLst/>
-          </a:prstGeom>
-          <a:solidFill>
-            <a:srgbClr val="112236"/>
-          </a:solidFill>
-          <a:ln w="19050">
-            <a:solidFill>
-              <a:srgbClr val="E67E22"/>
-            </a:solidFill>
-            <a:prstDash val="solid"/>
-          </a:ln>
-          <a:effectLst>
-            <a:outerShdw blurRad="101600" dist="38100" dir="8100000" algn="bl" rotWithShape="0">
-              <a:srgbClr val="000000">
-                <a:alpha val="18000"/>
-              </a:srgbClr>
-            </a:outerShdw>
-          </a:effectLst>
-        </p:spPr>
-        <p:txBody>
-          <a:bodyPr/>
-          <a:lstStyle/>
-          <a:p>
-            <a:endParaRPr lang="pt-PT"/>
-          </a:p>
-        </p:txBody>
-      </p:sp>
-      <p:sp>
-        <p:nvSpPr>
-          <p:cNvPr id="19" name="Shape 17"/>
-          <p:cNvSpPr/>
-          <p:nvPr/>
-        </p:nvSpPr>
-        <p:spPr>
-          <a:xfrm>
-            <a:off x="365760" y="2743200"/>
-            <a:ext cx="502920" cy="502920"/>
-          </a:xfrm>
-          <a:prstGeom prst="ellipse">
-            <a:avLst/>
-          </a:prstGeom>
-          <a:solidFill>
-            <a:srgbClr val="E67E22"/>
-          </a:solidFill>
-          <a:ln w="12700">
-            <a:solidFill>
-              <a:srgbClr val="E67E22"/>
-            </a:solidFill>
-            <a:prstDash val="solid"/>
-          </a:ln>
-        </p:spPr>
-        <p:txBody>
-          <a:bodyPr/>
-          <a:lstStyle/>
-          <a:p>
-            <a:endParaRPr lang="pt-PT"/>
-          </a:p>
-        </p:txBody>
-      </p:sp>
-      <p:sp>
-        <p:nvSpPr>
-          <p:cNvPr id="20" name="Text 18"/>
-          <p:cNvSpPr/>
-          <p:nvPr/>
-        </p:nvSpPr>
-        <p:spPr>
-          <a:xfrm>
-            <a:off x="365760" y="2743200"/>
-            <a:ext cx="502920" cy="502920"/>
-          </a:xfrm>
-          <a:prstGeom prst="rect">
-            <a:avLst/>
-          </a:prstGeom>
-          <a:noFill/>
-          <a:ln/>
-        </p:spPr>
-        <p:txBody>
-          <a:bodyPr wrap="square" lIns="0" tIns="0" rIns="0" bIns="0" rtlCol="0" anchor="ctr"/>
-          <a:lstStyle/>
-          <a:p>
-            <a:pPr marL="0" indent="0" algn="ctr">
-              <a:buNone/>
-            </a:pPr>
-            <a:r>
-              <a:rPr lang="en-US" sz="1600" b="1" dirty="0">
-                <a:solidFill>
-                  <a:srgbClr val="0D1B2A"/>
-                </a:solidFill>
-              </a:rPr>
-              <a:t>4</a:t>
-            </a:r>
-            <a:endParaRPr lang="en-US" sz="1600" dirty="0"/>
-          </a:p>
-        </p:txBody>
-      </p:sp>
-      <p:sp>
-        <p:nvSpPr>
-          <p:cNvPr id="21" name="Text 19"/>
-          <p:cNvSpPr/>
-          <p:nvPr/>
-        </p:nvSpPr>
-        <p:spPr>
-          <a:xfrm>
-            <a:off x="960120" y="2724912"/>
-            <a:ext cx="1965960" cy="1097280"/>
-          </a:xfrm>
-          <a:prstGeom prst="rect">
-            <a:avLst/>
-          </a:prstGeom>
-          <a:noFill/>
-          <a:ln/>
-        </p:spPr>
-        <p:txBody>
-          <a:bodyPr wrap="square" rtlCol="0" anchor="ctr"/>
-          <a:lstStyle/>
-          <a:p>
-            <a:pPr marL="0" indent="0">
-              <a:buNone/>
-            </a:pPr>
-            <a:r>
-              <a:rPr lang="en-US" sz="1200" dirty="0">
-                <a:solidFill>
-                  <a:srgbClr val="FFFFFF"/>
-                </a:solidFill>
-              </a:rPr>
-              <a:t>Worker consome e executa a tarefa</a:t>
-            </a:r>
-            <a:endParaRPr lang="en-US" sz="1200" dirty="0"/>
-          </a:p>
-        </p:txBody>
-      </p:sp>
-      <p:sp>
-        <p:nvSpPr>
-          <p:cNvPr id="22" name="Text 20"/>
-          <p:cNvSpPr/>
-          <p:nvPr/>
-        </p:nvSpPr>
-        <p:spPr>
-          <a:xfrm>
-            <a:off x="3017520" y="3108960"/>
-            <a:ext cx="228600" cy="411480"/>
-          </a:xfrm>
-          <a:prstGeom prst="rect">
-            <a:avLst/>
-          </a:prstGeom>
-          <a:noFill/>
-          <a:ln/>
-        </p:spPr>
-        <p:txBody>
-          <a:bodyPr wrap="square" rtlCol="0" anchor="ctr"/>
-          <a:lstStyle/>
-          <a:p>
-            <a:pPr marL="0" indent="0" algn="ctr">
-              <a:buNone/>
-            </a:pPr>
-            <a:r>
-              <a:rPr lang="en-US" sz="1600" dirty="0">
-                <a:solidFill>
-                  <a:srgbClr val="8FA3B3"/>
-                </a:solidFill>
-              </a:rPr>
-              <a:t>→</a:t>
-            </a:r>
-            <a:endParaRPr lang="en-US" sz="1600" dirty="0"/>
-          </a:p>
-        </p:txBody>
-      </p:sp>
-      <p:sp>
-        <p:nvSpPr>
-          <p:cNvPr id="23" name="Shape 21"/>
-          <p:cNvSpPr/>
-          <p:nvPr/>
-        </p:nvSpPr>
-        <p:spPr>
-          <a:xfrm>
-            <a:off x="3200400" y="2651760"/>
-            <a:ext cx="2743200" cy="1325880"/>
-          </a:xfrm>
-          <a:prstGeom prst="rect">
-            <a:avLst/>
-          </a:prstGeom>
-          <a:solidFill>
-            <a:srgbClr val="112236"/>
-          </a:solidFill>
-          <a:ln w="19050">
-            <a:solidFill>
-              <a:srgbClr val="27AE60"/>
-            </a:solidFill>
-            <a:prstDash val="solid"/>
-          </a:ln>
-          <a:effectLst>
-            <a:outerShdw blurRad="101600" dist="38100" dir="8100000" algn="bl" rotWithShape="0">
-              <a:srgbClr val="000000">
-                <a:alpha val="18000"/>
-              </a:srgbClr>
-            </a:outerShdw>
-          </a:effectLst>
-        </p:spPr>
-        <p:txBody>
-          <a:bodyPr/>
-          <a:lstStyle/>
-          <a:p>
-            <a:endParaRPr lang="pt-PT"/>
-          </a:p>
-        </p:txBody>
-      </p:sp>
-      <p:sp>
-        <p:nvSpPr>
-          <p:cNvPr id="24" name="Shape 22"/>
-          <p:cNvSpPr/>
-          <p:nvPr/>
-        </p:nvSpPr>
-        <p:spPr>
-          <a:xfrm>
-            <a:off x="3291840" y="2743200"/>
-            <a:ext cx="502920" cy="502920"/>
-          </a:xfrm>
-          <a:prstGeom prst="ellipse">
-            <a:avLst/>
-          </a:prstGeom>
-          <a:solidFill>
-            <a:srgbClr val="27AE60"/>
-          </a:solidFill>
-          <a:ln w="12700">
-            <a:solidFill>
-              <a:srgbClr val="27AE60"/>
-            </a:solidFill>
-            <a:prstDash val="solid"/>
-          </a:ln>
-        </p:spPr>
-        <p:txBody>
-          <a:bodyPr/>
-          <a:lstStyle/>
-          <a:p>
-            <a:endParaRPr lang="pt-PT"/>
-          </a:p>
-        </p:txBody>
-      </p:sp>
-      <p:sp>
-        <p:nvSpPr>
-          <p:cNvPr id="25" name="Text 23"/>
-          <p:cNvSpPr/>
-          <p:nvPr/>
-        </p:nvSpPr>
-        <p:spPr>
-          <a:xfrm>
-            <a:off x="3291840" y="2743200"/>
-            <a:ext cx="502920" cy="502920"/>
-          </a:xfrm>
-          <a:prstGeom prst="rect">
-            <a:avLst/>
-          </a:prstGeom>
-          <a:noFill/>
-          <a:ln/>
-        </p:spPr>
-        <p:txBody>
-          <a:bodyPr wrap="square" lIns="0" tIns="0" rIns="0" bIns="0" rtlCol="0" anchor="ctr"/>
-          <a:lstStyle/>
-          <a:p>
-            <a:pPr marL="0" indent="0" algn="ctr">
-              <a:buNone/>
-            </a:pPr>
-            <a:r>
-              <a:rPr lang="en-US" sz="1600" b="1" dirty="0">
-                <a:solidFill>
-                  <a:srgbClr val="0D1B2A"/>
-                </a:solidFill>
-              </a:rPr>
-              <a:t>5</a:t>
-            </a:r>
-            <a:endParaRPr lang="en-US" sz="1600" dirty="0"/>
-          </a:p>
-        </p:txBody>
-      </p:sp>
-      <p:sp>
-        <p:nvSpPr>
-          <p:cNvPr id="26" name="Text 24"/>
-          <p:cNvSpPr/>
-          <p:nvPr/>
-        </p:nvSpPr>
-        <p:spPr>
-          <a:xfrm>
-            <a:off x="3886200" y="2724912"/>
-            <a:ext cx="1965960" cy="1097280"/>
-          </a:xfrm>
-          <a:prstGeom prst="rect">
-            <a:avLst/>
-          </a:prstGeom>
-          <a:noFill/>
-          <a:ln/>
-        </p:spPr>
-        <p:txBody>
-          <a:bodyPr wrap="square" rtlCol="0" anchor="ctr"/>
-          <a:lstStyle/>
-          <a:p>
-            <a:pPr marL="0" indent="0">
-              <a:buNone/>
-            </a:pPr>
-            <a:r>
-              <a:rPr lang="en-US" sz="1200" dirty="0">
-                <a:solidFill>
-                  <a:srgbClr val="FFFFFF"/>
-                </a:solidFill>
-              </a:rPr>
-              <a:t>Activity realiza a operação externa</a:t>
-            </a:r>
-            <a:endParaRPr lang="en-US" sz="1200" dirty="0"/>
-          </a:p>
-        </p:txBody>
-      </p:sp>
-      <p:sp>
-        <p:nvSpPr>
-          <p:cNvPr id="27" name="Text 25"/>
-          <p:cNvSpPr/>
-          <p:nvPr/>
-        </p:nvSpPr>
-        <p:spPr>
-          <a:xfrm>
-            <a:off x="5943600" y="3108960"/>
-            <a:ext cx="228600" cy="411480"/>
-          </a:xfrm>
-          <a:prstGeom prst="rect">
-            <a:avLst/>
-          </a:prstGeom>
-          <a:noFill/>
-          <a:ln/>
-        </p:spPr>
-        <p:txBody>
-          <a:bodyPr wrap="square" rtlCol="0" anchor="ctr"/>
-          <a:lstStyle/>
-          <a:p>
-            <a:pPr marL="0" indent="0" algn="ctr">
-              <a:buNone/>
-            </a:pPr>
-            <a:r>
-              <a:rPr lang="en-US" sz="1600" dirty="0">
-                <a:solidFill>
-                  <a:srgbClr val="8FA3B3"/>
-                </a:solidFill>
-              </a:rPr>
-              <a:t>→</a:t>
-            </a:r>
-            <a:endParaRPr lang="en-US" sz="1600" dirty="0"/>
-          </a:p>
-        </p:txBody>
-      </p:sp>
-      <p:sp>
-        <p:nvSpPr>
-          <p:cNvPr id="28" name="Shape 26"/>
-          <p:cNvSpPr/>
-          <p:nvPr/>
-        </p:nvSpPr>
-        <p:spPr>
-          <a:xfrm>
-            <a:off x="6126480" y="2651760"/>
-            <a:ext cx="2743200" cy="1325880"/>
-          </a:xfrm>
-          <a:prstGeom prst="rect">
-            <a:avLst/>
-          </a:prstGeom>
-          <a:solidFill>
-            <a:srgbClr val="112236"/>
-          </a:solidFill>
-          <a:ln w="19050">
-            <a:solidFill>
-              <a:srgbClr val="00D4AA"/>
-            </a:solidFill>
-            <a:prstDash val="solid"/>
-          </a:ln>
-          <a:effectLst>
-            <a:outerShdw blurRad="101600" dist="38100" dir="8100000" algn="bl" rotWithShape="0">
-              <a:srgbClr val="000000">
-                <a:alpha val="18000"/>
-              </a:srgbClr>
-            </a:outerShdw>
-          </a:effectLst>
-        </p:spPr>
-        <p:txBody>
-          <a:bodyPr/>
-          <a:lstStyle/>
-          <a:p>
-            <a:endParaRPr lang="pt-PT"/>
-          </a:p>
-        </p:txBody>
-      </p:sp>
-      <p:sp>
-        <p:nvSpPr>
-          <p:cNvPr id="29" name="Shape 27"/>
-          <p:cNvSpPr/>
-          <p:nvPr/>
-        </p:nvSpPr>
-        <p:spPr>
-          <a:xfrm>
-            <a:off x="6217920" y="2743200"/>
-            <a:ext cx="502920" cy="502920"/>
-          </a:xfrm>
-          <a:prstGeom prst="ellipse">
-            <a:avLst/>
-          </a:prstGeom>
-          <a:solidFill>
-            <a:srgbClr val="00D4AA"/>
-          </a:solidFill>
-          <a:ln w="12700">
-            <a:solidFill>
-              <a:srgbClr val="00D4AA"/>
-            </a:solidFill>
-            <a:prstDash val="solid"/>
-          </a:ln>
-        </p:spPr>
-        <p:txBody>
-          <a:bodyPr/>
-          <a:lstStyle/>
-          <a:p>
-            <a:endParaRPr lang="pt-PT"/>
-          </a:p>
-        </p:txBody>
-      </p:sp>
-      <p:sp>
-        <p:nvSpPr>
-          <p:cNvPr id="30" name="Text 28"/>
-          <p:cNvSpPr/>
-          <p:nvPr/>
-        </p:nvSpPr>
-        <p:spPr>
-          <a:xfrm>
-            <a:off x="6217920" y="2743200"/>
-            <a:ext cx="502920" cy="502920"/>
-          </a:xfrm>
-          <a:prstGeom prst="rect">
-            <a:avLst/>
-          </a:prstGeom>
-          <a:noFill/>
-          <a:ln/>
-        </p:spPr>
-        <p:txBody>
-          <a:bodyPr wrap="square" lIns="0" tIns="0" rIns="0" bIns="0" rtlCol="0" anchor="ctr"/>
-          <a:lstStyle/>
-          <a:p>
-            <a:pPr marL="0" indent="0" algn="ctr">
-              <a:buNone/>
-            </a:pPr>
-            <a:r>
-              <a:rPr lang="en-US" sz="1600" b="1" dirty="0">
-                <a:solidFill>
-                  <a:srgbClr val="0D1B2A"/>
-                </a:solidFill>
-              </a:rPr>
-              <a:t>6</a:t>
-            </a:r>
-            <a:endParaRPr lang="en-US" sz="1600" dirty="0"/>
-          </a:p>
-        </p:txBody>
-      </p:sp>
-      <p:sp>
-        <p:nvSpPr>
-          <p:cNvPr id="31" name="Text 29"/>
-          <p:cNvSpPr/>
-          <p:nvPr/>
-        </p:nvSpPr>
-        <p:spPr>
-          <a:xfrm>
-            <a:off x="6812280" y="2724912"/>
-            <a:ext cx="1965960" cy="1097280"/>
-          </a:xfrm>
-          <a:prstGeom prst="rect">
-            <a:avLst/>
-          </a:prstGeom>
-          <a:noFill/>
-          <a:ln/>
-        </p:spPr>
-        <p:txBody>
-          <a:bodyPr wrap="square" rtlCol="0" anchor="ctr"/>
-          <a:lstStyle/>
-          <a:p>
-            <a:pPr marL="0" indent="0">
-              <a:buNone/>
-            </a:pPr>
-            <a:r>
-              <a:rPr lang="en-US" sz="1200" dirty="0">
-                <a:solidFill>
-                  <a:srgbClr val="FFFFFF"/>
-                </a:solidFill>
-              </a:rPr>
-              <a:t>Resultado retorna e histórico atualiza</a:t>
-            </a:r>
-            <a:endParaRPr lang="en-US" sz="1200" dirty="0"/>
-          </a:p>
-        </p:txBody>
-      </p:sp>
-      <p:sp>
-        <p:nvSpPr>
-          <p:cNvPr id="32" name="Shape 30"/>
-          <p:cNvSpPr/>
-          <p:nvPr/>
-        </p:nvSpPr>
-        <p:spPr>
-          <a:xfrm>
-            <a:off x="274320" y="4434840"/>
-            <a:ext cx="8595360" cy="457200"/>
-          </a:xfrm>
-          <a:prstGeom prst="rect">
-            <a:avLst/>
-          </a:prstGeom>
-          <a:solidFill>
-            <a:srgbClr val="1B6CA8"/>
-          </a:solidFill>
-          <a:ln w="12700">
-            <a:solidFill>
-              <a:srgbClr val="1B6CA8"/>
-            </a:solidFill>
-            <a:prstDash val="solid"/>
-          </a:ln>
-        </p:spPr>
-        <p:txBody>
-          <a:bodyPr/>
-          <a:lstStyle/>
-          <a:p>
-            <a:endParaRPr lang="pt-PT"/>
-          </a:p>
-        </p:txBody>
-      </p:sp>
-      <p:sp>
-        <p:nvSpPr>
-          <p:cNvPr id="33" name="Text 31"/>
-          <p:cNvSpPr/>
-          <p:nvPr/>
-        </p:nvSpPr>
-        <p:spPr>
-          <a:xfrm>
-            <a:off x="457200" y="4434840"/>
-            <a:ext cx="8229600" cy="457200"/>
-          </a:xfrm>
-          <a:prstGeom prst="rect">
-            <a:avLst/>
-          </a:prstGeom>
-          <a:noFill/>
-          <a:ln/>
-        </p:spPr>
-        <p:txBody>
-          <a:bodyPr wrap="square" rtlCol="0" anchor="ctr"/>
-          <a:lstStyle/>
-          <a:p>
-            <a:pPr marL="0" indent="0">
-              <a:buNone/>
-            </a:pPr>
-            <a:r>
-              <a:rPr lang="en-US" sz="1100" i="1" dirty="0">
-                <a:solidFill>
-                  <a:srgbClr val="FFFFFF"/>
-                </a:solidFill>
-              </a:rPr>
-              <a:t>🔄  Em caso de falha: Temporal aplica Retry Policies e retoma a execução com base no histórico de eventos.</a:t>
-            </a:r>
-            <a:endParaRPr lang="en-US" sz="1100" dirty="0"/>
-          </a:p>
-        </p:txBody>
-      </p:sp>
-    </p:spTree>
-  </p:cSld>
-  <p:clrMapOvr>
-    <a:masterClrMapping/>
-  </p:clrMapOvr>
-</p:sld>
-</file>
-
-<file path=ppt/slides/slide11.xml><?xml version="1.0" encoding="utf-8"?>
 <p:sld xmlns:a="http://schemas.openxmlformats.org/drawingml/2006/main" xmlns:r="http://schemas.openxmlformats.org/officeDocument/2006/relationships" xmlns:p="http://schemas.openxmlformats.org/presentationml/2006/main">
   <p:cSld name="Slide 11">
     <p:bg>
@@ -3265,7 +2095,7 @@
                   <a:srgbClr val="FFFFFF"/>
                 </a:solidFill>
               </a:rPr>
-              <a:t>06  /  Conclusão</a:t>
+              <a:t>08  /  Conclusão</a:t>
             </a:r>
             <a:endParaRPr lang="en-US" sz="2400" dirty="0"/>
           </a:p>
@@ -3820,7 +2650,7 @@
 </p:sld>
 </file>
 
-<file path=ppt/slides/slide12.xml><?xml version="1.0" encoding="utf-8"?>
+<file path=ppt/slides/slide11.xml><?xml version="1.0" encoding="utf-8"?>
 <p:sld xmlns:a="http://schemas.openxmlformats.org/drawingml/2006/main" xmlns:r="http://schemas.openxmlformats.org/officeDocument/2006/relationships" xmlns:p="http://schemas.openxmlformats.org/presentationml/2006/main">
   <p:cSld name="Slide 12">
     <p:bg>
@@ -4369,7 +3199,7 @@
         </p:nvSpPr>
         <p:spPr>
           <a:xfrm>
-            <a:off x="457200" y="1143000"/>
+            <a:off x="457200" y="2057404"/>
             <a:ext cx="4114800" cy="777240"/>
           </a:xfrm>
           <a:prstGeom prst="rect">
@@ -4408,7 +3238,7 @@
         </p:nvSpPr>
         <p:spPr>
           <a:xfrm>
-            <a:off x="457200" y="1143000"/>
+            <a:off x="457200" y="2057404"/>
             <a:ext cx="502920" cy="777240"/>
           </a:xfrm>
           <a:prstGeom prst="rect">
@@ -4440,7 +3270,7 @@
         </p:nvSpPr>
         <p:spPr>
           <a:xfrm>
-            <a:off x="457200" y="1143000"/>
+            <a:off x="457200" y="2057404"/>
             <a:ext cx="502920" cy="777240"/>
           </a:xfrm>
           <a:prstGeom prst="rect">
@@ -4462,7 +3292,7 @@
                   <a:srgbClr val="0D1B2A"/>
                 </a:solidFill>
               </a:rPr>
-              <a:t>01</a:t>
+              <a:t>02</a:t>
             </a:r>
             <a:endParaRPr lang="en-US" sz="1300" dirty="0"/>
           </a:p>
@@ -4476,7 +3306,7 @@
         </p:nvSpPr>
         <p:spPr>
           <a:xfrm>
-            <a:off x="1051560" y="1143000"/>
+            <a:off x="1051560" y="2057404"/>
             <a:ext cx="3429000" cy="777240"/>
           </a:xfrm>
           <a:prstGeom prst="rect">
@@ -4512,7 +3342,7 @@
         </p:nvSpPr>
         <p:spPr>
           <a:xfrm>
-            <a:off x="457200" y="2286000"/>
+            <a:off x="457200" y="3032409"/>
             <a:ext cx="4114800" cy="777240"/>
           </a:xfrm>
           <a:prstGeom prst="rect">
@@ -4551,7 +3381,7 @@
         </p:nvSpPr>
         <p:spPr>
           <a:xfrm>
-            <a:off x="457200" y="2286000"/>
+            <a:off x="457200" y="3032409"/>
             <a:ext cx="502920" cy="777240"/>
           </a:xfrm>
           <a:prstGeom prst="rect">
@@ -4583,7 +3413,7 @@
         </p:nvSpPr>
         <p:spPr>
           <a:xfrm>
-            <a:off x="457200" y="2286000"/>
+            <a:off x="457200" y="3032409"/>
             <a:ext cx="502920" cy="777240"/>
           </a:xfrm>
           <a:prstGeom prst="rect">
@@ -4605,7 +3435,7 @@
                   <a:srgbClr val="0D1B2A"/>
                 </a:solidFill>
               </a:rPr>
-              <a:t>02</a:t>
+              <a:t>03</a:t>
             </a:r>
             <a:endParaRPr lang="en-US" sz="1300" dirty="0"/>
           </a:p>
@@ -4619,7 +3449,7 @@
         </p:nvSpPr>
         <p:spPr>
           <a:xfrm>
-            <a:off x="1051560" y="2286000"/>
+            <a:off x="1051560" y="3032409"/>
             <a:ext cx="3429000" cy="777240"/>
           </a:xfrm>
           <a:prstGeom prst="rect">
@@ -4655,7 +3485,7 @@
         </p:nvSpPr>
         <p:spPr>
           <a:xfrm>
-            <a:off x="457200" y="3429000"/>
+            <a:off x="457200" y="4024280"/>
             <a:ext cx="4114800" cy="777240"/>
           </a:xfrm>
           <a:prstGeom prst="rect">
@@ -4694,7 +3524,7 @@
         </p:nvSpPr>
         <p:spPr>
           <a:xfrm>
-            <a:off x="457200" y="3429000"/>
+            <a:off x="457200" y="4024280"/>
             <a:ext cx="502920" cy="777240"/>
           </a:xfrm>
           <a:prstGeom prst="rect">
@@ -4726,7 +3556,7 @@
         </p:nvSpPr>
         <p:spPr>
           <a:xfrm>
-            <a:off x="457200" y="3429000"/>
+            <a:off x="457200" y="4024280"/>
             <a:ext cx="502920" cy="777240"/>
           </a:xfrm>
           <a:prstGeom prst="rect">
@@ -4748,7 +3578,7 @@
                   <a:srgbClr val="0D1B2A"/>
                 </a:solidFill>
               </a:rPr>
-              <a:t>03</a:t>
+              <a:t>04</a:t>
             </a:r>
             <a:endParaRPr lang="en-US" sz="1300" dirty="0"/>
           </a:p>
@@ -4762,7 +3592,7 @@
         </p:nvSpPr>
         <p:spPr>
           <a:xfrm>
-            <a:off x="1051560" y="3429000"/>
+            <a:off x="1051560" y="4024280"/>
             <a:ext cx="3429000" cy="777240"/>
           </a:xfrm>
           <a:prstGeom prst="rect">
@@ -4798,7 +3628,7 @@
         </p:nvSpPr>
         <p:spPr>
           <a:xfrm>
-            <a:off x="4846320" y="1143000"/>
+            <a:off x="4827909" y="1109556"/>
             <a:ext cx="4114800" cy="777240"/>
           </a:xfrm>
           <a:prstGeom prst="rect">
@@ -4837,7 +3667,7 @@
         </p:nvSpPr>
         <p:spPr>
           <a:xfrm>
-            <a:off x="4846320" y="1143000"/>
+            <a:off x="4827909" y="1109556"/>
             <a:ext cx="502920" cy="777240"/>
           </a:xfrm>
           <a:prstGeom prst="rect">
@@ -4869,7 +3699,7 @@
         </p:nvSpPr>
         <p:spPr>
           <a:xfrm>
-            <a:off x="4846320" y="1143000"/>
+            <a:off x="4827909" y="1109556"/>
             <a:ext cx="502920" cy="777240"/>
           </a:xfrm>
           <a:prstGeom prst="rect">
@@ -4891,7 +3721,7 @@
                   <a:srgbClr val="0D1B2A"/>
                 </a:solidFill>
               </a:rPr>
-              <a:t>04</a:t>
+              <a:t>05</a:t>
             </a:r>
             <a:endParaRPr lang="en-US" sz="1300" dirty="0"/>
           </a:p>
@@ -4905,7 +3735,7 @@
         </p:nvSpPr>
         <p:spPr>
           <a:xfrm>
-            <a:off x="5440680" y="1143000"/>
+            <a:off x="5422269" y="1109556"/>
             <a:ext cx="3429000" cy="777240"/>
           </a:xfrm>
           <a:prstGeom prst="rect">
@@ -4941,7 +3771,7 @@
         </p:nvSpPr>
         <p:spPr>
           <a:xfrm>
-            <a:off x="4846320" y="2286000"/>
+            <a:off x="4827909" y="2057404"/>
             <a:ext cx="4114800" cy="777240"/>
           </a:xfrm>
           <a:prstGeom prst="rect">
@@ -4980,7 +3810,7 @@
         </p:nvSpPr>
         <p:spPr>
           <a:xfrm>
-            <a:off x="4846320" y="2286000"/>
+            <a:off x="4827909" y="2057404"/>
             <a:ext cx="502920" cy="777240"/>
           </a:xfrm>
           <a:prstGeom prst="rect">
@@ -5012,7 +3842,7 @@
         </p:nvSpPr>
         <p:spPr>
           <a:xfrm>
-            <a:off x="4846320" y="2286000"/>
+            <a:off x="4827909" y="2057404"/>
             <a:ext cx="502920" cy="777240"/>
           </a:xfrm>
           <a:prstGeom prst="rect">
@@ -5034,7 +3864,7 @@
                   <a:srgbClr val="0D1B2A"/>
                 </a:solidFill>
               </a:rPr>
-              <a:t>05</a:t>
+              <a:t>06</a:t>
             </a:r>
             <a:endParaRPr lang="en-US" sz="1300" dirty="0"/>
           </a:p>
@@ -5048,7 +3878,7 @@
         </p:nvSpPr>
         <p:spPr>
           <a:xfrm>
-            <a:off x="5440680" y="2286000"/>
+            <a:off x="5422269" y="2057404"/>
             <a:ext cx="3429000" cy="777240"/>
           </a:xfrm>
           <a:prstGeom prst="rect">
@@ -5084,7 +3914,7 @@
         </p:nvSpPr>
         <p:spPr>
           <a:xfrm>
-            <a:off x="4846320" y="3429000"/>
+            <a:off x="4827909" y="4024280"/>
             <a:ext cx="4114800" cy="777240"/>
           </a:xfrm>
           <a:prstGeom prst="rect">
@@ -5123,7 +3953,7 @@
         </p:nvSpPr>
         <p:spPr>
           <a:xfrm>
-            <a:off x="4846320" y="3429000"/>
+            <a:off x="4827909" y="4024280"/>
             <a:ext cx="502920" cy="777240"/>
           </a:xfrm>
           <a:prstGeom prst="rect">
@@ -5155,7 +3985,7 @@
         </p:nvSpPr>
         <p:spPr>
           <a:xfrm>
-            <a:off x="4846320" y="3429000"/>
+            <a:off x="4827909" y="4024280"/>
             <a:ext cx="502920" cy="777240"/>
           </a:xfrm>
           <a:prstGeom prst="rect">
@@ -5177,7 +4007,7 @@
                   <a:srgbClr val="0D1B2A"/>
                 </a:solidFill>
               </a:rPr>
-              <a:t>06</a:t>
+              <a:t>08</a:t>
             </a:r>
             <a:endParaRPr lang="en-US" sz="1300" dirty="0"/>
           </a:p>
@@ -5191,7 +4021,7 @@
         </p:nvSpPr>
         <p:spPr>
           <a:xfrm>
-            <a:off x="5440680" y="3429000"/>
+            <a:off x="5422269" y="4024280"/>
             <a:ext cx="3429000" cy="777240"/>
           </a:xfrm>
           <a:prstGeom prst="rect">
@@ -5214,6 +4044,388 @@
                 </a:solidFill>
               </a:rPr>
               <a:t>Conclusão</a:t>
+            </a:r>
+            <a:endParaRPr lang="en-US" sz="1300" dirty="0"/>
+          </a:p>
+        </p:txBody>
+      </p:sp>
+      <p:sp>
+        <p:nvSpPr>
+          <p:cNvPr id="28" name="Shape 2">
+            <a:extLst>
+              <a:ext uri="{FF2B5EF4-FFF2-40B4-BE49-F238E27FC236}">
+                <a16:creationId xmlns:a16="http://schemas.microsoft.com/office/drawing/2014/main" id="{5C4D2458-67BC-CF49-68D1-8A9C12353956}"/>
+              </a:ext>
+            </a:extLst>
+          </p:cNvPr>
+          <p:cNvSpPr/>
+          <p:nvPr/>
+        </p:nvSpPr>
+        <p:spPr>
+          <a:xfrm>
+            <a:off x="457200" y="1109556"/>
+            <a:ext cx="4114800" cy="777240"/>
+          </a:xfrm>
+          <a:prstGeom prst="rect">
+            <a:avLst/>
+          </a:prstGeom>
+          <a:solidFill>
+            <a:srgbClr val="112236"/>
+          </a:solidFill>
+          <a:ln w="12700">
+            <a:solidFill>
+              <a:srgbClr val="1B6CA8"/>
+            </a:solidFill>
+            <a:prstDash val="solid"/>
+          </a:ln>
+          <a:effectLst>
+            <a:outerShdw blurRad="101600" dist="38100" dir="8100000" algn="bl" rotWithShape="0">
+              <a:srgbClr val="000000">
+                <a:alpha val="18000"/>
+              </a:srgbClr>
+            </a:outerShdw>
+          </a:effectLst>
+        </p:spPr>
+        <p:txBody>
+          <a:bodyPr/>
+          <a:lstStyle/>
+          <a:p>
+            <a:endParaRPr lang="pt-PT"/>
+          </a:p>
+        </p:txBody>
+      </p:sp>
+      <p:sp>
+        <p:nvSpPr>
+          <p:cNvPr id="29" name="Shape 3">
+            <a:extLst>
+              <a:ext uri="{FF2B5EF4-FFF2-40B4-BE49-F238E27FC236}">
+                <a16:creationId xmlns:a16="http://schemas.microsoft.com/office/drawing/2014/main" id="{43C841EB-DA9C-D22B-FE3B-BD712033BAE7}"/>
+              </a:ext>
+            </a:extLst>
+          </p:cNvPr>
+          <p:cNvSpPr/>
+          <p:nvPr/>
+        </p:nvSpPr>
+        <p:spPr>
+          <a:xfrm>
+            <a:off x="457200" y="1109556"/>
+            <a:ext cx="502920" cy="777240"/>
+          </a:xfrm>
+          <a:prstGeom prst="rect">
+            <a:avLst/>
+          </a:prstGeom>
+          <a:solidFill>
+            <a:srgbClr val="00D4AA"/>
+          </a:solidFill>
+          <a:ln w="12700">
+            <a:solidFill>
+              <a:srgbClr val="00D4AA"/>
+            </a:solidFill>
+            <a:prstDash val="solid"/>
+          </a:ln>
+        </p:spPr>
+        <p:txBody>
+          <a:bodyPr/>
+          <a:lstStyle/>
+          <a:p>
+            <a:endParaRPr lang="pt-PT"/>
+          </a:p>
+        </p:txBody>
+      </p:sp>
+      <p:sp>
+        <p:nvSpPr>
+          <p:cNvPr id="30" name="Text 4">
+            <a:extLst>
+              <a:ext uri="{FF2B5EF4-FFF2-40B4-BE49-F238E27FC236}">
+                <a16:creationId xmlns:a16="http://schemas.microsoft.com/office/drawing/2014/main" id="{F64EF508-75AC-41CF-A13C-038D47275BE0}"/>
+              </a:ext>
+            </a:extLst>
+          </p:cNvPr>
+          <p:cNvSpPr/>
+          <p:nvPr/>
+        </p:nvSpPr>
+        <p:spPr>
+          <a:xfrm>
+            <a:off x="457200" y="1109556"/>
+            <a:ext cx="502920" cy="777240"/>
+          </a:xfrm>
+          <a:prstGeom prst="rect">
+            <a:avLst/>
+          </a:prstGeom>
+          <a:noFill/>
+          <a:ln/>
+        </p:spPr>
+        <p:txBody>
+          <a:bodyPr wrap="square" lIns="0" tIns="0" rIns="0" bIns="0" rtlCol="0" anchor="ctr"/>
+          <a:lstStyle/>
+          <a:p>
+            <a:pPr marL="0" indent="0" algn="ctr">
+              <a:buNone/>
+            </a:pPr>
+            <a:r>
+              <a:rPr lang="en-US" sz="1300" b="1" dirty="0">
+                <a:solidFill>
+                  <a:srgbClr val="0D1B2A"/>
+                </a:solidFill>
+              </a:rPr>
+              <a:t>01</a:t>
+            </a:r>
+            <a:endParaRPr lang="en-US" sz="1300" dirty="0"/>
+          </a:p>
+        </p:txBody>
+      </p:sp>
+      <p:sp>
+        <p:nvSpPr>
+          <p:cNvPr id="31" name="Text 5">
+            <a:extLst>
+              <a:ext uri="{FF2B5EF4-FFF2-40B4-BE49-F238E27FC236}">
+                <a16:creationId xmlns:a16="http://schemas.microsoft.com/office/drawing/2014/main" id="{7AD72CAE-54EC-B2B1-FF83-49ED8067E2D0}"/>
+              </a:ext>
+            </a:extLst>
+          </p:cNvPr>
+          <p:cNvSpPr/>
+          <p:nvPr/>
+        </p:nvSpPr>
+        <p:spPr>
+          <a:xfrm>
+            <a:off x="1051560" y="1109556"/>
+            <a:ext cx="3429000" cy="777240"/>
+          </a:xfrm>
+          <a:prstGeom prst="rect">
+            <a:avLst/>
+          </a:prstGeom>
+          <a:noFill/>
+          <a:ln/>
+        </p:spPr>
+        <p:txBody>
+          <a:bodyPr wrap="square" lIns="0" tIns="0" rIns="0" bIns="0" rtlCol="0" anchor="ctr"/>
+          <a:lstStyle/>
+          <a:p>
+            <a:pPr marL="0" indent="0">
+              <a:buNone/>
+            </a:pPr>
+            <a:r>
+              <a:rPr lang="en-US" sz="1400" dirty="0" err="1">
+                <a:solidFill>
+                  <a:srgbClr val="FFFFFF"/>
+                </a:solidFill>
+              </a:rPr>
+              <a:t>Problema</a:t>
+            </a:r>
+            <a:r>
+              <a:rPr lang="en-US" sz="1400" dirty="0">
+                <a:solidFill>
+                  <a:srgbClr val="FFFFFF"/>
+                </a:solidFill>
+              </a:rPr>
+              <a:t> real </a:t>
+            </a:r>
+            <a:r>
+              <a:rPr lang="en-US" sz="1400" dirty="0" err="1">
+                <a:solidFill>
+                  <a:srgbClr val="FFFFFF"/>
+                </a:solidFill>
+              </a:rPr>
+              <a:t>nos</a:t>
+            </a:r>
+            <a:r>
+              <a:rPr lang="en-US" sz="1400" dirty="0">
+                <a:solidFill>
+                  <a:srgbClr val="FFFFFF"/>
+                </a:solidFill>
+              </a:rPr>
+              <a:t> </a:t>
+            </a:r>
+            <a:r>
+              <a:rPr lang="en-US" sz="1400" dirty="0" err="1">
+                <a:solidFill>
+                  <a:srgbClr val="FFFFFF"/>
+                </a:solidFill>
+              </a:rPr>
+              <a:t>microservicos</a:t>
+            </a:r>
+            <a:endParaRPr lang="en-US" sz="1300" dirty="0"/>
+          </a:p>
+        </p:txBody>
+      </p:sp>
+      <p:sp>
+        <p:nvSpPr>
+          <p:cNvPr id="32" name="Shape 22">
+            <a:extLst>
+              <a:ext uri="{FF2B5EF4-FFF2-40B4-BE49-F238E27FC236}">
+                <a16:creationId xmlns:a16="http://schemas.microsoft.com/office/drawing/2014/main" id="{B9B62BC8-2C92-204C-5751-3A55496DD050}"/>
+              </a:ext>
+            </a:extLst>
+          </p:cNvPr>
+          <p:cNvSpPr/>
+          <p:nvPr/>
+        </p:nvSpPr>
+        <p:spPr>
+          <a:xfrm>
+            <a:off x="4827909" y="3040842"/>
+            <a:ext cx="4114800" cy="777240"/>
+          </a:xfrm>
+          <a:prstGeom prst="rect">
+            <a:avLst/>
+          </a:prstGeom>
+          <a:solidFill>
+            <a:srgbClr val="112236"/>
+          </a:solidFill>
+          <a:ln w="12700">
+            <a:solidFill>
+              <a:srgbClr val="1B6CA8"/>
+            </a:solidFill>
+            <a:prstDash val="solid"/>
+          </a:ln>
+          <a:effectLst>
+            <a:outerShdw blurRad="101600" dist="38100" dir="8100000" algn="bl" rotWithShape="0">
+              <a:srgbClr val="000000">
+                <a:alpha val="18000"/>
+              </a:srgbClr>
+            </a:outerShdw>
+          </a:effectLst>
+        </p:spPr>
+        <p:txBody>
+          <a:bodyPr/>
+          <a:lstStyle/>
+          <a:p>
+            <a:endParaRPr lang="pt-PT"/>
+          </a:p>
+        </p:txBody>
+      </p:sp>
+      <p:sp>
+        <p:nvSpPr>
+          <p:cNvPr id="33" name="Shape 23">
+            <a:extLst>
+              <a:ext uri="{FF2B5EF4-FFF2-40B4-BE49-F238E27FC236}">
+                <a16:creationId xmlns:a16="http://schemas.microsoft.com/office/drawing/2014/main" id="{1055CE5D-DD06-D85A-A5FA-5D56813A3D1F}"/>
+              </a:ext>
+            </a:extLst>
+          </p:cNvPr>
+          <p:cNvSpPr/>
+          <p:nvPr/>
+        </p:nvSpPr>
+        <p:spPr>
+          <a:xfrm>
+            <a:off x="4827909" y="3040842"/>
+            <a:ext cx="502920" cy="777240"/>
+          </a:xfrm>
+          <a:prstGeom prst="rect">
+            <a:avLst/>
+          </a:prstGeom>
+          <a:solidFill>
+            <a:srgbClr val="00D4AA"/>
+          </a:solidFill>
+          <a:ln w="12700">
+            <a:solidFill>
+              <a:srgbClr val="00D4AA"/>
+            </a:solidFill>
+            <a:prstDash val="solid"/>
+          </a:ln>
+        </p:spPr>
+        <p:txBody>
+          <a:bodyPr/>
+          <a:lstStyle/>
+          <a:p>
+            <a:endParaRPr lang="pt-PT"/>
+          </a:p>
+        </p:txBody>
+      </p:sp>
+      <p:sp>
+        <p:nvSpPr>
+          <p:cNvPr id="34" name="Text 24">
+            <a:extLst>
+              <a:ext uri="{FF2B5EF4-FFF2-40B4-BE49-F238E27FC236}">
+                <a16:creationId xmlns:a16="http://schemas.microsoft.com/office/drawing/2014/main" id="{28FAF75B-0DEC-195B-6F50-CC07442083C4}"/>
+              </a:ext>
+            </a:extLst>
+          </p:cNvPr>
+          <p:cNvSpPr/>
+          <p:nvPr/>
+        </p:nvSpPr>
+        <p:spPr>
+          <a:xfrm>
+            <a:off x="4827909" y="3040842"/>
+            <a:ext cx="502920" cy="777240"/>
+          </a:xfrm>
+          <a:prstGeom prst="rect">
+            <a:avLst/>
+          </a:prstGeom>
+          <a:noFill/>
+          <a:ln/>
+        </p:spPr>
+        <p:txBody>
+          <a:bodyPr wrap="square" lIns="0" tIns="0" rIns="0" bIns="0" rtlCol="0" anchor="ctr"/>
+          <a:lstStyle/>
+          <a:p>
+            <a:pPr marL="0" indent="0" algn="ctr">
+              <a:buNone/>
+            </a:pPr>
+            <a:r>
+              <a:rPr lang="en-US" sz="1300" b="1" dirty="0">
+                <a:solidFill>
+                  <a:srgbClr val="0D1B2A"/>
+                </a:solidFill>
+              </a:rPr>
+              <a:t>07</a:t>
+            </a:r>
+            <a:endParaRPr lang="en-US" sz="1300" dirty="0"/>
+          </a:p>
+        </p:txBody>
+      </p:sp>
+      <p:sp>
+        <p:nvSpPr>
+          <p:cNvPr id="35" name="Text 25">
+            <a:extLst>
+              <a:ext uri="{FF2B5EF4-FFF2-40B4-BE49-F238E27FC236}">
+                <a16:creationId xmlns:a16="http://schemas.microsoft.com/office/drawing/2014/main" id="{99E27ED4-2EFD-DFBC-533E-0BF386098700}"/>
+              </a:ext>
+            </a:extLst>
+          </p:cNvPr>
+          <p:cNvSpPr/>
+          <p:nvPr/>
+        </p:nvSpPr>
+        <p:spPr>
+          <a:xfrm>
+            <a:off x="5422269" y="3040842"/>
+            <a:ext cx="3429000" cy="777240"/>
+          </a:xfrm>
+          <a:prstGeom prst="rect">
+            <a:avLst/>
+          </a:prstGeom>
+          <a:noFill/>
+          <a:ln/>
+        </p:spPr>
+        <p:txBody>
+          <a:bodyPr wrap="square" lIns="0" tIns="0" rIns="0" bIns="0" rtlCol="0" anchor="ctr"/>
+          <a:lstStyle/>
+          <a:p>
+            <a:pPr marL="0" indent="0">
+              <a:buNone/>
+            </a:pPr>
+            <a:r>
+              <a:rPr lang="en-US" sz="1300" dirty="0" err="1">
+                <a:solidFill>
+                  <a:srgbClr val="FFFFFF"/>
+                </a:solidFill>
+              </a:rPr>
+              <a:t>Fluxo</a:t>
+            </a:r>
+            <a:r>
+              <a:rPr lang="en-US" sz="1300" dirty="0">
+                <a:solidFill>
+                  <a:srgbClr val="FFFFFF"/>
+                </a:solidFill>
+              </a:rPr>
+              <a:t> de </a:t>
+            </a:r>
+            <a:r>
+              <a:rPr lang="en-US" sz="1300" dirty="0" err="1">
+                <a:solidFill>
+                  <a:srgbClr val="FFFFFF"/>
+                </a:solidFill>
+              </a:rPr>
+              <a:t>Execução</a:t>
             </a:r>
             <a:endParaRPr lang="en-US" sz="1300" dirty="0"/>
           </a:p>
@@ -5280,6 +4492,44 @@
       </p:grpSpPr>
       <p:sp>
         <p:nvSpPr>
+          <p:cNvPr id="26" name="Shape 3">
+            <a:extLst>
+              <a:ext uri="{FF2B5EF4-FFF2-40B4-BE49-F238E27FC236}">
+                <a16:creationId xmlns:a16="http://schemas.microsoft.com/office/drawing/2014/main" id="{55CD4805-F19C-31F2-A9D5-965B2ACEE397}"/>
+              </a:ext>
+            </a:extLst>
+          </p:cNvPr>
+          <p:cNvSpPr/>
+          <p:nvPr/>
+        </p:nvSpPr>
+        <p:spPr>
+          <a:xfrm>
+            <a:off x="296342" y="1029778"/>
+            <a:ext cx="3818458" cy="457200"/>
+          </a:xfrm>
+          <a:prstGeom prst="rect">
+            <a:avLst/>
+          </a:prstGeom>
+          <a:solidFill>
+            <a:srgbClr val="00D4AA"/>
+          </a:solidFill>
+          <a:ln w="12700">
+            <a:solidFill>
+              <a:srgbClr val="00D4AA"/>
+            </a:solidFill>
+            <a:prstDash val="solid"/>
+          </a:ln>
+        </p:spPr>
+        <p:txBody>
+          <a:bodyPr/>
+          <a:lstStyle/>
+          <a:p>
+            <a:endParaRPr lang="pt-PT" dirty="0"/>
+          </a:p>
+        </p:txBody>
+      </p:sp>
+      <p:sp>
+        <p:nvSpPr>
           <p:cNvPr id="2" name="Shape 0"/>
           <p:cNvSpPr/>
           <p:nvPr/>
@@ -5340,7 +4590,47 @@
                   <a:srgbClr val="FFFFFF"/>
                 </a:solidFill>
               </a:rPr>
-              <a:t>01  /  O que é o Temporal IO?</a:t>
+              <a:t>01  /  </a:t>
+            </a:r>
+            <a:r>
+              <a:rPr lang="en-US" sz="2400" b="1" dirty="0" err="1">
+                <a:solidFill>
+                  <a:srgbClr val="FFFFFF"/>
+                </a:solidFill>
+              </a:rPr>
+              <a:t>Problema</a:t>
+            </a:r>
+            <a:r>
+              <a:rPr lang="en-US" sz="2400" b="1" dirty="0">
+                <a:solidFill>
+                  <a:srgbClr val="FFFFFF"/>
+                </a:solidFill>
+              </a:rPr>
+              <a:t> real </a:t>
+            </a:r>
+            <a:r>
+              <a:rPr lang="en-US" sz="2400" b="1" dirty="0" err="1">
+                <a:solidFill>
+                  <a:srgbClr val="FFFFFF"/>
+                </a:solidFill>
+              </a:rPr>
+              <a:t>nos</a:t>
+            </a:r>
+            <a:r>
+              <a:rPr lang="en-US" sz="2400" b="1" dirty="0">
+                <a:solidFill>
+                  <a:srgbClr val="FFFFFF"/>
+                </a:solidFill>
+              </a:rPr>
+              <a:t> </a:t>
+            </a:r>
+            <a:r>
+              <a:rPr lang="en-US" sz="2400" b="1" dirty="0" err="1">
+                <a:solidFill>
+                  <a:srgbClr val="FFFFFF"/>
+                </a:solidFill>
+              </a:rPr>
+              <a:t>microservicos</a:t>
             </a:r>
             <a:endParaRPr lang="en-US" sz="2400" dirty="0"/>
           </a:p>
@@ -5354,8 +4644,8 @@
         </p:nvSpPr>
         <p:spPr>
           <a:xfrm>
-            <a:off x="365760" y="960120"/>
-            <a:ext cx="8412480" cy="1371600"/>
+            <a:off x="296342" y="1488239"/>
+            <a:ext cx="3818458" cy="1132223"/>
           </a:xfrm>
           <a:prstGeom prst="rect">
             <a:avLst/>
@@ -5387,14 +4677,410 @@
       </p:sp>
       <p:sp>
         <p:nvSpPr>
-          <p:cNvPr id="5" name="Text 3"/>
+          <p:cNvPr id="25" name="Text 3">
+            <a:extLst>
+              <a:ext uri="{FF2B5EF4-FFF2-40B4-BE49-F238E27FC236}">
+                <a16:creationId xmlns:a16="http://schemas.microsoft.com/office/drawing/2014/main" id="{3C112B80-1565-C23F-AECD-9BD6AE8FE229}"/>
+              </a:ext>
+            </a:extLst>
+          </p:cNvPr>
+          <p:cNvSpPr/>
+          <p:nvPr/>
+        </p:nvSpPr>
+        <p:spPr>
+          <a:xfrm>
+            <a:off x="457200" y="1595604"/>
+            <a:ext cx="3254644" cy="834613"/>
+          </a:xfrm>
+          <a:prstGeom prst="rect">
+            <a:avLst/>
+          </a:prstGeom>
+          <a:noFill/>
+          <a:ln/>
+        </p:spPr>
+        <p:txBody>
+          <a:bodyPr wrap="square" rtlCol="0" anchor="ctr"/>
+          <a:lstStyle/>
+          <a:p>
+            <a:r>
+              <a:rPr lang="en-US" sz="1400" i="1" dirty="0" err="1">
+                <a:solidFill>
+                  <a:srgbClr val="FFFFFF"/>
+                </a:solidFill>
+              </a:rPr>
+              <a:t>Processamento</a:t>
+            </a:r>
+            <a:r>
+              <a:rPr lang="en-US" sz="1400" i="1" dirty="0">
+                <a:solidFill>
+                  <a:srgbClr val="FFFFFF"/>
+                </a:solidFill>
+              </a:rPr>
+              <a:t> de </a:t>
+            </a:r>
+            <a:r>
+              <a:rPr lang="en-US" sz="1400" i="1" dirty="0" err="1">
+                <a:solidFill>
+                  <a:srgbClr val="FFFFFF"/>
+                </a:solidFill>
+              </a:rPr>
+              <a:t>encomenda</a:t>
+            </a:r>
+            <a:endParaRPr lang="en-US" sz="1400" i="1" dirty="0">
+              <a:solidFill>
+                <a:srgbClr val="FFFFFF"/>
+              </a:solidFill>
+            </a:endParaRPr>
+          </a:p>
+          <a:p>
+            <a:pPr marL="285750" indent="-285750">
+              <a:buFont typeface="Wingdings" pitchFamily="2" charset="2"/>
+              <a:buChar char="Ø"/>
+            </a:pPr>
+            <a:r>
+              <a:rPr lang="en-US" sz="1400" i="1" dirty="0" err="1">
+                <a:solidFill>
+                  <a:srgbClr val="FFFFFF"/>
+                </a:solidFill>
+              </a:rPr>
+              <a:t>Reservar</a:t>
+            </a:r>
+            <a:r>
+              <a:rPr lang="en-US" sz="1400" i="1" dirty="0">
+                <a:solidFill>
+                  <a:srgbClr val="FFFFFF"/>
+                </a:solidFill>
+              </a:rPr>
+              <a:t> Stock</a:t>
+            </a:r>
+          </a:p>
+          <a:p>
+            <a:pPr marL="285750" indent="-285750">
+              <a:buFont typeface="Wingdings" pitchFamily="2" charset="2"/>
+              <a:buChar char="Ø"/>
+            </a:pPr>
+            <a:r>
+              <a:rPr lang="en-US" sz="1400" i="1" dirty="0" err="1">
+                <a:solidFill>
+                  <a:srgbClr val="FFFFFF"/>
+                </a:solidFill>
+              </a:rPr>
+              <a:t>Pagamento</a:t>
+            </a:r>
+            <a:endParaRPr lang="en-US" sz="1400" i="1" dirty="0">
+              <a:solidFill>
+                <a:srgbClr val="FFFFFF"/>
+              </a:solidFill>
+            </a:endParaRPr>
+          </a:p>
+          <a:p>
+            <a:pPr marL="285750" indent="-285750">
+              <a:buFont typeface="Wingdings" pitchFamily="2" charset="2"/>
+              <a:buChar char="Ø"/>
+            </a:pPr>
+            <a:r>
+              <a:rPr lang="en-US" sz="1400" i="1" dirty="0" err="1">
+                <a:solidFill>
+                  <a:srgbClr val="FFFFFF"/>
+                </a:solidFill>
+              </a:rPr>
+              <a:t>Enviar</a:t>
+            </a:r>
+            <a:r>
+              <a:rPr lang="en-US" sz="1400" i="1" dirty="0">
+                <a:solidFill>
+                  <a:srgbClr val="FFFFFF"/>
+                </a:solidFill>
+              </a:rPr>
+              <a:t> Email</a:t>
+            </a:r>
+          </a:p>
+        </p:txBody>
+      </p:sp>
+      <p:sp>
+        <p:nvSpPr>
+          <p:cNvPr id="28" name="CaixaDeTexto 27">
+            <a:extLst>
+              <a:ext uri="{FF2B5EF4-FFF2-40B4-BE49-F238E27FC236}">
+                <a16:creationId xmlns:a16="http://schemas.microsoft.com/office/drawing/2014/main" id="{BC8F8221-E248-C7C3-45F7-02D102595CD8}"/>
+              </a:ext>
+            </a:extLst>
+          </p:cNvPr>
+          <p:cNvSpPr txBox="1"/>
+          <p:nvPr/>
+        </p:nvSpPr>
+        <p:spPr>
+          <a:xfrm>
+            <a:off x="463857" y="1089101"/>
+            <a:ext cx="3410719" cy="307777"/>
+          </a:xfrm>
+          <a:prstGeom prst="rect">
+            <a:avLst/>
+          </a:prstGeom>
+          <a:noFill/>
+        </p:spPr>
+        <p:txBody>
+          <a:bodyPr wrap="square">
+            <a:spAutoFit/>
+          </a:bodyPr>
+          <a:lstStyle/>
+          <a:p>
+            <a:r>
+              <a:rPr lang="en-US" sz="1400" b="1" dirty="0">
+                <a:solidFill>
+                  <a:srgbClr val="0D1B2A"/>
+                </a:solidFill>
+              </a:rPr>
+              <a:t>Caso de </a:t>
+            </a:r>
+            <a:r>
+              <a:rPr lang="en-US" sz="1400" b="1" dirty="0" err="1">
+                <a:solidFill>
+                  <a:srgbClr val="0D1B2A"/>
+                </a:solidFill>
+              </a:rPr>
+              <a:t>Uso</a:t>
+            </a:r>
+            <a:endParaRPr lang="pt-PT" sz="1400" dirty="0"/>
+          </a:p>
+        </p:txBody>
+      </p:sp>
+      <p:pic>
+        <p:nvPicPr>
+          <p:cNvPr id="30" name="Imagem 29">
+            <a:extLst>
+              <a:ext uri="{FF2B5EF4-FFF2-40B4-BE49-F238E27FC236}">
+                <a16:creationId xmlns:a16="http://schemas.microsoft.com/office/drawing/2014/main" id="{DB2BB3BE-4FA4-AD70-F6B3-8482D5B837BB}"/>
+              </a:ext>
+            </a:extLst>
+          </p:cNvPr>
+          <p:cNvPicPr>
+            <a:picLocks noChangeAspect="1"/>
+          </p:cNvPicPr>
+          <p:nvPr/>
+        </p:nvPicPr>
+        <p:blipFill>
+          <a:blip r:embed="rId3"/>
+          <a:stretch>
+            <a:fillRect/>
+          </a:stretch>
+        </p:blipFill>
+        <p:spPr>
+          <a:xfrm>
+            <a:off x="4480159" y="1029778"/>
+            <a:ext cx="4347835" cy="3757014"/>
+          </a:xfrm>
+          <a:prstGeom prst="rect">
+            <a:avLst/>
+          </a:prstGeom>
+        </p:spPr>
+      </p:pic>
+    </p:spTree>
+  </p:cSld>
+  <p:clrMapOvr>
+    <a:masterClrMapping/>
+  </p:clrMapOvr>
+</p:sld>
+</file>
+
+<file path=ppt/slides/slide4.xml><?xml version="1.0" encoding="utf-8"?>
+<p:sld xmlns:a="http://schemas.openxmlformats.org/drawingml/2006/main" xmlns:r="http://schemas.openxmlformats.org/officeDocument/2006/relationships" xmlns:p="http://schemas.openxmlformats.org/presentationml/2006/main">
+  <p:cSld>
+    <p:bg>
+      <p:bgPr>
+        <a:gradFill>
+          <a:gsLst>
+            <a:gs pos="0">
+              <a:schemeClr val="accent3">
+                <a:lumMod val="5000"/>
+                <a:lumOff val="95000"/>
+              </a:schemeClr>
+            </a:gs>
+            <a:gs pos="74000">
+              <a:schemeClr val="accent3">
+                <a:lumMod val="45000"/>
+                <a:lumOff val="55000"/>
+              </a:schemeClr>
+            </a:gs>
+            <a:gs pos="83000">
+              <a:schemeClr val="accent3">
+                <a:lumMod val="45000"/>
+                <a:lumOff val="55000"/>
+              </a:schemeClr>
+            </a:gs>
+            <a:gs pos="100000">
+              <a:schemeClr val="accent3">
+                <a:lumMod val="30000"/>
+                <a:lumOff val="70000"/>
+              </a:schemeClr>
+            </a:gs>
+          </a:gsLst>
+          <a:lin ang="5400000" scaled="1"/>
+        </a:gradFill>
+        <a:effectLst/>
+      </p:bgPr>
+    </p:bg>
+    <p:spTree>
+      <p:nvGrpSpPr>
+        <p:cNvPr id="1" name="">
+          <a:extLst>
+            <a:ext uri="{FF2B5EF4-FFF2-40B4-BE49-F238E27FC236}">
+              <a16:creationId xmlns:a16="http://schemas.microsoft.com/office/drawing/2014/main" id="{FEC2ED64-EF6B-DC82-C1E2-1A46F36205E0}"/>
+            </a:ext>
+          </a:extLst>
+        </p:cNvPr>
+        <p:cNvGrpSpPr/>
+        <p:nvPr/>
+      </p:nvGrpSpPr>
+      <p:grpSpPr>
+        <a:xfrm>
+          <a:off x="0" y="0"/>
+          <a:ext cx="0" cy="0"/>
+          <a:chOff x="0" y="0"/>
+          <a:chExt cx="0" cy="0"/>
+        </a:xfrm>
+      </p:grpSpPr>
+      <p:sp>
+        <p:nvSpPr>
+          <p:cNvPr id="2" name="Shape 0">
+            <a:extLst>
+              <a:ext uri="{FF2B5EF4-FFF2-40B4-BE49-F238E27FC236}">
+                <a16:creationId xmlns:a16="http://schemas.microsoft.com/office/drawing/2014/main" id="{D21701C6-25AA-D955-E28E-9A1D3548EE7D}"/>
+              </a:ext>
+            </a:extLst>
+          </p:cNvPr>
+          <p:cNvSpPr/>
+          <p:nvPr/>
+        </p:nvSpPr>
+        <p:spPr>
+          <a:xfrm>
+            <a:off x="0" y="0"/>
+            <a:ext cx="9144000" cy="822960"/>
+          </a:xfrm>
+          <a:prstGeom prst="rect">
+            <a:avLst/>
+          </a:prstGeom>
+          <a:solidFill>
+            <a:srgbClr val="1B6CA8"/>
+          </a:solidFill>
+          <a:ln w="12700">
+            <a:solidFill>
+              <a:srgbClr val="1B6CA8"/>
+            </a:solidFill>
+            <a:prstDash val="solid"/>
+          </a:ln>
+        </p:spPr>
+        <p:txBody>
+          <a:bodyPr/>
+          <a:lstStyle/>
+          <a:p>
+            <a:endParaRPr lang="pt-PT"/>
+          </a:p>
+        </p:txBody>
+      </p:sp>
+      <p:sp>
+        <p:nvSpPr>
+          <p:cNvPr id="3" name="Text 1">
+            <a:extLst>
+              <a:ext uri="{FF2B5EF4-FFF2-40B4-BE49-F238E27FC236}">
+                <a16:creationId xmlns:a16="http://schemas.microsoft.com/office/drawing/2014/main" id="{27FF1245-3081-8909-453D-86208DF24ABD}"/>
+              </a:ext>
+            </a:extLst>
+          </p:cNvPr>
+          <p:cNvSpPr/>
+          <p:nvPr/>
+        </p:nvSpPr>
+        <p:spPr>
+          <a:xfrm>
+            <a:off x="457200" y="0"/>
+            <a:ext cx="8229600" cy="822960"/>
+          </a:xfrm>
+          <a:prstGeom prst="rect">
+            <a:avLst/>
+          </a:prstGeom>
+          <a:noFill/>
+          <a:ln/>
+        </p:spPr>
+        <p:txBody>
+          <a:bodyPr wrap="square" lIns="0" tIns="0" rIns="0" bIns="0" rtlCol="0" anchor="ctr"/>
+          <a:lstStyle/>
+          <a:p>
+            <a:pPr marL="0" indent="0">
+              <a:buNone/>
+            </a:pPr>
+            <a:r>
+              <a:rPr lang="en-US" sz="2400" b="1" dirty="0">
+                <a:solidFill>
+                  <a:srgbClr val="FFFFFF"/>
+                </a:solidFill>
+              </a:rPr>
+              <a:t>02  /  O que é o Temporal IO?</a:t>
+            </a:r>
+            <a:endParaRPr lang="en-US" sz="2400" dirty="0"/>
+          </a:p>
+        </p:txBody>
+      </p:sp>
+      <p:sp>
+        <p:nvSpPr>
+          <p:cNvPr id="4" name="Shape 2">
+            <a:extLst>
+              <a:ext uri="{FF2B5EF4-FFF2-40B4-BE49-F238E27FC236}">
+                <a16:creationId xmlns:a16="http://schemas.microsoft.com/office/drawing/2014/main" id="{E9713006-2E3D-5976-FC42-0BCCF16653C5}"/>
+              </a:ext>
+            </a:extLst>
+          </p:cNvPr>
+          <p:cNvSpPr/>
+          <p:nvPr/>
+        </p:nvSpPr>
+        <p:spPr>
+          <a:xfrm>
+            <a:off x="365760" y="960120"/>
+            <a:ext cx="8412480" cy="931581"/>
+          </a:xfrm>
+          <a:prstGeom prst="rect">
+            <a:avLst/>
+          </a:prstGeom>
+          <a:solidFill>
+            <a:srgbClr val="112236"/>
+          </a:solidFill>
+          <a:ln w="25400">
+            <a:solidFill>
+              <a:srgbClr val="00D4AA"/>
+            </a:solidFill>
+            <a:prstDash val="solid"/>
+          </a:ln>
+          <a:effectLst>
+            <a:outerShdw blurRad="101600" dist="38100" dir="8100000" algn="bl" rotWithShape="0">
+              <a:srgbClr val="000000">
+                <a:alpha val="18000"/>
+              </a:srgbClr>
+            </a:outerShdw>
+          </a:effectLst>
+        </p:spPr>
+        <p:txBody>
+          <a:bodyPr/>
+          <a:lstStyle/>
+          <a:p>
+            <a:endParaRPr lang="pt-PT"/>
+          </a:p>
+        </p:txBody>
+      </p:sp>
+      <p:sp>
+        <p:nvSpPr>
+          <p:cNvPr id="5" name="Text 3">
+            <a:extLst>
+              <a:ext uri="{FF2B5EF4-FFF2-40B4-BE49-F238E27FC236}">
+                <a16:creationId xmlns:a16="http://schemas.microsoft.com/office/drawing/2014/main" id="{C2461EB8-261F-322C-3F6C-FFFFBDFA7C67}"/>
+              </a:ext>
+            </a:extLst>
+          </p:cNvPr>
           <p:cNvSpPr/>
           <p:nvPr/>
         </p:nvSpPr>
         <p:spPr>
           <a:xfrm>
             <a:off x="548640" y="1005840"/>
-            <a:ext cx="8046720" cy="1280160"/>
+            <a:ext cx="8046720" cy="748701"/>
           </a:xfrm>
           <a:prstGeom prst="rect">
             <a:avLst/>
@@ -5423,13 +5109,19 @@
       </p:sp>
       <p:sp>
         <p:nvSpPr>
-          <p:cNvPr id="6" name="Shape 4"/>
-          <p:cNvSpPr/>
-          <p:nvPr/>
-        </p:nvSpPr>
-        <p:spPr>
-          <a:xfrm>
-            <a:off x="365760" y="2606040"/>
+          <p:cNvPr id="6" name="Shape 4">
+            <a:extLst>
+              <a:ext uri="{FF2B5EF4-FFF2-40B4-BE49-F238E27FC236}">
+                <a16:creationId xmlns:a16="http://schemas.microsoft.com/office/drawing/2014/main" id="{4BD3CBE2-5BF0-BE02-9901-7A8955C04C82}"/>
+              </a:ext>
+            </a:extLst>
+          </p:cNvPr>
+          <p:cNvSpPr/>
+          <p:nvPr/>
+        </p:nvSpPr>
+        <p:spPr>
+          <a:xfrm>
+            <a:off x="365760" y="2091462"/>
             <a:ext cx="2651760" cy="2148840"/>
           </a:xfrm>
           <a:prstGeom prst="rect">
@@ -5462,13 +5154,19 @@
       </p:sp>
       <p:sp>
         <p:nvSpPr>
-          <p:cNvPr id="7" name="Text 5"/>
-          <p:cNvSpPr/>
-          <p:nvPr/>
-        </p:nvSpPr>
-        <p:spPr>
-          <a:xfrm>
-            <a:off x="365760" y="2697480"/>
+          <p:cNvPr id="7" name="Text 5">
+            <a:extLst>
+              <a:ext uri="{FF2B5EF4-FFF2-40B4-BE49-F238E27FC236}">
+                <a16:creationId xmlns:a16="http://schemas.microsoft.com/office/drawing/2014/main" id="{89C95000-BD84-4618-3887-4F9994CD70F8}"/>
+              </a:ext>
+            </a:extLst>
+          </p:cNvPr>
+          <p:cNvSpPr/>
+          <p:nvPr/>
+        </p:nvSpPr>
+        <p:spPr>
+          <a:xfrm>
+            <a:off x="365760" y="2182902"/>
             <a:ext cx="2651760" cy="502920"/>
           </a:xfrm>
           <a:prstGeom prst="rect">
@@ -5498,13 +5196,19 @@
       </p:sp>
       <p:sp>
         <p:nvSpPr>
-          <p:cNvPr id="8" name="Text 6"/>
-          <p:cNvSpPr/>
-          <p:nvPr/>
-        </p:nvSpPr>
-        <p:spPr>
-          <a:xfrm>
-            <a:off x="365760" y="3200400"/>
+          <p:cNvPr id="8" name="Text 6">
+            <a:extLst>
+              <a:ext uri="{FF2B5EF4-FFF2-40B4-BE49-F238E27FC236}">
+                <a16:creationId xmlns:a16="http://schemas.microsoft.com/office/drawing/2014/main" id="{98D3CAED-D8CE-F85B-ABC5-CE2417B31F59}"/>
+              </a:ext>
+            </a:extLst>
+          </p:cNvPr>
+          <p:cNvSpPr/>
+          <p:nvPr/>
+        </p:nvSpPr>
+        <p:spPr>
+          <a:xfrm>
+            <a:off x="365760" y="2685822"/>
             <a:ext cx="2651760" cy="411480"/>
           </a:xfrm>
           <a:prstGeom prst="rect">
@@ -5534,13 +5238,19 @@
       </p:sp>
       <p:sp>
         <p:nvSpPr>
-          <p:cNvPr id="9" name="Text 7"/>
-          <p:cNvSpPr/>
-          <p:nvPr/>
-        </p:nvSpPr>
-        <p:spPr>
-          <a:xfrm>
-            <a:off x="457200" y="3611880"/>
+          <p:cNvPr id="9" name="Text 7">
+            <a:extLst>
+              <a:ext uri="{FF2B5EF4-FFF2-40B4-BE49-F238E27FC236}">
+                <a16:creationId xmlns:a16="http://schemas.microsoft.com/office/drawing/2014/main" id="{210B5771-57FD-B08A-BD64-1A917E56DE52}"/>
+              </a:ext>
+            </a:extLst>
+          </p:cNvPr>
+          <p:cNvSpPr/>
+          <p:nvPr/>
+        </p:nvSpPr>
+        <p:spPr>
+          <a:xfrm>
+            <a:off x="457200" y="3097302"/>
             <a:ext cx="2468880" cy="777240"/>
           </a:xfrm>
           <a:prstGeom prst="rect">
@@ -5570,13 +5280,19 @@
       </p:sp>
       <p:sp>
         <p:nvSpPr>
-          <p:cNvPr id="10" name="Shape 8"/>
-          <p:cNvSpPr/>
-          <p:nvPr/>
-        </p:nvSpPr>
-        <p:spPr>
-          <a:xfrm>
-            <a:off x="3200400" y="2606040"/>
+          <p:cNvPr id="10" name="Shape 8">
+            <a:extLst>
+              <a:ext uri="{FF2B5EF4-FFF2-40B4-BE49-F238E27FC236}">
+                <a16:creationId xmlns:a16="http://schemas.microsoft.com/office/drawing/2014/main" id="{10A2B1FF-CCCB-467D-B4ED-95F7402366B4}"/>
+              </a:ext>
+            </a:extLst>
+          </p:cNvPr>
+          <p:cNvSpPr/>
+          <p:nvPr/>
+        </p:nvSpPr>
+        <p:spPr>
+          <a:xfrm>
+            <a:off x="3200400" y="2091462"/>
             <a:ext cx="2651760" cy="2148840"/>
           </a:xfrm>
           <a:prstGeom prst="rect">
@@ -5609,13 +5325,19 @@
       </p:sp>
       <p:sp>
         <p:nvSpPr>
-          <p:cNvPr id="11" name="Text 9"/>
-          <p:cNvSpPr/>
-          <p:nvPr/>
-        </p:nvSpPr>
-        <p:spPr>
-          <a:xfrm>
-            <a:off x="3200400" y="2697480"/>
+          <p:cNvPr id="11" name="Text 9">
+            <a:extLst>
+              <a:ext uri="{FF2B5EF4-FFF2-40B4-BE49-F238E27FC236}">
+                <a16:creationId xmlns:a16="http://schemas.microsoft.com/office/drawing/2014/main" id="{075002BC-6BEC-A100-A27F-52529B7CFF19}"/>
+              </a:ext>
+            </a:extLst>
+          </p:cNvPr>
+          <p:cNvSpPr/>
+          <p:nvPr/>
+        </p:nvSpPr>
+        <p:spPr>
+          <a:xfrm>
+            <a:off x="3200400" y="2182902"/>
             <a:ext cx="2651760" cy="502920"/>
           </a:xfrm>
           <a:prstGeom prst="rect">
@@ -5645,13 +5367,19 @@
       </p:sp>
       <p:sp>
         <p:nvSpPr>
-          <p:cNvPr id="12" name="Text 10"/>
-          <p:cNvSpPr/>
-          <p:nvPr/>
-        </p:nvSpPr>
-        <p:spPr>
-          <a:xfrm>
-            <a:off x="3200400" y="3200400"/>
+          <p:cNvPr id="12" name="Text 10">
+            <a:extLst>
+              <a:ext uri="{FF2B5EF4-FFF2-40B4-BE49-F238E27FC236}">
+                <a16:creationId xmlns:a16="http://schemas.microsoft.com/office/drawing/2014/main" id="{2C22E6CC-75A3-9986-C640-EB59FBAA720C}"/>
+              </a:ext>
+            </a:extLst>
+          </p:cNvPr>
+          <p:cNvSpPr/>
+          <p:nvPr/>
+        </p:nvSpPr>
+        <p:spPr>
+          <a:xfrm>
+            <a:off x="3200400" y="2685822"/>
             <a:ext cx="2651760" cy="411480"/>
           </a:xfrm>
           <a:prstGeom prst="rect">
@@ -5681,13 +5409,19 @@
       </p:sp>
       <p:sp>
         <p:nvSpPr>
-          <p:cNvPr id="13" name="Text 11"/>
-          <p:cNvSpPr/>
-          <p:nvPr/>
-        </p:nvSpPr>
-        <p:spPr>
-          <a:xfrm>
-            <a:off x="3291840" y="3611880"/>
+          <p:cNvPr id="13" name="Text 11">
+            <a:extLst>
+              <a:ext uri="{FF2B5EF4-FFF2-40B4-BE49-F238E27FC236}">
+                <a16:creationId xmlns:a16="http://schemas.microsoft.com/office/drawing/2014/main" id="{0DA7D386-78B2-45F0-4706-3A2A7AFDCE43}"/>
+              </a:ext>
+            </a:extLst>
+          </p:cNvPr>
+          <p:cNvSpPr/>
+          <p:nvPr/>
+        </p:nvSpPr>
+        <p:spPr>
+          <a:xfrm>
+            <a:off x="3291840" y="3097302"/>
             <a:ext cx="2468880" cy="777240"/>
           </a:xfrm>
           <a:prstGeom prst="rect">
@@ -5717,13 +5451,19 @@
       </p:sp>
       <p:sp>
         <p:nvSpPr>
-          <p:cNvPr id="14" name="Shape 12"/>
-          <p:cNvSpPr/>
-          <p:nvPr/>
-        </p:nvSpPr>
-        <p:spPr>
-          <a:xfrm>
-            <a:off x="6035040" y="2606040"/>
+          <p:cNvPr id="14" name="Shape 12">
+            <a:extLst>
+              <a:ext uri="{FF2B5EF4-FFF2-40B4-BE49-F238E27FC236}">
+                <a16:creationId xmlns:a16="http://schemas.microsoft.com/office/drawing/2014/main" id="{353A64A7-8D1A-0A74-8ACF-F56FF0899E96}"/>
+              </a:ext>
+            </a:extLst>
+          </p:cNvPr>
+          <p:cNvSpPr/>
+          <p:nvPr/>
+        </p:nvSpPr>
+        <p:spPr>
+          <a:xfrm>
+            <a:off x="6035040" y="2091462"/>
             <a:ext cx="2651760" cy="2148840"/>
           </a:xfrm>
           <a:prstGeom prst="rect">
@@ -5756,13 +5496,19 @@
       </p:sp>
       <p:sp>
         <p:nvSpPr>
-          <p:cNvPr id="15" name="Text 13"/>
-          <p:cNvSpPr/>
-          <p:nvPr/>
-        </p:nvSpPr>
-        <p:spPr>
-          <a:xfrm>
-            <a:off x="6035040" y="2697480"/>
+          <p:cNvPr id="15" name="Text 13">
+            <a:extLst>
+              <a:ext uri="{FF2B5EF4-FFF2-40B4-BE49-F238E27FC236}">
+                <a16:creationId xmlns:a16="http://schemas.microsoft.com/office/drawing/2014/main" id="{2CFA4D5E-C179-4E48-B007-FE100A5F4231}"/>
+              </a:ext>
+            </a:extLst>
+          </p:cNvPr>
+          <p:cNvSpPr/>
+          <p:nvPr/>
+        </p:nvSpPr>
+        <p:spPr>
+          <a:xfrm>
+            <a:off x="6035040" y="2182902"/>
             <a:ext cx="2651760" cy="502920"/>
           </a:xfrm>
           <a:prstGeom prst="rect">
@@ -5792,13 +5538,19 @@
       </p:sp>
       <p:sp>
         <p:nvSpPr>
-          <p:cNvPr id="16" name="Text 14"/>
-          <p:cNvSpPr/>
-          <p:nvPr/>
-        </p:nvSpPr>
-        <p:spPr>
-          <a:xfrm>
-            <a:off x="6035040" y="3200400"/>
+          <p:cNvPr id="16" name="Text 14">
+            <a:extLst>
+              <a:ext uri="{FF2B5EF4-FFF2-40B4-BE49-F238E27FC236}">
+                <a16:creationId xmlns:a16="http://schemas.microsoft.com/office/drawing/2014/main" id="{32CD5298-BEA1-9933-211C-2806032D6194}"/>
+              </a:ext>
+            </a:extLst>
+          </p:cNvPr>
+          <p:cNvSpPr/>
+          <p:nvPr/>
+        </p:nvSpPr>
+        <p:spPr>
+          <a:xfrm>
+            <a:off x="6035040" y="2685822"/>
             <a:ext cx="2651760" cy="411480"/>
           </a:xfrm>
           <a:prstGeom prst="rect">
@@ -5828,13 +5580,19 @@
       </p:sp>
       <p:sp>
         <p:nvSpPr>
-          <p:cNvPr id="17" name="Text 15"/>
-          <p:cNvSpPr/>
-          <p:nvPr/>
-        </p:nvSpPr>
-        <p:spPr>
-          <a:xfrm>
-            <a:off x="6126480" y="3611880"/>
+          <p:cNvPr id="17" name="Text 15">
+            <a:extLst>
+              <a:ext uri="{FF2B5EF4-FFF2-40B4-BE49-F238E27FC236}">
+                <a16:creationId xmlns:a16="http://schemas.microsoft.com/office/drawing/2014/main" id="{A2301AB3-3BC4-D465-299A-682D26782883}"/>
+              </a:ext>
+            </a:extLst>
+          </p:cNvPr>
+          <p:cNvSpPr/>
+          <p:nvPr/>
+        </p:nvSpPr>
+        <p:spPr>
+          <a:xfrm>
+            <a:off x="6126480" y="3097302"/>
             <a:ext cx="2468880" cy="777240"/>
           </a:xfrm>
           <a:prstGeom prst="rect">
@@ -5862,7 +5620,297 @@
           </a:p>
         </p:txBody>
       </p:sp>
+      <p:sp>
+        <p:nvSpPr>
+          <p:cNvPr id="18" name="Shape 30">
+            <a:extLst>
+              <a:ext uri="{FF2B5EF4-FFF2-40B4-BE49-F238E27FC236}">
+                <a16:creationId xmlns:a16="http://schemas.microsoft.com/office/drawing/2014/main" id="{ABC211BF-0916-DC26-1608-8FB7AC8B2B14}"/>
+              </a:ext>
+            </a:extLst>
+          </p:cNvPr>
+          <p:cNvSpPr/>
+          <p:nvPr/>
+        </p:nvSpPr>
+        <p:spPr>
+          <a:xfrm>
+            <a:off x="274320" y="4434840"/>
+            <a:ext cx="8595360" cy="457200"/>
+          </a:xfrm>
+          <a:prstGeom prst="rect">
+            <a:avLst/>
+          </a:prstGeom>
+          <a:solidFill>
+            <a:srgbClr val="1B6CA8"/>
+          </a:solidFill>
+          <a:ln w="12700">
+            <a:solidFill>
+              <a:srgbClr val="1B6CA8"/>
+            </a:solidFill>
+            <a:prstDash val="solid"/>
+          </a:ln>
+        </p:spPr>
+        <p:txBody>
+          <a:bodyPr/>
+          <a:lstStyle/>
+          <a:p>
+            <a:endParaRPr lang="pt-PT"/>
+          </a:p>
+        </p:txBody>
+      </p:sp>
+      <p:sp>
+        <p:nvSpPr>
+          <p:cNvPr id="19" name="Text 6">
+            <a:extLst>
+              <a:ext uri="{FF2B5EF4-FFF2-40B4-BE49-F238E27FC236}">
+                <a16:creationId xmlns:a16="http://schemas.microsoft.com/office/drawing/2014/main" id="{AAC4DB85-4AAB-8F9D-FE3F-14391B4530AB}"/>
+              </a:ext>
+            </a:extLst>
+          </p:cNvPr>
+          <p:cNvSpPr/>
+          <p:nvPr/>
+        </p:nvSpPr>
+        <p:spPr>
+          <a:xfrm>
+            <a:off x="365760" y="4434841"/>
+            <a:ext cx="8503920" cy="411480"/>
+          </a:xfrm>
+          <a:prstGeom prst="rect">
+            <a:avLst/>
+          </a:prstGeom>
+          <a:noFill/>
+          <a:ln/>
+        </p:spPr>
+        <p:txBody>
+          <a:bodyPr wrap="square" rtlCol="0" anchor="ctr"/>
+          <a:lstStyle/>
+          <a:p>
+            <a:pPr marL="0" indent="0">
+              <a:buNone/>
+            </a:pPr>
+            <a:r>
+              <a:rPr lang="en-US" sz="1100" dirty="0">
+                <a:solidFill>
+                  <a:schemeClr val="bg1"/>
+                </a:solidFill>
+                <a:latin typeface="Calibri" pitchFamily="34" charset="0"/>
+                <a:ea typeface="Calibri" pitchFamily="34" charset="-122"/>
+                <a:cs typeface="Calibri" pitchFamily="34" charset="-120"/>
+              </a:rPr>
+              <a:t>Como </a:t>
+            </a:r>
+            <a:r>
+              <a:rPr lang="en-US" sz="1100" dirty="0" err="1">
+                <a:solidFill>
+                  <a:schemeClr val="bg1"/>
+                </a:solidFill>
+                <a:latin typeface="Calibri" pitchFamily="34" charset="0"/>
+                <a:ea typeface="Calibri" pitchFamily="34" charset="-122"/>
+                <a:cs typeface="Calibri" pitchFamily="34" charset="-120"/>
+              </a:rPr>
+              <a:t>construir</a:t>
+            </a:r>
+            <a:r>
+              <a:rPr lang="en-US" sz="1100" dirty="0">
+                <a:solidFill>
+                  <a:schemeClr val="bg1"/>
+                </a:solidFill>
+                <a:latin typeface="Calibri" pitchFamily="34" charset="0"/>
+                <a:ea typeface="Calibri" pitchFamily="34" charset="-122"/>
+                <a:cs typeface="Calibri" pitchFamily="34" charset="-120"/>
+              </a:rPr>
+              <a:t> </a:t>
+            </a:r>
+            <a:r>
+              <a:rPr lang="en-US" sz="1100" dirty="0" err="1">
+                <a:solidFill>
+                  <a:schemeClr val="bg1"/>
+                </a:solidFill>
+                <a:latin typeface="Calibri" pitchFamily="34" charset="0"/>
+                <a:ea typeface="Calibri" pitchFamily="34" charset="-122"/>
+                <a:cs typeface="Calibri" pitchFamily="34" charset="-120"/>
+              </a:rPr>
+              <a:t>processos</a:t>
+            </a:r>
+            <a:r>
+              <a:rPr lang="en-US" sz="1100" dirty="0">
+                <a:solidFill>
+                  <a:schemeClr val="bg1"/>
+                </a:solidFill>
+                <a:latin typeface="Calibri" pitchFamily="34" charset="0"/>
+                <a:ea typeface="Calibri" pitchFamily="34" charset="-122"/>
+                <a:cs typeface="Calibri" pitchFamily="34" charset="-120"/>
+              </a:rPr>
+              <a:t> </a:t>
+            </a:r>
+            <a:r>
+              <a:rPr lang="en-US" sz="1100" dirty="0" err="1">
+                <a:solidFill>
+                  <a:schemeClr val="bg1"/>
+                </a:solidFill>
+                <a:latin typeface="Calibri" pitchFamily="34" charset="0"/>
+                <a:ea typeface="Calibri" pitchFamily="34" charset="-122"/>
+                <a:cs typeface="Calibri" pitchFamily="34" charset="-120"/>
+              </a:rPr>
+              <a:t>resilientes</a:t>
+            </a:r>
+            <a:r>
+              <a:rPr lang="en-US" sz="1100" dirty="0">
+                <a:solidFill>
+                  <a:schemeClr val="bg1"/>
+                </a:solidFill>
+                <a:latin typeface="Calibri" pitchFamily="34" charset="0"/>
+                <a:ea typeface="Calibri" pitchFamily="34" charset="-122"/>
+                <a:cs typeface="Calibri" pitchFamily="34" charset="-120"/>
+              </a:rPr>
+              <a:t> </a:t>
+            </a:r>
+            <a:r>
+              <a:rPr lang="en-US" sz="1100" dirty="0" err="1">
+                <a:solidFill>
+                  <a:schemeClr val="bg1"/>
+                </a:solidFill>
+                <a:latin typeface="Calibri" pitchFamily="34" charset="0"/>
+                <a:ea typeface="Calibri" pitchFamily="34" charset="-122"/>
+                <a:cs typeface="Calibri" pitchFamily="34" charset="-120"/>
+              </a:rPr>
+              <a:t>sem</a:t>
+            </a:r>
+            <a:r>
+              <a:rPr lang="en-US" sz="1100" dirty="0">
+                <a:solidFill>
+                  <a:schemeClr val="bg1"/>
+                </a:solidFill>
+                <a:latin typeface="Calibri" pitchFamily="34" charset="0"/>
+                <a:ea typeface="Calibri" pitchFamily="34" charset="-122"/>
+                <a:cs typeface="Calibri" pitchFamily="34" charset="-120"/>
+              </a:rPr>
+              <a:t> </a:t>
+            </a:r>
+            <a:r>
+              <a:rPr lang="en-US" sz="1100" dirty="0" err="1">
+                <a:solidFill>
+                  <a:schemeClr val="bg1"/>
+                </a:solidFill>
+                <a:latin typeface="Calibri" pitchFamily="34" charset="0"/>
+                <a:ea typeface="Calibri" pitchFamily="34" charset="-122"/>
+                <a:cs typeface="Calibri" pitchFamily="34" charset="-120"/>
+              </a:rPr>
+              <a:t>escrever</a:t>
+            </a:r>
+            <a:r>
+              <a:rPr lang="en-US" sz="1100" dirty="0">
+                <a:solidFill>
+                  <a:schemeClr val="bg1"/>
+                </a:solidFill>
+                <a:latin typeface="Calibri" pitchFamily="34" charset="0"/>
+                <a:ea typeface="Calibri" pitchFamily="34" charset="-122"/>
+                <a:cs typeface="Calibri" pitchFamily="34" charset="-120"/>
+              </a:rPr>
+              <a:t> </a:t>
+            </a:r>
+            <a:r>
+              <a:rPr lang="en-US" sz="1100" dirty="0" err="1">
+                <a:solidFill>
+                  <a:schemeClr val="bg1"/>
+                </a:solidFill>
+                <a:latin typeface="Calibri" pitchFamily="34" charset="0"/>
+                <a:ea typeface="Calibri" pitchFamily="34" charset="-122"/>
+                <a:cs typeface="Calibri" pitchFamily="34" charset="-120"/>
+              </a:rPr>
+              <a:t>manualmente</a:t>
+            </a:r>
+            <a:r>
+              <a:rPr lang="en-US" sz="1100" dirty="0">
+                <a:solidFill>
+                  <a:schemeClr val="bg1"/>
+                </a:solidFill>
+                <a:latin typeface="Calibri" pitchFamily="34" charset="0"/>
+                <a:ea typeface="Calibri" pitchFamily="34" charset="-122"/>
+                <a:cs typeface="Calibri" pitchFamily="34" charset="-120"/>
+              </a:rPr>
+              <a:t> </a:t>
+            </a:r>
+            <a:r>
+              <a:rPr lang="en-US" sz="1100" dirty="0" err="1">
+                <a:solidFill>
+                  <a:schemeClr val="bg1"/>
+                </a:solidFill>
+                <a:latin typeface="Calibri" pitchFamily="34" charset="0"/>
+                <a:ea typeface="Calibri" pitchFamily="34" charset="-122"/>
+                <a:cs typeface="Calibri" pitchFamily="34" charset="-120"/>
+              </a:rPr>
+              <a:t>lógica</a:t>
+            </a:r>
+            <a:r>
+              <a:rPr lang="en-US" sz="1100" dirty="0">
+                <a:solidFill>
+                  <a:schemeClr val="bg1"/>
+                </a:solidFill>
+                <a:latin typeface="Calibri" pitchFamily="34" charset="0"/>
+                <a:ea typeface="Calibri" pitchFamily="34" charset="-122"/>
+                <a:cs typeface="Calibri" pitchFamily="34" charset="-120"/>
+              </a:rPr>
+              <a:t> de retry, recovery e </a:t>
+            </a:r>
+            <a:r>
+              <a:rPr lang="en-US" sz="1100" dirty="0" err="1">
+                <a:solidFill>
+                  <a:schemeClr val="bg1"/>
+                </a:solidFill>
+                <a:latin typeface="Calibri" pitchFamily="34" charset="0"/>
+                <a:ea typeface="Calibri" pitchFamily="34" charset="-122"/>
+                <a:cs typeface="Calibri" pitchFamily="34" charset="-120"/>
+              </a:rPr>
+              <a:t>gestao</a:t>
+            </a:r>
+            <a:r>
+              <a:rPr lang="en-US" sz="1100" dirty="0">
+                <a:solidFill>
+                  <a:schemeClr val="bg1"/>
+                </a:solidFill>
+                <a:latin typeface="Calibri" pitchFamily="34" charset="0"/>
+                <a:ea typeface="Calibri" pitchFamily="34" charset="-122"/>
+                <a:cs typeface="Calibri" pitchFamily="34" charset="-120"/>
+              </a:rPr>
+              <a:t> de </a:t>
+            </a:r>
+            <a:r>
+              <a:rPr lang="en-US" sz="1100" dirty="0" err="1">
+                <a:solidFill>
+                  <a:schemeClr val="bg1"/>
+                </a:solidFill>
+                <a:latin typeface="Calibri" pitchFamily="34" charset="0"/>
+                <a:ea typeface="Calibri" pitchFamily="34" charset="-122"/>
+                <a:cs typeface="Calibri" pitchFamily="34" charset="-120"/>
+              </a:rPr>
+              <a:t>estado</a:t>
+            </a:r>
+            <a:r>
+              <a:rPr lang="en-US" sz="1100" dirty="0">
+                <a:solidFill>
+                  <a:schemeClr val="bg1"/>
+                </a:solidFill>
+                <a:latin typeface="Calibri" pitchFamily="34" charset="0"/>
+                <a:ea typeface="Calibri" pitchFamily="34" charset="-122"/>
+                <a:cs typeface="Calibri" pitchFamily="34" charset="-120"/>
+              </a:rPr>
+              <a:t>.</a:t>
+            </a:r>
+            <a:endParaRPr lang="en-US" sz="1100" dirty="0">
+              <a:solidFill>
+                <a:schemeClr val="bg1"/>
+              </a:solidFill>
+            </a:endParaRPr>
+          </a:p>
+        </p:txBody>
+      </p:sp>
     </p:spTree>
+    <p:extLst>
+      <p:ext uri="{BB962C8B-B14F-4D97-AF65-F5344CB8AC3E}">
+        <p14:creationId xmlns:p14="http://schemas.microsoft.com/office/powerpoint/2010/main" val="2997234038"/>
+      </p:ext>
+    </p:extLst>
   </p:cSld>
   <p:clrMapOvr>
     <a:masterClrMapping/>
@@ -5870,7 +5918,7 @@
 </p:sld>
 </file>
 
-<file path=ppt/slides/slide4.xml><?xml version="1.0" encoding="utf-8"?>
+<file path=ppt/slides/slide5.xml><?xml version="1.0" encoding="utf-8"?>
 <p:sld xmlns:a="http://schemas.openxmlformats.org/drawingml/2006/main" xmlns:r="http://schemas.openxmlformats.org/officeDocument/2006/relationships" xmlns:p="http://schemas.openxmlformats.org/presentationml/2006/main">
   <p:cSld name="Slide 4">
     <p:bg>
@@ -5983,7 +6031,23 @@
                   <a:srgbClr val="FFFFFF"/>
                 </a:solidFill>
               </a:rPr>
-              <a:t>02  /  Porque usar Temporal IO?</a:t>
+              <a:t>03  /  </a:t>
+            </a:r>
+            <a:r>
+              <a:rPr lang="en-US" sz="2400" b="1" dirty="0" err="1">
+                <a:solidFill>
+                  <a:srgbClr val="FFFFFF"/>
+                </a:solidFill>
+              </a:rPr>
+              <a:t>Porque</a:t>
+            </a:r>
+            <a:r>
+              <a:rPr lang="en-US" sz="2400" b="1" dirty="0">
+                <a:solidFill>
+                  <a:srgbClr val="FFFFFF"/>
+                </a:solidFill>
+              </a:rPr>
+              <a:t> usar Temporal IO?</a:t>
             </a:r>
             <a:endParaRPr lang="en-US" sz="2400" dirty="0"/>
           </a:p>
@@ -6647,7 +6711,7 @@
 </p:sld>
 </file>
 
-<file path=ppt/slides/slide5.xml><?xml version="1.0" encoding="utf-8"?>
+<file path=ppt/slides/slide6.xml><?xml version="1.0" encoding="utf-8"?>
 <p:sld xmlns:a="http://schemas.openxmlformats.org/drawingml/2006/main" xmlns:r="http://schemas.openxmlformats.org/officeDocument/2006/relationships" xmlns:p="http://schemas.openxmlformats.org/presentationml/2006/main">
   <p:cSld name="Slide 5">
     <p:bg>
@@ -6760,7 +6824,7 @@
                   <a:srgbClr val="FFFFFF"/>
                 </a:solidFill>
               </a:rPr>
-              <a:t>03  /  Vantagens e Desvantagens</a:t>
+              <a:t>04  /  Vantagens e Desvantagens</a:t>
             </a:r>
             <a:endParaRPr lang="en-US" sz="2400" dirty="0"/>
           </a:p>
@@ -7296,7 +7360,7 @@
 </p:sld>
 </file>
 
-<file path=ppt/slides/slide6.xml><?xml version="1.0" encoding="utf-8"?>
+<file path=ppt/slides/slide7.xml><?xml version="1.0" encoding="utf-8"?>
 <p:sld xmlns:a="http://schemas.openxmlformats.org/drawingml/2006/main" xmlns:r="http://schemas.openxmlformats.org/officeDocument/2006/relationships" xmlns:p="http://schemas.openxmlformats.org/presentationml/2006/main">
   <p:cSld name="Slide 6">
     <p:bg>
@@ -7409,7 +7473,7 @@
                   <a:srgbClr val="FFFFFF"/>
                 </a:solidFill>
               </a:rPr>
-              <a:t>04  /  Principais Conceitos</a:t>
+              <a:t>05  /  Principais Conceitos</a:t>
             </a:r>
             <a:endParaRPr lang="en-US" sz="2400" dirty="0"/>
           </a:p>
@@ -9034,1981 +9098,7 @@
 </p:sld>
 </file>
 
-<file path=ppt/slides/slide7.xml><?xml version="1.0" encoding="utf-8"?>
-<p:sld xmlns:a="http://schemas.openxmlformats.org/drawingml/2006/main" xmlns:r="http://schemas.openxmlformats.org/officeDocument/2006/relationships" xmlns:p="http://schemas.openxmlformats.org/presentationml/2006/main">
-  <p:cSld name="Slide 7">
-    <p:bg>
-      <p:bgPr>
-        <a:gradFill>
-          <a:gsLst>
-            <a:gs pos="0">
-              <a:schemeClr val="accent3">
-                <a:lumMod val="5000"/>
-                <a:lumOff val="95000"/>
-              </a:schemeClr>
-            </a:gs>
-            <a:gs pos="74000">
-              <a:schemeClr val="accent3">
-                <a:lumMod val="45000"/>
-                <a:lumOff val="55000"/>
-              </a:schemeClr>
-            </a:gs>
-            <a:gs pos="83000">
-              <a:schemeClr val="accent3">
-                <a:lumMod val="45000"/>
-                <a:lumOff val="55000"/>
-              </a:schemeClr>
-            </a:gs>
-            <a:gs pos="100000">
-              <a:schemeClr val="accent3">
-                <a:lumMod val="30000"/>
-                <a:lumOff val="70000"/>
-              </a:schemeClr>
-            </a:gs>
-          </a:gsLst>
-          <a:lin ang="5400000" scaled="1"/>
-        </a:gradFill>
-        <a:effectLst/>
-      </p:bgPr>
-    </p:bg>
-    <p:spTree>
-      <p:nvGrpSpPr>
-        <p:cNvPr id="1" name=""/>
-        <p:cNvGrpSpPr/>
-        <p:nvPr/>
-      </p:nvGrpSpPr>
-      <p:grpSpPr>
-        <a:xfrm>
-          <a:off x="0" y="0"/>
-          <a:ext cx="0" cy="0"/>
-          <a:chOff x="0" y="0"/>
-          <a:chExt cx="0" cy="0"/>
-        </a:xfrm>
-      </p:grpSpPr>
-      <p:sp>
-        <p:nvSpPr>
-          <p:cNvPr id="2" name="Shape 0"/>
-          <p:cNvSpPr/>
-          <p:nvPr/>
-        </p:nvSpPr>
-        <p:spPr>
-          <a:xfrm>
-            <a:off x="0" y="0"/>
-            <a:ext cx="9144000" cy="822960"/>
-          </a:xfrm>
-          <a:prstGeom prst="rect">
-            <a:avLst/>
-          </a:prstGeom>
-          <a:solidFill>
-            <a:srgbClr val="1B6CA8"/>
-          </a:solidFill>
-          <a:ln w="12700">
-            <a:solidFill>
-              <a:srgbClr val="1B6CA8"/>
-            </a:solidFill>
-            <a:prstDash val="solid"/>
-          </a:ln>
-        </p:spPr>
-        <p:txBody>
-          <a:bodyPr/>
-          <a:lstStyle/>
-          <a:p>
-            <a:endParaRPr lang="pt-PT"/>
-          </a:p>
-        </p:txBody>
-      </p:sp>
-      <p:sp>
-        <p:nvSpPr>
-          <p:cNvPr id="3" name="Text 1"/>
-          <p:cNvSpPr/>
-          <p:nvPr/>
-        </p:nvSpPr>
-        <p:spPr>
-          <a:xfrm>
-            <a:off x="457200" y="0"/>
-            <a:ext cx="8229600" cy="822960"/>
-          </a:xfrm>
-          <a:prstGeom prst="rect">
-            <a:avLst/>
-          </a:prstGeom>
-          <a:noFill/>
-          <a:ln/>
-        </p:spPr>
-        <p:txBody>
-          <a:bodyPr wrap="square" lIns="0" tIns="0" rIns="0" bIns="0" rtlCol="0" anchor="ctr"/>
-          <a:lstStyle/>
-          <a:p>
-            <a:pPr marL="0" indent="0">
-              <a:buNone/>
-            </a:pPr>
-            <a:r>
-              <a:rPr lang="en-US" sz="2400" b="1" dirty="0">
-                <a:solidFill>
-                  <a:srgbClr val="FFFFFF"/>
-                </a:solidFill>
-              </a:rPr>
-              <a:t>04  /  Workflow vs Activity</a:t>
-            </a:r>
-            <a:endParaRPr lang="en-US" sz="2400" dirty="0"/>
-          </a:p>
-        </p:txBody>
-      </p:sp>
-      <p:sp>
-        <p:nvSpPr>
-          <p:cNvPr id="4" name="Shape 2"/>
-          <p:cNvSpPr/>
-          <p:nvPr/>
-        </p:nvSpPr>
-        <p:spPr>
-          <a:xfrm>
-            <a:off x="274320" y="914400"/>
-            <a:ext cx="4023360" cy="3840480"/>
-          </a:xfrm>
-          <a:prstGeom prst="rect">
-            <a:avLst/>
-          </a:prstGeom>
-          <a:solidFill>
-            <a:srgbClr val="112236"/>
-          </a:solidFill>
-          <a:ln w="12700">
-            <a:solidFill>
-              <a:srgbClr val="00D4AA"/>
-            </a:solidFill>
-            <a:prstDash val="solid"/>
-          </a:ln>
-          <a:effectLst>
-            <a:outerShdw blurRad="101600" dist="38100" dir="8100000" algn="bl" rotWithShape="0">
-              <a:srgbClr val="000000">
-                <a:alpha val="18000"/>
-              </a:srgbClr>
-            </a:outerShdw>
-          </a:effectLst>
-        </p:spPr>
-        <p:txBody>
-          <a:bodyPr/>
-          <a:lstStyle/>
-          <a:p>
-            <a:endParaRPr lang="pt-PT"/>
-          </a:p>
-        </p:txBody>
-      </p:sp>
-      <p:sp>
-        <p:nvSpPr>
-          <p:cNvPr id="5" name="Shape 3"/>
-          <p:cNvSpPr/>
-          <p:nvPr/>
-        </p:nvSpPr>
-        <p:spPr>
-          <a:xfrm>
-            <a:off x="274320" y="914400"/>
-            <a:ext cx="4023360" cy="457200"/>
-          </a:xfrm>
-          <a:prstGeom prst="rect">
-            <a:avLst/>
-          </a:prstGeom>
-          <a:solidFill>
-            <a:srgbClr val="00D4AA"/>
-          </a:solidFill>
-          <a:ln w="12700">
-            <a:solidFill>
-              <a:srgbClr val="00D4AA"/>
-            </a:solidFill>
-            <a:prstDash val="solid"/>
-          </a:ln>
-        </p:spPr>
-        <p:txBody>
-          <a:bodyPr/>
-          <a:lstStyle/>
-          <a:p>
-            <a:endParaRPr lang="pt-PT"/>
-          </a:p>
-        </p:txBody>
-      </p:sp>
-      <p:sp>
-        <p:nvSpPr>
-          <p:cNvPr id="6" name="Text 4"/>
-          <p:cNvSpPr/>
-          <p:nvPr/>
-        </p:nvSpPr>
-        <p:spPr>
-          <a:xfrm>
-            <a:off x="274320" y="914400"/>
-            <a:ext cx="4023360" cy="457200"/>
-          </a:xfrm>
-          <a:prstGeom prst="rect">
-            <a:avLst/>
-          </a:prstGeom>
-          <a:noFill/>
-          <a:ln/>
-        </p:spPr>
-        <p:txBody>
-          <a:bodyPr wrap="square" lIns="0" tIns="0" rIns="0" bIns="0" rtlCol="0" anchor="ctr"/>
-          <a:lstStyle/>
-          <a:p>
-            <a:pPr marL="0" indent="0" algn="ctr">
-              <a:buNone/>
-            </a:pPr>
-            <a:r>
-              <a:rPr lang="en-US" sz="1500" b="1" dirty="0">
-                <a:solidFill>
-                  <a:srgbClr val="0D1B2A"/>
-                </a:solidFill>
-              </a:rPr>
-              <a:t>🔁  Workflow</a:t>
-            </a:r>
-            <a:endParaRPr lang="en-US" sz="1500" dirty="0"/>
-          </a:p>
-        </p:txBody>
-      </p:sp>
-      <p:sp>
-        <p:nvSpPr>
-          <p:cNvPr id="7" name="Text 5"/>
-          <p:cNvSpPr/>
-          <p:nvPr/>
-        </p:nvSpPr>
-        <p:spPr>
-          <a:xfrm>
-            <a:off x="457200" y="1481328"/>
-            <a:ext cx="3566160" cy="475488"/>
-          </a:xfrm>
-          <a:prstGeom prst="rect">
-            <a:avLst/>
-          </a:prstGeom>
-          <a:noFill/>
-          <a:ln/>
-        </p:spPr>
-        <p:txBody>
-          <a:bodyPr wrap="square" rtlCol="0" anchor="ctr"/>
-          <a:lstStyle/>
-          <a:p>
-            <a:pPr marL="0" indent="0">
-              <a:buNone/>
-            </a:pPr>
-            <a:r>
-              <a:rPr lang="en-US" sz="1100" dirty="0">
-                <a:solidFill>
-                  <a:srgbClr val="FFFFFF"/>
-                </a:solidFill>
-              </a:rPr>
-              <a:t>• Representa a lógica central do processo</a:t>
-            </a:r>
-            <a:endParaRPr lang="en-US" sz="1100" dirty="0"/>
-          </a:p>
-        </p:txBody>
-      </p:sp>
-      <p:sp>
-        <p:nvSpPr>
-          <p:cNvPr id="8" name="Text 6"/>
-          <p:cNvSpPr/>
-          <p:nvPr/>
-        </p:nvSpPr>
-        <p:spPr>
-          <a:xfrm>
-            <a:off x="457200" y="2011680"/>
-            <a:ext cx="3566160" cy="475488"/>
-          </a:xfrm>
-          <a:prstGeom prst="rect">
-            <a:avLst/>
-          </a:prstGeom>
-          <a:noFill/>
-          <a:ln/>
-        </p:spPr>
-        <p:txBody>
-          <a:bodyPr wrap="square" rtlCol="0" anchor="ctr"/>
-          <a:lstStyle/>
-          <a:p>
-            <a:pPr marL="0" indent="0">
-              <a:buNone/>
-            </a:pPr>
-            <a:r>
-              <a:rPr lang="en-US" sz="1100" dirty="0">
-                <a:solidFill>
-                  <a:srgbClr val="FFFFFF"/>
-                </a:solidFill>
-              </a:rPr>
-              <a:t>• Execução determinística (mesmo resultado para mesma entrada)</a:t>
-            </a:r>
-            <a:endParaRPr lang="en-US" sz="1100" dirty="0"/>
-          </a:p>
-        </p:txBody>
-      </p:sp>
-      <p:sp>
-        <p:nvSpPr>
-          <p:cNvPr id="9" name="Text 7"/>
-          <p:cNvSpPr/>
-          <p:nvPr/>
-        </p:nvSpPr>
-        <p:spPr>
-          <a:xfrm>
-            <a:off x="457200" y="2542032"/>
-            <a:ext cx="3566160" cy="475488"/>
-          </a:xfrm>
-          <a:prstGeom prst="rect">
-            <a:avLst/>
-          </a:prstGeom>
-          <a:noFill/>
-          <a:ln/>
-        </p:spPr>
-        <p:txBody>
-          <a:bodyPr wrap="square" rtlCol="0" anchor="ctr"/>
-          <a:lstStyle/>
-          <a:p>
-            <a:pPr marL="0" indent="0">
-              <a:buNone/>
-            </a:pPr>
-            <a:r>
-              <a:rPr lang="en-US" sz="1100" dirty="0">
-                <a:solidFill>
-                  <a:srgbClr val="FFFFFF"/>
-                </a:solidFill>
-              </a:rPr>
-              <a:t>• Durável e resiliente a falhas</a:t>
-            </a:r>
-            <a:endParaRPr lang="en-US" sz="1100" dirty="0"/>
-          </a:p>
-        </p:txBody>
-      </p:sp>
-      <p:sp>
-        <p:nvSpPr>
-          <p:cNvPr id="10" name="Text 8"/>
-          <p:cNvSpPr/>
-          <p:nvPr/>
-        </p:nvSpPr>
-        <p:spPr>
-          <a:xfrm>
-            <a:off x="457200" y="3072384"/>
-            <a:ext cx="3566160" cy="475488"/>
-          </a:xfrm>
-          <a:prstGeom prst="rect">
-            <a:avLst/>
-          </a:prstGeom>
-          <a:noFill/>
-          <a:ln/>
-        </p:spPr>
-        <p:txBody>
-          <a:bodyPr wrap="square" rtlCol="0" anchor="ctr"/>
-          <a:lstStyle/>
-          <a:p>
-            <a:pPr marL="0" indent="0">
-              <a:buNone/>
-            </a:pPr>
-            <a:r>
-              <a:rPr lang="en-US" sz="1100" dirty="0">
-                <a:solidFill>
-                  <a:srgbClr val="FFFFFF"/>
-                </a:solidFill>
-              </a:rPr>
-              <a:t>• NÃO acede sistemas externos diretamente</a:t>
-            </a:r>
-            <a:endParaRPr lang="en-US" sz="1100" dirty="0"/>
-          </a:p>
-        </p:txBody>
-      </p:sp>
-      <p:sp>
-        <p:nvSpPr>
-          <p:cNvPr id="11" name="Text 9"/>
-          <p:cNvSpPr/>
-          <p:nvPr/>
-        </p:nvSpPr>
-        <p:spPr>
-          <a:xfrm>
-            <a:off x="457200" y="3602736"/>
-            <a:ext cx="3566160" cy="475488"/>
-          </a:xfrm>
-          <a:prstGeom prst="rect">
-            <a:avLst/>
-          </a:prstGeom>
-          <a:noFill/>
-          <a:ln/>
-        </p:spPr>
-        <p:txBody>
-          <a:bodyPr wrap="square" rtlCol="0" anchor="ctr"/>
-          <a:lstStyle/>
-          <a:p>
-            <a:pPr marL="0" indent="0">
-              <a:buNone/>
-            </a:pPr>
-            <a:r>
-              <a:rPr lang="en-US" sz="1100" dirty="0">
-                <a:solidFill>
-                  <a:srgbClr val="FFFFFF"/>
-                </a:solidFill>
-              </a:rPr>
-              <a:t>• Coordena activities para trabalho externo</a:t>
-            </a:r>
-            <a:endParaRPr lang="en-US" sz="1100" dirty="0"/>
-          </a:p>
-        </p:txBody>
-      </p:sp>
-      <p:sp>
-        <p:nvSpPr>
-          <p:cNvPr id="12" name="Shape 10"/>
-          <p:cNvSpPr/>
-          <p:nvPr/>
-        </p:nvSpPr>
-        <p:spPr>
-          <a:xfrm>
-            <a:off x="4846320" y="914400"/>
-            <a:ext cx="4023360" cy="3840480"/>
-          </a:xfrm>
-          <a:prstGeom prst="rect">
-            <a:avLst/>
-          </a:prstGeom>
-          <a:solidFill>
-            <a:srgbClr val="112236"/>
-          </a:solidFill>
-          <a:ln w="12700">
-            <a:solidFill>
-              <a:srgbClr val="2D9CDB"/>
-            </a:solidFill>
-            <a:prstDash val="solid"/>
-          </a:ln>
-          <a:effectLst>
-            <a:outerShdw blurRad="101600" dist="38100" dir="8100000" algn="bl" rotWithShape="0">
-              <a:srgbClr val="000000">
-                <a:alpha val="18000"/>
-              </a:srgbClr>
-            </a:outerShdw>
-          </a:effectLst>
-        </p:spPr>
-        <p:txBody>
-          <a:bodyPr/>
-          <a:lstStyle/>
-          <a:p>
-            <a:endParaRPr lang="pt-PT"/>
-          </a:p>
-        </p:txBody>
-      </p:sp>
-      <p:sp>
-        <p:nvSpPr>
-          <p:cNvPr id="13" name="Shape 11"/>
-          <p:cNvSpPr/>
-          <p:nvPr/>
-        </p:nvSpPr>
-        <p:spPr>
-          <a:xfrm>
-            <a:off x="4846320" y="914400"/>
-            <a:ext cx="4023360" cy="457200"/>
-          </a:xfrm>
-          <a:prstGeom prst="rect">
-            <a:avLst/>
-          </a:prstGeom>
-          <a:solidFill>
-            <a:srgbClr val="2D9CDB"/>
-          </a:solidFill>
-          <a:ln w="12700">
-            <a:solidFill>
-              <a:srgbClr val="2D9CDB"/>
-            </a:solidFill>
-            <a:prstDash val="solid"/>
-          </a:ln>
-        </p:spPr>
-        <p:txBody>
-          <a:bodyPr/>
-          <a:lstStyle/>
-          <a:p>
-            <a:endParaRPr lang="pt-PT"/>
-          </a:p>
-        </p:txBody>
-      </p:sp>
-      <p:sp>
-        <p:nvSpPr>
-          <p:cNvPr id="14" name="Text 12"/>
-          <p:cNvSpPr/>
-          <p:nvPr/>
-        </p:nvSpPr>
-        <p:spPr>
-          <a:xfrm>
-            <a:off x="4846320" y="914400"/>
-            <a:ext cx="4023360" cy="457200"/>
-          </a:xfrm>
-          <a:prstGeom prst="rect">
-            <a:avLst/>
-          </a:prstGeom>
-          <a:noFill/>
-          <a:ln/>
-        </p:spPr>
-        <p:txBody>
-          <a:bodyPr wrap="square" lIns="0" tIns="0" rIns="0" bIns="0" rtlCol="0" anchor="ctr"/>
-          <a:lstStyle/>
-          <a:p>
-            <a:pPr marL="0" indent="0" algn="ctr">
-              <a:buNone/>
-            </a:pPr>
-            <a:r>
-              <a:rPr lang="en-US" sz="1500" b="1" dirty="0">
-                <a:solidFill>
-                  <a:srgbClr val="FFFFFF"/>
-                </a:solidFill>
-              </a:rPr>
-              <a:t>⚙️  Activity</a:t>
-            </a:r>
-            <a:endParaRPr lang="en-US" sz="1500" dirty="0"/>
-          </a:p>
-        </p:txBody>
-      </p:sp>
-      <p:sp>
-        <p:nvSpPr>
-          <p:cNvPr id="15" name="Text 13"/>
-          <p:cNvSpPr/>
-          <p:nvPr/>
-        </p:nvSpPr>
-        <p:spPr>
-          <a:xfrm>
-            <a:off x="5029200" y="1481328"/>
-            <a:ext cx="3566160" cy="475488"/>
-          </a:xfrm>
-          <a:prstGeom prst="rect">
-            <a:avLst/>
-          </a:prstGeom>
-          <a:noFill/>
-          <a:ln/>
-        </p:spPr>
-        <p:txBody>
-          <a:bodyPr wrap="square" rtlCol="0" anchor="ctr"/>
-          <a:lstStyle/>
-          <a:p>
-            <a:pPr marL="0" indent="0">
-              <a:buNone/>
-            </a:pPr>
-            <a:r>
-              <a:rPr lang="en-US" sz="1100" dirty="0">
-                <a:solidFill>
-                  <a:srgbClr val="FFFFFF"/>
-                </a:solidFill>
-              </a:rPr>
-              <a:t>• Executa uma única ação externa</a:t>
-            </a:r>
-            <a:endParaRPr lang="en-US" sz="1100" dirty="0"/>
-          </a:p>
-        </p:txBody>
-      </p:sp>
-      <p:sp>
-        <p:nvSpPr>
-          <p:cNvPr id="16" name="Text 14"/>
-          <p:cNvSpPr/>
-          <p:nvPr/>
-        </p:nvSpPr>
-        <p:spPr>
-          <a:xfrm>
-            <a:off x="5029200" y="2011680"/>
-            <a:ext cx="3566160" cy="475488"/>
-          </a:xfrm>
-          <a:prstGeom prst="rect">
-            <a:avLst/>
-          </a:prstGeom>
-          <a:noFill/>
-          <a:ln/>
-        </p:spPr>
-        <p:txBody>
-          <a:bodyPr wrap="square" rtlCol="0" anchor="ctr"/>
-          <a:lstStyle/>
-          <a:p>
-            <a:pPr marL="0" indent="0">
-              <a:buNone/>
-            </a:pPr>
-            <a:r>
-              <a:rPr lang="en-US" sz="1100" dirty="0">
-                <a:solidFill>
-                  <a:srgbClr val="FFFFFF"/>
-                </a:solidFill>
-              </a:rPr>
-              <a:t>• Não precisa de ser determinística</a:t>
-            </a:r>
-            <a:endParaRPr lang="en-US" sz="1100" dirty="0"/>
-          </a:p>
-        </p:txBody>
-      </p:sp>
-      <p:sp>
-        <p:nvSpPr>
-          <p:cNvPr id="17" name="Text 15"/>
-          <p:cNvSpPr/>
-          <p:nvPr/>
-        </p:nvSpPr>
-        <p:spPr>
-          <a:xfrm>
-            <a:off x="5029200" y="2542032"/>
-            <a:ext cx="3566160" cy="475488"/>
-          </a:xfrm>
-          <a:prstGeom prst="rect">
-            <a:avLst/>
-          </a:prstGeom>
-          <a:noFill/>
-          <a:ln/>
-        </p:spPr>
-        <p:txBody>
-          <a:bodyPr wrap="square" rtlCol="0" anchor="ctr"/>
-          <a:lstStyle/>
-          <a:p>
-            <a:pPr marL="0" indent="0">
-              <a:buNone/>
-            </a:pPr>
-            <a:r>
-              <a:rPr lang="en-US" sz="1100" dirty="0">
-                <a:solidFill>
-                  <a:srgbClr val="FFFFFF"/>
-                </a:solidFill>
-              </a:rPr>
-              <a:t>• Deve ser idempotente sempre que possível</a:t>
-            </a:r>
-            <a:endParaRPr lang="en-US" sz="1100" dirty="0"/>
-          </a:p>
-        </p:txBody>
-      </p:sp>
-      <p:sp>
-        <p:nvSpPr>
-          <p:cNvPr id="18" name="Text 16"/>
-          <p:cNvSpPr/>
-          <p:nvPr/>
-        </p:nvSpPr>
-        <p:spPr>
-          <a:xfrm>
-            <a:off x="5029200" y="3072384"/>
-            <a:ext cx="3566160" cy="475488"/>
-          </a:xfrm>
-          <a:prstGeom prst="rect">
-            <a:avLst/>
-          </a:prstGeom>
-          <a:noFill/>
-          <a:ln/>
-        </p:spPr>
-        <p:txBody>
-          <a:bodyPr wrap="square" rtlCol="0" anchor="ctr"/>
-          <a:lstStyle/>
-          <a:p>
-            <a:pPr marL="0" indent="0">
-              <a:buNone/>
-            </a:pPr>
-            <a:r>
-              <a:rPr lang="en-US" sz="1100" dirty="0">
-                <a:solidFill>
-                  <a:srgbClr val="FFFFFF"/>
-                </a:solidFill>
-              </a:rPr>
-              <a:t>• Suporta heartbeat para tarefas longas</a:t>
-            </a:r>
-            <a:endParaRPr lang="en-US" sz="1100" dirty="0"/>
-          </a:p>
-        </p:txBody>
-      </p:sp>
-      <p:sp>
-        <p:nvSpPr>
-          <p:cNvPr id="19" name="Text 17"/>
-          <p:cNvSpPr/>
-          <p:nvPr/>
-        </p:nvSpPr>
-        <p:spPr>
-          <a:xfrm>
-            <a:off x="5029200" y="3602736"/>
-            <a:ext cx="3566160" cy="475488"/>
-          </a:xfrm>
-          <a:prstGeom prst="rect">
-            <a:avLst/>
-          </a:prstGeom>
-          <a:noFill/>
-          <a:ln/>
-        </p:spPr>
-        <p:txBody>
-          <a:bodyPr wrap="square" rtlCol="0" anchor="ctr"/>
-          <a:lstStyle/>
-          <a:p>
-            <a:pPr marL="0" indent="0">
-              <a:buNone/>
-            </a:pPr>
-            <a:r>
-              <a:rPr lang="en-US" sz="1100" dirty="0">
-                <a:solidFill>
-                  <a:srgbClr val="FFFFFF"/>
-                </a:solidFill>
-              </a:rPr>
-              <a:t>• Acede HTTP, DB, email, etc.</a:t>
-            </a:r>
-            <a:endParaRPr lang="en-US" sz="1100" dirty="0"/>
-          </a:p>
-        </p:txBody>
-      </p:sp>
-      <p:sp>
-        <p:nvSpPr>
-          <p:cNvPr id="20" name="Shape 18"/>
-          <p:cNvSpPr/>
-          <p:nvPr/>
-        </p:nvSpPr>
-        <p:spPr>
-          <a:xfrm>
-            <a:off x="4315968" y="2834640"/>
-            <a:ext cx="512064" cy="0"/>
-          </a:xfrm>
-          <a:prstGeom prst="line">
-            <a:avLst/>
-          </a:prstGeom>
-          <a:noFill/>
-          <a:ln w="25400">
-            <a:solidFill>
-              <a:srgbClr val="00D4AA"/>
-            </a:solidFill>
-            <a:prstDash val="solid"/>
-          </a:ln>
-        </p:spPr>
-        <p:txBody>
-          <a:bodyPr/>
-          <a:lstStyle/>
-          <a:p>
-            <a:endParaRPr lang="pt-PT"/>
-          </a:p>
-        </p:txBody>
-      </p:sp>
-      <p:sp>
-        <p:nvSpPr>
-          <p:cNvPr id="21" name="Text 19"/>
-          <p:cNvSpPr/>
-          <p:nvPr/>
-        </p:nvSpPr>
-        <p:spPr>
-          <a:xfrm>
-            <a:off x="4315968" y="2651760"/>
-            <a:ext cx="512064" cy="365760"/>
-          </a:xfrm>
-          <a:prstGeom prst="rect">
-            <a:avLst/>
-          </a:prstGeom>
-          <a:noFill/>
-          <a:ln/>
-        </p:spPr>
-        <p:txBody>
-          <a:bodyPr wrap="square" rtlCol="0" anchor="ctr"/>
-          <a:lstStyle/>
-          <a:p>
-            <a:pPr marL="0" indent="0" algn="ctr">
-              <a:buNone/>
-            </a:pPr>
-            <a:r>
-              <a:rPr lang="en-US" sz="1600" dirty="0">
-                <a:solidFill>
-                  <a:srgbClr val="00D4AA"/>
-                </a:solidFill>
-              </a:rPr>
-              <a:t>→</a:t>
-            </a:r>
-            <a:endParaRPr lang="en-US" sz="1600" dirty="0"/>
-          </a:p>
-        </p:txBody>
-      </p:sp>
-    </p:spTree>
-  </p:cSld>
-  <p:clrMapOvr>
-    <a:masterClrMapping/>
-  </p:clrMapOvr>
-</p:sld>
-</file>
-
 <file path=ppt/slides/slide8.xml><?xml version="1.0" encoding="utf-8"?>
-<p:sld xmlns:a="http://schemas.openxmlformats.org/drawingml/2006/main" xmlns:r="http://schemas.openxmlformats.org/officeDocument/2006/relationships" xmlns:p="http://schemas.openxmlformats.org/presentationml/2006/main">
-  <p:cSld name="Slide 8">
-    <p:bg>
-      <p:bgPr>
-        <a:gradFill>
-          <a:gsLst>
-            <a:gs pos="0">
-              <a:schemeClr val="accent3">
-                <a:lumMod val="5000"/>
-                <a:lumOff val="95000"/>
-              </a:schemeClr>
-            </a:gs>
-            <a:gs pos="74000">
-              <a:schemeClr val="accent3">
-                <a:lumMod val="45000"/>
-                <a:lumOff val="55000"/>
-              </a:schemeClr>
-            </a:gs>
-            <a:gs pos="83000">
-              <a:schemeClr val="accent3">
-                <a:lumMod val="45000"/>
-                <a:lumOff val="55000"/>
-              </a:schemeClr>
-            </a:gs>
-            <a:gs pos="100000">
-              <a:schemeClr val="accent3">
-                <a:lumMod val="30000"/>
-                <a:lumOff val="70000"/>
-              </a:schemeClr>
-            </a:gs>
-          </a:gsLst>
-          <a:lin ang="5400000" scaled="1"/>
-        </a:gradFill>
-        <a:effectLst/>
-      </p:bgPr>
-    </p:bg>
-    <p:spTree>
-      <p:nvGrpSpPr>
-        <p:cNvPr id="1" name=""/>
-        <p:cNvGrpSpPr/>
-        <p:nvPr/>
-      </p:nvGrpSpPr>
-      <p:grpSpPr>
-        <a:xfrm>
-          <a:off x="0" y="0"/>
-          <a:ext cx="0" cy="0"/>
-          <a:chOff x="0" y="0"/>
-          <a:chExt cx="0" cy="0"/>
-        </a:xfrm>
-      </p:grpSpPr>
-      <p:sp>
-        <p:nvSpPr>
-          <p:cNvPr id="2" name="Shape 0"/>
-          <p:cNvSpPr/>
-          <p:nvPr/>
-        </p:nvSpPr>
-        <p:spPr>
-          <a:xfrm>
-            <a:off x="0" y="0"/>
-            <a:ext cx="9144000" cy="822960"/>
-          </a:xfrm>
-          <a:prstGeom prst="rect">
-            <a:avLst/>
-          </a:prstGeom>
-          <a:solidFill>
-            <a:srgbClr val="1B6CA8"/>
-          </a:solidFill>
-          <a:ln w="12700">
-            <a:solidFill>
-              <a:srgbClr val="1B6CA8"/>
-            </a:solidFill>
-            <a:prstDash val="solid"/>
-          </a:ln>
-        </p:spPr>
-        <p:txBody>
-          <a:bodyPr/>
-          <a:lstStyle/>
-          <a:p>
-            <a:endParaRPr lang="pt-PT"/>
-          </a:p>
-        </p:txBody>
-      </p:sp>
-      <p:sp>
-        <p:nvSpPr>
-          <p:cNvPr id="3" name="Text 1"/>
-          <p:cNvSpPr/>
-          <p:nvPr/>
-        </p:nvSpPr>
-        <p:spPr>
-          <a:xfrm>
-            <a:off x="457200" y="0"/>
-            <a:ext cx="8229600" cy="822960"/>
-          </a:xfrm>
-          <a:prstGeom prst="rect">
-            <a:avLst/>
-          </a:prstGeom>
-          <a:noFill/>
-          <a:ln/>
-        </p:spPr>
-        <p:txBody>
-          <a:bodyPr wrap="square" lIns="0" tIns="0" rIns="0" bIns="0" rtlCol="0" anchor="ctr"/>
-          <a:lstStyle/>
-          <a:p>
-            <a:pPr marL="0" indent="0">
-              <a:buNone/>
-            </a:pPr>
-            <a:r>
-              <a:rPr lang="en-US" sz="2400" b="1" dirty="0">
-                <a:solidFill>
-                  <a:srgbClr val="FFFFFF"/>
-                </a:solidFill>
-              </a:rPr>
-              <a:t>04  /  Signals vs Queries</a:t>
-            </a:r>
-            <a:endParaRPr lang="en-US" sz="2400" dirty="0"/>
-          </a:p>
-        </p:txBody>
-      </p:sp>
-      <p:sp>
-        <p:nvSpPr>
-          <p:cNvPr id="4" name="Shape 2"/>
-          <p:cNvSpPr/>
-          <p:nvPr/>
-        </p:nvSpPr>
-        <p:spPr>
-          <a:xfrm>
-            <a:off x="457200" y="1005840"/>
-            <a:ext cx="2286000" cy="502920"/>
-          </a:xfrm>
-          <a:prstGeom prst="rect">
-            <a:avLst/>
-          </a:prstGeom>
-          <a:solidFill>
-            <a:srgbClr val="0D1B2A"/>
-          </a:solidFill>
-          <a:ln w="12700">
-            <a:solidFill>
-              <a:srgbClr val="1B6CA8"/>
-            </a:solidFill>
-            <a:prstDash val="solid"/>
-          </a:ln>
-        </p:spPr>
-        <p:txBody>
-          <a:bodyPr/>
-          <a:lstStyle/>
-          <a:p>
-            <a:endParaRPr lang="pt-PT"/>
-          </a:p>
-        </p:txBody>
-      </p:sp>
-      <p:sp>
-        <p:nvSpPr>
-          <p:cNvPr id="5" name="Text 3"/>
-          <p:cNvSpPr/>
-          <p:nvPr/>
-        </p:nvSpPr>
-        <p:spPr>
-          <a:xfrm>
-            <a:off x="457200" y="1005840"/>
-            <a:ext cx="2286000" cy="502920"/>
-          </a:xfrm>
-          <a:prstGeom prst="rect">
-            <a:avLst/>
-          </a:prstGeom>
-          <a:noFill/>
-          <a:ln/>
-        </p:spPr>
-        <p:txBody>
-          <a:bodyPr wrap="square" lIns="0" tIns="0" rIns="0" bIns="0" rtlCol="0" anchor="ctr"/>
-          <a:lstStyle/>
-          <a:p>
-            <a:pPr marL="0" indent="0" algn="ctr">
-              <a:buNone/>
-            </a:pPr>
-            <a:endParaRPr lang="en-US" sz="1300" dirty="0"/>
-          </a:p>
-        </p:txBody>
-      </p:sp>
-      <p:sp>
-        <p:nvSpPr>
-          <p:cNvPr id="6" name="Shape 4"/>
-          <p:cNvSpPr/>
-          <p:nvPr/>
-        </p:nvSpPr>
-        <p:spPr>
-          <a:xfrm>
-            <a:off x="2743200" y="1005840"/>
-            <a:ext cx="2743200" cy="502920"/>
-          </a:xfrm>
-          <a:prstGeom prst="rect">
-            <a:avLst/>
-          </a:prstGeom>
-          <a:solidFill>
-            <a:srgbClr val="1B6CA8"/>
-          </a:solidFill>
-          <a:ln w="12700">
-            <a:solidFill>
-              <a:srgbClr val="1B6CA8"/>
-            </a:solidFill>
-            <a:prstDash val="solid"/>
-          </a:ln>
-        </p:spPr>
-        <p:txBody>
-          <a:bodyPr/>
-          <a:lstStyle/>
-          <a:p>
-            <a:endParaRPr lang="pt-PT"/>
-          </a:p>
-        </p:txBody>
-      </p:sp>
-      <p:sp>
-        <p:nvSpPr>
-          <p:cNvPr id="7" name="Text 5"/>
-          <p:cNvSpPr/>
-          <p:nvPr/>
-        </p:nvSpPr>
-        <p:spPr>
-          <a:xfrm>
-            <a:off x="2743200" y="1005840"/>
-            <a:ext cx="2743200" cy="502920"/>
-          </a:xfrm>
-          <a:prstGeom prst="rect">
-            <a:avLst/>
-          </a:prstGeom>
-          <a:noFill/>
-          <a:ln/>
-        </p:spPr>
-        <p:txBody>
-          <a:bodyPr wrap="square" lIns="0" tIns="0" rIns="0" bIns="0" rtlCol="0" anchor="ctr"/>
-          <a:lstStyle/>
-          <a:p>
-            <a:pPr marL="0" indent="0" algn="ctr">
-              <a:buNone/>
-            </a:pPr>
-            <a:r>
-              <a:rPr lang="en-US" sz="1300" b="1" dirty="0">
-                <a:solidFill>
-                  <a:srgbClr val="FFFFFF"/>
-                </a:solidFill>
-              </a:rPr>
-              <a:t>📡  Signal</a:t>
-            </a:r>
-            <a:endParaRPr lang="en-US" sz="1300" dirty="0"/>
-          </a:p>
-        </p:txBody>
-      </p:sp>
-      <p:sp>
-        <p:nvSpPr>
-          <p:cNvPr id="8" name="Shape 6"/>
-          <p:cNvSpPr/>
-          <p:nvPr/>
-        </p:nvSpPr>
-        <p:spPr>
-          <a:xfrm>
-            <a:off x="5486400" y="1005840"/>
-            <a:ext cx="2743200" cy="502920"/>
-          </a:xfrm>
-          <a:prstGeom prst="rect">
-            <a:avLst/>
-          </a:prstGeom>
-          <a:solidFill>
-            <a:srgbClr val="2D9CDB"/>
-          </a:solidFill>
-          <a:ln w="12700">
-            <a:solidFill>
-              <a:srgbClr val="1B6CA8"/>
-            </a:solidFill>
-            <a:prstDash val="solid"/>
-          </a:ln>
-        </p:spPr>
-        <p:txBody>
-          <a:bodyPr/>
-          <a:lstStyle/>
-          <a:p>
-            <a:endParaRPr lang="pt-PT"/>
-          </a:p>
-        </p:txBody>
-      </p:sp>
-      <p:sp>
-        <p:nvSpPr>
-          <p:cNvPr id="9" name="Text 7"/>
-          <p:cNvSpPr/>
-          <p:nvPr/>
-        </p:nvSpPr>
-        <p:spPr>
-          <a:xfrm>
-            <a:off x="5486400" y="1005840"/>
-            <a:ext cx="2743200" cy="502920"/>
-          </a:xfrm>
-          <a:prstGeom prst="rect">
-            <a:avLst/>
-          </a:prstGeom>
-          <a:noFill/>
-          <a:ln/>
-        </p:spPr>
-        <p:txBody>
-          <a:bodyPr wrap="square" lIns="0" tIns="0" rIns="0" bIns="0" rtlCol="0" anchor="ctr"/>
-          <a:lstStyle/>
-          <a:p>
-            <a:pPr marL="0" indent="0" algn="ctr">
-              <a:buNone/>
-            </a:pPr>
-            <a:r>
-              <a:rPr lang="en-US" sz="1300" b="1" dirty="0">
-                <a:solidFill>
-                  <a:srgbClr val="FFFFFF"/>
-                </a:solidFill>
-              </a:rPr>
-              <a:t>🔍  Query</a:t>
-            </a:r>
-            <a:endParaRPr lang="en-US" sz="1300" dirty="0"/>
-          </a:p>
-        </p:txBody>
-      </p:sp>
-      <p:sp>
-        <p:nvSpPr>
-          <p:cNvPr id="10" name="Shape 8"/>
-          <p:cNvSpPr/>
-          <p:nvPr/>
-        </p:nvSpPr>
-        <p:spPr>
-          <a:xfrm>
-            <a:off x="457200" y="1508760"/>
-            <a:ext cx="2286000" cy="749808"/>
-          </a:xfrm>
-          <a:prstGeom prst="rect">
-            <a:avLst/>
-          </a:prstGeom>
-          <a:solidFill>
-            <a:srgbClr val="112236"/>
-          </a:solidFill>
-          <a:ln w="12700">
-            <a:solidFill>
-              <a:srgbClr val="1B6CA8"/>
-            </a:solidFill>
-            <a:prstDash val="solid"/>
-          </a:ln>
-        </p:spPr>
-        <p:txBody>
-          <a:bodyPr/>
-          <a:lstStyle/>
-          <a:p>
-            <a:endParaRPr lang="pt-PT"/>
-          </a:p>
-        </p:txBody>
-      </p:sp>
-      <p:sp>
-        <p:nvSpPr>
-          <p:cNvPr id="11" name="Text 9"/>
-          <p:cNvSpPr/>
-          <p:nvPr/>
-        </p:nvSpPr>
-        <p:spPr>
-          <a:xfrm>
-            <a:off x="548640" y="1508760"/>
-            <a:ext cx="2103120" cy="749808"/>
-          </a:xfrm>
-          <a:prstGeom prst="rect">
-            <a:avLst/>
-          </a:prstGeom>
-          <a:noFill/>
-          <a:ln/>
-        </p:spPr>
-        <p:txBody>
-          <a:bodyPr wrap="square" rtlCol="0" anchor="ctr"/>
-          <a:lstStyle/>
-          <a:p>
-            <a:pPr marL="0" indent="0">
-              <a:buNone/>
-            </a:pPr>
-            <a:r>
-              <a:rPr lang="en-US" sz="1200" dirty="0">
-                <a:solidFill>
-                  <a:srgbClr val="FFFFFF"/>
-                </a:solidFill>
-              </a:rPr>
-              <a:t>Tipo</a:t>
-            </a:r>
-            <a:endParaRPr lang="en-US" sz="1200" dirty="0"/>
-          </a:p>
-        </p:txBody>
-      </p:sp>
-      <p:sp>
-        <p:nvSpPr>
-          <p:cNvPr id="12" name="Shape 10"/>
-          <p:cNvSpPr/>
-          <p:nvPr/>
-        </p:nvSpPr>
-        <p:spPr>
-          <a:xfrm>
-            <a:off x="2743200" y="1508760"/>
-            <a:ext cx="2743200" cy="749808"/>
-          </a:xfrm>
-          <a:prstGeom prst="rect">
-            <a:avLst/>
-          </a:prstGeom>
-          <a:solidFill>
-            <a:srgbClr val="112236"/>
-          </a:solidFill>
-          <a:ln w="12700">
-            <a:solidFill>
-              <a:srgbClr val="1B6CA8"/>
-            </a:solidFill>
-            <a:prstDash val="solid"/>
-          </a:ln>
-        </p:spPr>
-        <p:txBody>
-          <a:bodyPr/>
-          <a:lstStyle/>
-          <a:p>
-            <a:endParaRPr lang="pt-PT"/>
-          </a:p>
-        </p:txBody>
-      </p:sp>
-      <p:sp>
-        <p:nvSpPr>
-          <p:cNvPr id="13" name="Text 11"/>
-          <p:cNvSpPr/>
-          <p:nvPr/>
-        </p:nvSpPr>
-        <p:spPr>
-          <a:xfrm>
-            <a:off x="2834640" y="1508760"/>
-            <a:ext cx="2560320" cy="749808"/>
-          </a:xfrm>
-          <a:prstGeom prst="rect">
-            <a:avLst/>
-          </a:prstGeom>
-          <a:noFill/>
-          <a:ln/>
-        </p:spPr>
-        <p:txBody>
-          <a:bodyPr wrap="square" rtlCol="0" anchor="ctr"/>
-          <a:lstStyle/>
-          <a:p>
-            <a:pPr marL="0" indent="0">
-              <a:buNone/>
-            </a:pPr>
-            <a:r>
-              <a:rPr lang="en-US" sz="1200" dirty="0">
-                <a:solidFill>
-                  <a:srgbClr val="FFFFFF"/>
-                </a:solidFill>
-              </a:rPr>
-              <a:t>Assíncrono</a:t>
-            </a:r>
-            <a:endParaRPr lang="en-US" sz="1200" dirty="0"/>
-          </a:p>
-        </p:txBody>
-      </p:sp>
-      <p:sp>
-        <p:nvSpPr>
-          <p:cNvPr id="14" name="Shape 12"/>
-          <p:cNvSpPr/>
-          <p:nvPr/>
-        </p:nvSpPr>
-        <p:spPr>
-          <a:xfrm>
-            <a:off x="5486400" y="1508760"/>
-            <a:ext cx="2743200" cy="749808"/>
-          </a:xfrm>
-          <a:prstGeom prst="rect">
-            <a:avLst/>
-          </a:prstGeom>
-          <a:solidFill>
-            <a:srgbClr val="112236"/>
-          </a:solidFill>
-          <a:ln w="12700">
-            <a:solidFill>
-              <a:srgbClr val="1B6CA8"/>
-            </a:solidFill>
-            <a:prstDash val="solid"/>
-          </a:ln>
-        </p:spPr>
-        <p:txBody>
-          <a:bodyPr/>
-          <a:lstStyle/>
-          <a:p>
-            <a:endParaRPr lang="pt-PT"/>
-          </a:p>
-        </p:txBody>
-      </p:sp>
-      <p:sp>
-        <p:nvSpPr>
-          <p:cNvPr id="15" name="Text 13"/>
-          <p:cNvSpPr/>
-          <p:nvPr/>
-        </p:nvSpPr>
-        <p:spPr>
-          <a:xfrm>
-            <a:off x="5577840" y="1508760"/>
-            <a:ext cx="2560320" cy="749808"/>
-          </a:xfrm>
-          <a:prstGeom prst="rect">
-            <a:avLst/>
-          </a:prstGeom>
-          <a:noFill/>
-          <a:ln/>
-        </p:spPr>
-        <p:txBody>
-          <a:bodyPr wrap="square" rtlCol="0" anchor="ctr"/>
-          <a:lstStyle/>
-          <a:p>
-            <a:pPr marL="0" indent="0">
-              <a:buNone/>
-            </a:pPr>
-            <a:r>
-              <a:rPr lang="en-US" sz="1200" dirty="0">
-                <a:solidFill>
-                  <a:srgbClr val="FFFFFF"/>
-                </a:solidFill>
-              </a:rPr>
-              <a:t>Síncrono</a:t>
-            </a:r>
-            <a:endParaRPr lang="en-US" sz="1200" dirty="0"/>
-          </a:p>
-        </p:txBody>
-      </p:sp>
-      <p:sp>
-        <p:nvSpPr>
-          <p:cNvPr id="16" name="Shape 14"/>
-          <p:cNvSpPr/>
-          <p:nvPr/>
-        </p:nvSpPr>
-        <p:spPr>
-          <a:xfrm>
-            <a:off x="457200" y="2258568"/>
-            <a:ext cx="2286000" cy="749808"/>
-          </a:xfrm>
-          <a:prstGeom prst="rect">
-            <a:avLst/>
-          </a:prstGeom>
-          <a:solidFill>
-            <a:srgbClr val="0D1B2A"/>
-          </a:solidFill>
-          <a:ln w="12700">
-            <a:solidFill>
-              <a:srgbClr val="1B6CA8"/>
-            </a:solidFill>
-            <a:prstDash val="solid"/>
-          </a:ln>
-        </p:spPr>
-        <p:txBody>
-          <a:bodyPr/>
-          <a:lstStyle/>
-          <a:p>
-            <a:endParaRPr lang="pt-PT"/>
-          </a:p>
-        </p:txBody>
-      </p:sp>
-      <p:sp>
-        <p:nvSpPr>
-          <p:cNvPr id="17" name="Text 15"/>
-          <p:cNvSpPr/>
-          <p:nvPr/>
-        </p:nvSpPr>
-        <p:spPr>
-          <a:xfrm>
-            <a:off x="548640" y="2258568"/>
-            <a:ext cx="2103120" cy="749808"/>
-          </a:xfrm>
-          <a:prstGeom prst="rect">
-            <a:avLst/>
-          </a:prstGeom>
-          <a:noFill/>
-          <a:ln/>
-        </p:spPr>
-        <p:txBody>
-          <a:bodyPr wrap="square" rtlCol="0" anchor="ctr"/>
-          <a:lstStyle/>
-          <a:p>
-            <a:pPr marL="0" indent="0">
-              <a:buNone/>
-            </a:pPr>
-            <a:r>
-              <a:rPr lang="en-US" sz="1200" dirty="0">
-                <a:solidFill>
-                  <a:srgbClr val="FFFFFF"/>
-                </a:solidFill>
-              </a:rPr>
-              <a:t>Modifica estado?</a:t>
-            </a:r>
-            <a:endParaRPr lang="en-US" sz="1200" dirty="0"/>
-          </a:p>
-        </p:txBody>
-      </p:sp>
-      <p:sp>
-        <p:nvSpPr>
-          <p:cNvPr id="18" name="Shape 16"/>
-          <p:cNvSpPr/>
-          <p:nvPr/>
-        </p:nvSpPr>
-        <p:spPr>
-          <a:xfrm>
-            <a:off x="2743200" y="2258568"/>
-            <a:ext cx="2743200" cy="749808"/>
-          </a:xfrm>
-          <a:prstGeom prst="rect">
-            <a:avLst/>
-          </a:prstGeom>
-          <a:solidFill>
-            <a:srgbClr val="0D1B2A"/>
-          </a:solidFill>
-          <a:ln w="12700">
-            <a:solidFill>
-              <a:srgbClr val="1B6CA8"/>
-            </a:solidFill>
-            <a:prstDash val="solid"/>
-          </a:ln>
-        </p:spPr>
-        <p:txBody>
-          <a:bodyPr/>
-          <a:lstStyle/>
-          <a:p>
-            <a:endParaRPr lang="pt-PT"/>
-          </a:p>
-        </p:txBody>
-      </p:sp>
-      <p:sp>
-        <p:nvSpPr>
-          <p:cNvPr id="19" name="Text 17"/>
-          <p:cNvSpPr/>
-          <p:nvPr/>
-        </p:nvSpPr>
-        <p:spPr>
-          <a:xfrm>
-            <a:off x="2834640" y="2258568"/>
-            <a:ext cx="2560320" cy="749808"/>
-          </a:xfrm>
-          <a:prstGeom prst="rect">
-            <a:avLst/>
-          </a:prstGeom>
-          <a:noFill/>
-          <a:ln/>
-        </p:spPr>
-        <p:txBody>
-          <a:bodyPr wrap="square" rtlCol="0" anchor="ctr"/>
-          <a:lstStyle/>
-          <a:p>
-            <a:pPr marL="0" indent="0">
-              <a:buNone/>
-            </a:pPr>
-            <a:r>
-              <a:rPr lang="en-US" sz="1200" dirty="0">
-                <a:solidFill>
-                  <a:srgbClr val="FFFFFF"/>
-                </a:solidFill>
-              </a:rPr>
-              <a:t>✅  Sim</a:t>
-            </a:r>
-            <a:endParaRPr lang="en-US" sz="1200" dirty="0"/>
-          </a:p>
-        </p:txBody>
-      </p:sp>
-      <p:sp>
-        <p:nvSpPr>
-          <p:cNvPr id="20" name="Shape 18"/>
-          <p:cNvSpPr/>
-          <p:nvPr/>
-        </p:nvSpPr>
-        <p:spPr>
-          <a:xfrm>
-            <a:off x="5486400" y="2258568"/>
-            <a:ext cx="2743200" cy="749808"/>
-          </a:xfrm>
-          <a:prstGeom prst="rect">
-            <a:avLst/>
-          </a:prstGeom>
-          <a:solidFill>
-            <a:srgbClr val="0D1B2A"/>
-          </a:solidFill>
-          <a:ln w="12700">
-            <a:solidFill>
-              <a:srgbClr val="1B6CA8"/>
-            </a:solidFill>
-            <a:prstDash val="solid"/>
-          </a:ln>
-        </p:spPr>
-        <p:txBody>
-          <a:bodyPr/>
-          <a:lstStyle/>
-          <a:p>
-            <a:endParaRPr lang="pt-PT"/>
-          </a:p>
-        </p:txBody>
-      </p:sp>
-      <p:sp>
-        <p:nvSpPr>
-          <p:cNvPr id="21" name="Text 19"/>
-          <p:cNvSpPr/>
-          <p:nvPr/>
-        </p:nvSpPr>
-        <p:spPr>
-          <a:xfrm>
-            <a:off x="5577840" y="2258568"/>
-            <a:ext cx="2560320" cy="749808"/>
-          </a:xfrm>
-          <a:prstGeom prst="rect">
-            <a:avLst/>
-          </a:prstGeom>
-          <a:noFill/>
-          <a:ln/>
-        </p:spPr>
-        <p:txBody>
-          <a:bodyPr wrap="square" rtlCol="0" anchor="ctr"/>
-          <a:lstStyle/>
-          <a:p>
-            <a:pPr marL="0" indent="0">
-              <a:buNone/>
-            </a:pPr>
-            <a:r>
-              <a:rPr lang="en-US" sz="1200" dirty="0">
-                <a:solidFill>
-                  <a:srgbClr val="FFFFFF"/>
-                </a:solidFill>
-              </a:rPr>
-              <a:t>❌  Não</a:t>
-            </a:r>
-            <a:endParaRPr lang="en-US" sz="1200" dirty="0"/>
-          </a:p>
-        </p:txBody>
-      </p:sp>
-      <p:sp>
-        <p:nvSpPr>
-          <p:cNvPr id="22" name="Shape 20"/>
-          <p:cNvSpPr/>
-          <p:nvPr/>
-        </p:nvSpPr>
-        <p:spPr>
-          <a:xfrm>
-            <a:off x="457200" y="3008376"/>
-            <a:ext cx="2286000" cy="749808"/>
-          </a:xfrm>
-          <a:prstGeom prst="rect">
-            <a:avLst/>
-          </a:prstGeom>
-          <a:solidFill>
-            <a:srgbClr val="112236"/>
-          </a:solidFill>
-          <a:ln w="12700">
-            <a:solidFill>
-              <a:srgbClr val="1B6CA8"/>
-            </a:solidFill>
-            <a:prstDash val="solid"/>
-          </a:ln>
-        </p:spPr>
-        <p:txBody>
-          <a:bodyPr/>
-          <a:lstStyle/>
-          <a:p>
-            <a:endParaRPr lang="pt-PT"/>
-          </a:p>
-        </p:txBody>
-      </p:sp>
-      <p:sp>
-        <p:nvSpPr>
-          <p:cNvPr id="23" name="Text 21"/>
-          <p:cNvSpPr/>
-          <p:nvPr/>
-        </p:nvSpPr>
-        <p:spPr>
-          <a:xfrm>
-            <a:off x="548640" y="3008376"/>
-            <a:ext cx="2103120" cy="749808"/>
-          </a:xfrm>
-          <a:prstGeom prst="rect">
-            <a:avLst/>
-          </a:prstGeom>
-          <a:noFill/>
-          <a:ln/>
-        </p:spPr>
-        <p:txBody>
-          <a:bodyPr wrap="square" rtlCol="0" anchor="ctr"/>
-          <a:lstStyle/>
-          <a:p>
-            <a:pPr marL="0" indent="0">
-              <a:buNone/>
-            </a:pPr>
-            <a:r>
-              <a:rPr lang="en-US" sz="1200" dirty="0">
-                <a:solidFill>
-                  <a:srgbClr val="FFFFFF"/>
-                </a:solidFill>
-              </a:rPr>
-              <a:t>Retorna valor?</a:t>
-            </a:r>
-            <a:endParaRPr lang="en-US" sz="1200" dirty="0"/>
-          </a:p>
-        </p:txBody>
-      </p:sp>
-      <p:sp>
-        <p:nvSpPr>
-          <p:cNvPr id="24" name="Shape 22"/>
-          <p:cNvSpPr/>
-          <p:nvPr/>
-        </p:nvSpPr>
-        <p:spPr>
-          <a:xfrm>
-            <a:off x="2743200" y="3008376"/>
-            <a:ext cx="2743200" cy="749808"/>
-          </a:xfrm>
-          <a:prstGeom prst="rect">
-            <a:avLst/>
-          </a:prstGeom>
-          <a:solidFill>
-            <a:srgbClr val="112236"/>
-          </a:solidFill>
-          <a:ln w="12700">
-            <a:solidFill>
-              <a:srgbClr val="1B6CA8"/>
-            </a:solidFill>
-            <a:prstDash val="solid"/>
-          </a:ln>
-        </p:spPr>
-        <p:txBody>
-          <a:bodyPr/>
-          <a:lstStyle/>
-          <a:p>
-            <a:endParaRPr lang="pt-PT"/>
-          </a:p>
-        </p:txBody>
-      </p:sp>
-      <p:sp>
-        <p:nvSpPr>
-          <p:cNvPr id="25" name="Text 23"/>
-          <p:cNvSpPr/>
-          <p:nvPr/>
-        </p:nvSpPr>
-        <p:spPr>
-          <a:xfrm>
-            <a:off x="2834640" y="3008376"/>
-            <a:ext cx="2560320" cy="749808"/>
-          </a:xfrm>
-          <a:prstGeom prst="rect">
-            <a:avLst/>
-          </a:prstGeom>
-          <a:noFill/>
-          <a:ln/>
-        </p:spPr>
-        <p:txBody>
-          <a:bodyPr wrap="square" rtlCol="0" anchor="ctr"/>
-          <a:lstStyle/>
-          <a:p>
-            <a:pPr marL="0" indent="0">
-              <a:buNone/>
-            </a:pPr>
-            <a:r>
-              <a:rPr lang="en-US" sz="1200" dirty="0">
-                <a:solidFill>
-                  <a:srgbClr val="FFFFFF"/>
-                </a:solidFill>
-              </a:rPr>
-              <a:t>❌  Não</a:t>
-            </a:r>
-            <a:endParaRPr lang="en-US" sz="1200" dirty="0"/>
-          </a:p>
-        </p:txBody>
-      </p:sp>
-      <p:sp>
-        <p:nvSpPr>
-          <p:cNvPr id="26" name="Shape 24"/>
-          <p:cNvSpPr/>
-          <p:nvPr/>
-        </p:nvSpPr>
-        <p:spPr>
-          <a:xfrm>
-            <a:off x="5486400" y="3008376"/>
-            <a:ext cx="2743200" cy="749808"/>
-          </a:xfrm>
-          <a:prstGeom prst="rect">
-            <a:avLst/>
-          </a:prstGeom>
-          <a:solidFill>
-            <a:srgbClr val="112236"/>
-          </a:solidFill>
-          <a:ln w="12700">
-            <a:solidFill>
-              <a:srgbClr val="1B6CA8"/>
-            </a:solidFill>
-            <a:prstDash val="solid"/>
-          </a:ln>
-        </p:spPr>
-        <p:txBody>
-          <a:bodyPr/>
-          <a:lstStyle/>
-          <a:p>
-            <a:endParaRPr lang="pt-PT"/>
-          </a:p>
-        </p:txBody>
-      </p:sp>
-      <p:sp>
-        <p:nvSpPr>
-          <p:cNvPr id="27" name="Text 25"/>
-          <p:cNvSpPr/>
-          <p:nvPr/>
-        </p:nvSpPr>
-        <p:spPr>
-          <a:xfrm>
-            <a:off x="5577840" y="3008376"/>
-            <a:ext cx="2560320" cy="749808"/>
-          </a:xfrm>
-          <a:prstGeom prst="rect">
-            <a:avLst/>
-          </a:prstGeom>
-          <a:noFill/>
-          <a:ln/>
-        </p:spPr>
-        <p:txBody>
-          <a:bodyPr wrap="square" rtlCol="0" anchor="ctr"/>
-          <a:lstStyle/>
-          <a:p>
-            <a:pPr marL="0" indent="0">
-              <a:buNone/>
-            </a:pPr>
-            <a:r>
-              <a:rPr lang="en-US" sz="1200" dirty="0">
-                <a:solidFill>
-                  <a:srgbClr val="FFFFFF"/>
-                </a:solidFill>
-              </a:rPr>
-              <a:t>✅  Sim</a:t>
-            </a:r>
-            <a:endParaRPr lang="en-US" sz="1200" dirty="0"/>
-          </a:p>
-        </p:txBody>
-      </p:sp>
-      <p:sp>
-        <p:nvSpPr>
-          <p:cNvPr id="28" name="Shape 26"/>
-          <p:cNvSpPr/>
-          <p:nvPr/>
-        </p:nvSpPr>
-        <p:spPr>
-          <a:xfrm>
-            <a:off x="457200" y="3758184"/>
-            <a:ext cx="2286000" cy="749808"/>
-          </a:xfrm>
-          <a:prstGeom prst="rect">
-            <a:avLst/>
-          </a:prstGeom>
-          <a:solidFill>
-            <a:srgbClr val="0D1B2A"/>
-          </a:solidFill>
-          <a:ln w="12700">
-            <a:solidFill>
-              <a:srgbClr val="1B6CA8"/>
-            </a:solidFill>
-            <a:prstDash val="solid"/>
-          </a:ln>
-        </p:spPr>
-        <p:txBody>
-          <a:bodyPr/>
-          <a:lstStyle/>
-          <a:p>
-            <a:endParaRPr lang="pt-PT"/>
-          </a:p>
-        </p:txBody>
-      </p:sp>
-      <p:sp>
-        <p:nvSpPr>
-          <p:cNvPr id="29" name="Text 27"/>
-          <p:cNvSpPr/>
-          <p:nvPr/>
-        </p:nvSpPr>
-        <p:spPr>
-          <a:xfrm>
-            <a:off x="548640" y="3758184"/>
-            <a:ext cx="2103120" cy="749808"/>
-          </a:xfrm>
-          <a:prstGeom prst="rect">
-            <a:avLst/>
-          </a:prstGeom>
-          <a:noFill/>
-          <a:ln/>
-        </p:spPr>
-        <p:txBody>
-          <a:bodyPr wrap="square" rtlCol="0" anchor="ctr"/>
-          <a:lstStyle/>
-          <a:p>
-            <a:pPr marL="0" indent="0">
-              <a:buNone/>
-            </a:pPr>
-            <a:r>
-              <a:rPr lang="en-US" sz="1200" dirty="0">
-                <a:solidFill>
-                  <a:srgbClr val="FFFFFF"/>
-                </a:solidFill>
-              </a:rPr>
-              <a:t>Caso de uso</a:t>
-            </a:r>
-            <a:endParaRPr lang="en-US" sz="1200" dirty="0"/>
-          </a:p>
-        </p:txBody>
-      </p:sp>
-      <p:sp>
-        <p:nvSpPr>
-          <p:cNvPr id="30" name="Shape 28"/>
-          <p:cNvSpPr/>
-          <p:nvPr/>
-        </p:nvSpPr>
-        <p:spPr>
-          <a:xfrm>
-            <a:off x="2743200" y="3758184"/>
-            <a:ext cx="2743200" cy="749808"/>
-          </a:xfrm>
-          <a:prstGeom prst="rect">
-            <a:avLst/>
-          </a:prstGeom>
-          <a:solidFill>
-            <a:srgbClr val="0D1B2A"/>
-          </a:solidFill>
-          <a:ln w="12700">
-            <a:solidFill>
-              <a:srgbClr val="1B6CA8"/>
-            </a:solidFill>
-            <a:prstDash val="solid"/>
-          </a:ln>
-        </p:spPr>
-        <p:txBody>
-          <a:bodyPr/>
-          <a:lstStyle/>
-          <a:p>
-            <a:endParaRPr lang="pt-PT"/>
-          </a:p>
-        </p:txBody>
-      </p:sp>
-      <p:sp>
-        <p:nvSpPr>
-          <p:cNvPr id="31" name="Text 29"/>
-          <p:cNvSpPr/>
-          <p:nvPr/>
-        </p:nvSpPr>
-        <p:spPr>
-          <a:xfrm>
-            <a:off x="2834640" y="3758184"/>
-            <a:ext cx="2560320" cy="749808"/>
-          </a:xfrm>
-          <a:prstGeom prst="rect">
-            <a:avLst/>
-          </a:prstGeom>
-          <a:noFill/>
-          <a:ln/>
-        </p:spPr>
-        <p:txBody>
-          <a:bodyPr wrap="square" rtlCol="0" anchor="ctr"/>
-          <a:lstStyle/>
-          <a:p>
-            <a:pPr marL="0" indent="0">
-              <a:buNone/>
-            </a:pPr>
-            <a:r>
-              <a:rPr lang="en-US" sz="1200" dirty="0">
-                <a:solidFill>
-                  <a:srgbClr val="FFFFFF"/>
-                </a:solidFill>
-              </a:rPr>
-              <a:t>Cancelar encomenda, aprovar processo</a:t>
-            </a:r>
-            <a:endParaRPr lang="en-US" sz="1200" dirty="0"/>
-          </a:p>
-        </p:txBody>
-      </p:sp>
-      <p:sp>
-        <p:nvSpPr>
-          <p:cNvPr id="32" name="Shape 30"/>
-          <p:cNvSpPr/>
-          <p:nvPr/>
-        </p:nvSpPr>
-        <p:spPr>
-          <a:xfrm>
-            <a:off x="5486400" y="3758184"/>
-            <a:ext cx="2743200" cy="749808"/>
-          </a:xfrm>
-          <a:prstGeom prst="rect">
-            <a:avLst/>
-          </a:prstGeom>
-          <a:solidFill>
-            <a:srgbClr val="0D1B2A"/>
-          </a:solidFill>
-          <a:ln w="12700">
-            <a:solidFill>
-              <a:srgbClr val="1B6CA8"/>
-            </a:solidFill>
-            <a:prstDash val="solid"/>
-          </a:ln>
-        </p:spPr>
-        <p:txBody>
-          <a:bodyPr/>
-          <a:lstStyle/>
-          <a:p>
-            <a:endParaRPr lang="pt-PT"/>
-          </a:p>
-        </p:txBody>
-      </p:sp>
-      <p:sp>
-        <p:nvSpPr>
-          <p:cNvPr id="33" name="Text 31"/>
-          <p:cNvSpPr/>
-          <p:nvPr/>
-        </p:nvSpPr>
-        <p:spPr>
-          <a:xfrm>
-            <a:off x="5577840" y="3758184"/>
-            <a:ext cx="2560320" cy="749808"/>
-          </a:xfrm>
-          <a:prstGeom prst="rect">
-            <a:avLst/>
-          </a:prstGeom>
-          <a:noFill/>
-          <a:ln/>
-        </p:spPr>
-        <p:txBody>
-          <a:bodyPr wrap="square" rtlCol="0" anchor="ctr"/>
-          <a:lstStyle/>
-          <a:p>
-            <a:pPr marL="0" indent="0">
-              <a:buNone/>
-            </a:pPr>
-            <a:r>
-              <a:rPr lang="en-US" sz="1200" dirty="0">
-                <a:solidFill>
-                  <a:srgbClr val="FFFFFF"/>
-                </a:solidFill>
-              </a:rPr>
-              <a:t>Verificar estado, consultar progresso</a:t>
-            </a:r>
-            <a:endParaRPr lang="en-US" sz="1200" dirty="0"/>
-          </a:p>
-        </p:txBody>
-      </p:sp>
-      <p:sp>
-        <p:nvSpPr>
-          <p:cNvPr id="34" name="Shape 32"/>
-          <p:cNvSpPr/>
-          <p:nvPr/>
-        </p:nvSpPr>
-        <p:spPr>
-          <a:xfrm>
-            <a:off x="457200" y="4617720"/>
-            <a:ext cx="8229600" cy="347472"/>
-          </a:xfrm>
-          <a:prstGeom prst="rect">
-            <a:avLst/>
-          </a:prstGeom>
-          <a:solidFill>
-            <a:srgbClr val="1B6CA8"/>
-          </a:solidFill>
-          <a:ln w="12700">
-            <a:solidFill>
-              <a:srgbClr val="1B6CA8"/>
-            </a:solidFill>
-            <a:prstDash val="solid"/>
-          </a:ln>
-        </p:spPr>
-        <p:txBody>
-          <a:bodyPr/>
-          <a:lstStyle/>
-          <a:p>
-            <a:endParaRPr lang="pt-PT"/>
-          </a:p>
-        </p:txBody>
-      </p:sp>
-      <p:sp>
-        <p:nvSpPr>
-          <p:cNvPr id="35" name="Text 33"/>
-          <p:cNvSpPr/>
-          <p:nvPr/>
-        </p:nvSpPr>
-        <p:spPr>
-          <a:xfrm>
-            <a:off x="548640" y="4617720"/>
-            <a:ext cx="8046720" cy="347472"/>
-          </a:xfrm>
-          <a:prstGeom prst="rect">
-            <a:avLst/>
-          </a:prstGeom>
-          <a:noFill/>
-          <a:ln/>
-        </p:spPr>
-        <p:txBody>
-          <a:bodyPr wrap="square" rtlCol="0" anchor="ctr"/>
-          <a:lstStyle/>
-          <a:p>
-            <a:pPr marL="0" indent="0">
-              <a:buNone/>
-            </a:pPr>
-            <a:r>
-              <a:rPr lang="en-US" sz="1100" i="1" dirty="0">
-                <a:solidFill>
-                  <a:srgbClr val="FFFFFF"/>
-                </a:solidFill>
-              </a:rPr>
-              <a:t>💡  Usa Signal para agir sobre um workflow em execução, e Query para observar o seu estado.</a:t>
-            </a:r>
-            <a:endParaRPr lang="en-US" sz="1100" dirty="0"/>
-          </a:p>
-        </p:txBody>
-      </p:sp>
-    </p:spTree>
-  </p:cSld>
-  <p:clrMapOvr>
-    <a:masterClrMapping/>
-  </p:clrMapOvr>
-</p:sld>
-</file>
-
-<file path=ppt/slides/slide9.xml><?xml version="1.0" encoding="utf-8"?>
 <p:sld xmlns:a="http://schemas.openxmlformats.org/drawingml/2006/main" xmlns:r="http://schemas.openxmlformats.org/officeDocument/2006/relationships" xmlns:p="http://schemas.openxmlformats.org/presentationml/2006/main">
   <p:cSld name="Slide 9">
     <p:bg>
@@ -11121,7 +9211,7 @@
                   <a:srgbClr val="FFFFFF"/>
                 </a:solidFill>
               </a:rPr>
-              <a:t>05  /  Arquitetura Geral</a:t>
+              <a:t>06  /  Arquitetura Geral</a:t>
             </a:r>
             <a:endParaRPr lang="en-US" sz="2400" dirty="0"/>
           </a:p>
@@ -11135,8 +9225,8 @@
         </p:nvSpPr>
         <p:spPr>
           <a:xfrm>
-            <a:off x="255909" y="1005840"/>
-            <a:ext cx="2834640" cy="1463040"/>
+            <a:off x="513481" y="1005840"/>
+            <a:ext cx="2520000" cy="1440000"/>
           </a:xfrm>
           <a:prstGeom prst="rect">
             <a:avLst/>
@@ -11174,8 +9264,8 @@
         </p:nvSpPr>
         <p:spPr>
           <a:xfrm>
-            <a:off x="255909" y="1005840"/>
-            <a:ext cx="2834640" cy="411480"/>
+            <a:off x="513481" y="1005840"/>
+            <a:ext cx="2520000" cy="411480"/>
           </a:xfrm>
           <a:prstGeom prst="rect">
             <a:avLst/>
@@ -11206,8 +9296,8 @@
         </p:nvSpPr>
         <p:spPr>
           <a:xfrm>
-            <a:off x="255909" y="1005840"/>
-            <a:ext cx="2834640" cy="411480"/>
+            <a:off x="513480" y="1005840"/>
+            <a:ext cx="2468881" cy="411480"/>
           </a:xfrm>
           <a:prstGeom prst="rect">
             <a:avLst/>
@@ -11242,8 +9332,8 @@
         </p:nvSpPr>
         <p:spPr>
           <a:xfrm>
-            <a:off x="347349" y="1463040"/>
-            <a:ext cx="2651760" cy="914400"/>
+            <a:off x="604921" y="1463040"/>
+            <a:ext cx="2309597" cy="914400"/>
           </a:xfrm>
           <a:prstGeom prst="rect">
             <a:avLst/>
@@ -11278,8 +9368,8 @@
         </p:nvSpPr>
         <p:spPr>
           <a:xfrm>
-            <a:off x="3273429" y="1005840"/>
-            <a:ext cx="2834640" cy="1463040"/>
+            <a:off x="3234806" y="1005840"/>
+            <a:ext cx="2520000" cy="1440000"/>
           </a:xfrm>
           <a:prstGeom prst="rect">
             <a:avLst/>
@@ -11317,8 +9407,8 @@
         </p:nvSpPr>
         <p:spPr>
           <a:xfrm>
-            <a:off x="3273429" y="1005840"/>
-            <a:ext cx="2834640" cy="411480"/>
+            <a:off x="3234806" y="1005840"/>
+            <a:ext cx="2520000" cy="411480"/>
           </a:xfrm>
           <a:prstGeom prst="rect">
             <a:avLst/>
@@ -11349,8 +9439,8 @@
         </p:nvSpPr>
         <p:spPr>
           <a:xfrm>
-            <a:off x="3273429" y="1005840"/>
-            <a:ext cx="2834640" cy="411480"/>
+            <a:off x="3234805" y="1005840"/>
+            <a:ext cx="2451221" cy="411480"/>
           </a:xfrm>
           <a:prstGeom prst="rect">
             <a:avLst/>
@@ -11385,8 +9475,8 @@
         </p:nvSpPr>
         <p:spPr>
           <a:xfrm>
-            <a:off x="3364869" y="1463040"/>
-            <a:ext cx="2651760" cy="914400"/>
+            <a:off x="3326246" y="1463040"/>
+            <a:ext cx="2359780" cy="914400"/>
           </a:xfrm>
           <a:prstGeom prst="rect">
             <a:avLst/>
@@ -11421,8 +9511,8 @@
         </p:nvSpPr>
         <p:spPr>
           <a:xfrm>
-            <a:off x="255909" y="2834640"/>
-            <a:ext cx="2834640" cy="1463040"/>
+            <a:off x="5938302" y="1007097"/>
+            <a:ext cx="2520000" cy="1440000"/>
           </a:xfrm>
           <a:prstGeom prst="rect">
             <a:avLst/>
@@ -11460,8 +9550,8 @@
         </p:nvSpPr>
         <p:spPr>
           <a:xfrm>
-            <a:off x="255909" y="2834640"/>
-            <a:ext cx="2834640" cy="411480"/>
+            <a:off x="5938302" y="1007097"/>
+            <a:ext cx="2520000" cy="411480"/>
           </a:xfrm>
           <a:prstGeom prst="rect">
             <a:avLst/>
@@ -11492,8 +9582,8 @@
         </p:nvSpPr>
         <p:spPr>
           <a:xfrm>
-            <a:off x="255909" y="2834640"/>
-            <a:ext cx="2834640" cy="411480"/>
+            <a:off x="5952474" y="1007097"/>
+            <a:ext cx="2505827" cy="411480"/>
           </a:xfrm>
           <a:prstGeom prst="rect">
             <a:avLst/>
@@ -11528,8 +9618,8 @@
         </p:nvSpPr>
         <p:spPr>
           <a:xfrm>
-            <a:off x="347349" y="3291840"/>
-            <a:ext cx="2651760" cy="914400"/>
+            <a:off x="6029742" y="1464297"/>
+            <a:ext cx="2380172" cy="914400"/>
           </a:xfrm>
           <a:prstGeom prst="rect">
             <a:avLst/>
@@ -11564,8 +9654,8 @@
         </p:nvSpPr>
         <p:spPr>
           <a:xfrm>
-            <a:off x="3273429" y="2834640"/>
-            <a:ext cx="2834640" cy="1463040"/>
+            <a:off x="5938298" y="2747917"/>
+            <a:ext cx="2520000" cy="1440000"/>
           </a:xfrm>
           <a:prstGeom prst="rect">
             <a:avLst/>
@@ -11603,8 +9693,8 @@
         </p:nvSpPr>
         <p:spPr>
           <a:xfrm>
-            <a:off x="3273429" y="2834640"/>
-            <a:ext cx="2834640" cy="411480"/>
+            <a:off x="5938298" y="2747917"/>
+            <a:ext cx="2520000" cy="411480"/>
           </a:xfrm>
           <a:prstGeom prst="rect">
             <a:avLst/>
@@ -11635,8 +9725,8 @@
         </p:nvSpPr>
         <p:spPr>
           <a:xfrm>
-            <a:off x="3273429" y="2834640"/>
-            <a:ext cx="2834640" cy="411480"/>
+            <a:off x="5938298" y="2747917"/>
+            <a:ext cx="2520000" cy="411480"/>
           </a:xfrm>
           <a:prstGeom prst="rect">
             <a:avLst/>
@@ -11671,8 +9761,8 @@
         </p:nvSpPr>
         <p:spPr>
           <a:xfrm>
-            <a:off x="3364869" y="3291840"/>
-            <a:ext cx="2651760" cy="914400"/>
+            <a:off x="6029738" y="3205117"/>
+            <a:ext cx="2380176" cy="914400"/>
           </a:xfrm>
           <a:prstGeom prst="rect">
             <a:avLst/>
@@ -11707,8 +9797,8 @@
         </p:nvSpPr>
         <p:spPr>
           <a:xfrm>
-            <a:off x="6253512" y="1920240"/>
-            <a:ext cx="2834640" cy="1463040"/>
+            <a:off x="3234805" y="3550738"/>
+            <a:ext cx="2520000" cy="1440000"/>
           </a:xfrm>
           <a:prstGeom prst="rect">
             <a:avLst/>
@@ -11746,8 +9836,8 @@
         </p:nvSpPr>
         <p:spPr>
           <a:xfrm>
-            <a:off x="6253512" y="1920240"/>
-            <a:ext cx="2834640" cy="411480"/>
+            <a:off x="3234805" y="3550738"/>
+            <a:ext cx="2520000" cy="411480"/>
           </a:xfrm>
           <a:prstGeom prst="rect">
             <a:avLst/>
@@ -11778,8 +9868,8 @@
         </p:nvSpPr>
         <p:spPr>
           <a:xfrm>
-            <a:off x="6253512" y="1920240"/>
-            <a:ext cx="2834640" cy="411480"/>
+            <a:off x="3234805" y="3550738"/>
+            <a:ext cx="2520000" cy="411480"/>
           </a:xfrm>
           <a:prstGeom prst="rect">
             <a:avLst/>
@@ -11814,8 +9904,8 @@
         </p:nvSpPr>
         <p:spPr>
           <a:xfrm>
-            <a:off x="6344952" y="2377440"/>
-            <a:ext cx="2651760" cy="914400"/>
+            <a:off x="3326245" y="4007938"/>
+            <a:ext cx="2344329" cy="914400"/>
           </a:xfrm>
           <a:prstGeom prst="rect">
             <a:avLst/>
@@ -11842,24 +9932,269 @@
           </a:p>
         </p:txBody>
       </p:sp>
-      <p:sp>
-        <p:nvSpPr>
-          <p:cNvPr id="24" name="Shape 22"/>
-          <p:cNvSpPr/>
-          <p:nvPr/>
-        </p:nvSpPr>
-        <p:spPr>
-          <a:xfrm>
-            <a:off x="3090549" y="1737360"/>
-            <a:ext cx="201168" cy="0"/>
-          </a:xfrm>
-          <a:prstGeom prst="line">
-            <a:avLst/>
-          </a:prstGeom>
-          <a:noFill/>
+      <p:cxnSp>
+        <p:nvCxnSpPr>
+          <p:cNvPr id="28" name="Conexão Reta Unidirecional 27">
+            <a:extLst>
+              <a:ext uri="{FF2B5EF4-FFF2-40B4-BE49-F238E27FC236}">
+                <a16:creationId xmlns:a16="http://schemas.microsoft.com/office/drawing/2014/main" id="{AF88746F-ECBF-8193-848C-E24B8BDB1D55}"/>
+              </a:ext>
+            </a:extLst>
+          </p:cNvPr>
+          <p:cNvCxnSpPr>
+            <a:cxnSpLocks/>
+            <a:stCxn id="8" idx="2"/>
+            <a:endCxn id="21" idx="0"/>
+          </p:cNvCxnSpPr>
+          <p:nvPr/>
+        </p:nvCxnSpPr>
+        <p:spPr>
+          <a:xfrm flipH="1">
+            <a:off x="4494805" y="2445840"/>
+            <a:ext cx="1" cy="1104898"/>
+          </a:xfrm>
+          <a:prstGeom prst="straightConnector1">
+            <a:avLst/>
+          </a:prstGeom>
           <a:ln w="19050">
             <a:solidFill>
-              <a:srgbClr val="FFFFFF"/>
+              <a:schemeClr val="tx1"/>
+            </a:solidFill>
+            <a:tailEnd type="triangle"/>
+          </a:ln>
+        </p:spPr>
+        <p:style>
+          <a:lnRef idx="1">
+            <a:schemeClr val="accent1"/>
+          </a:lnRef>
+          <a:fillRef idx="0">
+            <a:schemeClr val="accent1"/>
+          </a:fillRef>
+          <a:effectRef idx="0">
+            <a:schemeClr val="accent1"/>
+          </a:effectRef>
+          <a:fontRef idx="minor">
+            <a:schemeClr val="tx1"/>
+          </a:fontRef>
+        </p:style>
+      </p:cxnSp>
+      <p:cxnSp>
+        <p:nvCxnSpPr>
+          <p:cNvPr id="37" name="Conexão Reta Unidirecional 36">
+            <a:extLst>
+              <a:ext uri="{FF2B5EF4-FFF2-40B4-BE49-F238E27FC236}">
+                <a16:creationId xmlns:a16="http://schemas.microsoft.com/office/drawing/2014/main" id="{5ACCBA04-FD58-71D4-151B-F6BD2C517834}"/>
+              </a:ext>
+            </a:extLst>
+          </p:cNvPr>
+          <p:cNvCxnSpPr>
+            <a:cxnSpLocks/>
+            <a:stCxn id="4" idx="3"/>
+            <a:endCxn id="8" idx="1"/>
+          </p:cNvCxnSpPr>
+          <p:nvPr/>
+        </p:nvCxnSpPr>
+        <p:spPr>
+          <a:xfrm>
+            <a:off x="3033481" y="1725840"/>
+            <a:ext cx="201325" cy="0"/>
+          </a:xfrm>
+          <a:prstGeom prst="straightConnector1">
+            <a:avLst/>
+          </a:prstGeom>
+          <a:ln w="19050">
+            <a:solidFill>
+              <a:schemeClr val="tx1"/>
+            </a:solidFill>
+            <a:tailEnd type="triangle"/>
+          </a:ln>
+        </p:spPr>
+        <p:style>
+          <a:lnRef idx="1">
+            <a:schemeClr val="accent1"/>
+          </a:lnRef>
+          <a:fillRef idx="0">
+            <a:schemeClr val="accent1"/>
+          </a:fillRef>
+          <a:effectRef idx="0">
+            <a:schemeClr val="accent1"/>
+          </a:effectRef>
+          <a:fontRef idx="minor">
+            <a:schemeClr val="tx1"/>
+          </a:fontRef>
+        </p:style>
+      </p:cxnSp>
+      <p:cxnSp>
+        <p:nvCxnSpPr>
+          <p:cNvPr id="40" name="Conexão Reta Unidirecional 39">
+            <a:extLst>
+              <a:ext uri="{FF2B5EF4-FFF2-40B4-BE49-F238E27FC236}">
+                <a16:creationId xmlns:a16="http://schemas.microsoft.com/office/drawing/2014/main" id="{0EDA1B8A-1C98-FF12-81B3-2E66C2C5FFDA}"/>
+              </a:ext>
+            </a:extLst>
+          </p:cNvPr>
+          <p:cNvCxnSpPr>
+            <a:cxnSpLocks/>
+            <a:stCxn id="8" idx="3"/>
+            <a:endCxn id="12" idx="1"/>
+          </p:cNvCxnSpPr>
+          <p:nvPr/>
+        </p:nvCxnSpPr>
+        <p:spPr>
+          <a:xfrm>
+            <a:off x="5754806" y="1725840"/>
+            <a:ext cx="183496" cy="1257"/>
+          </a:xfrm>
+          <a:prstGeom prst="straightConnector1">
+            <a:avLst/>
+          </a:prstGeom>
+          <a:ln w="19050">
+            <a:solidFill>
+              <a:schemeClr val="tx1"/>
+            </a:solidFill>
+            <a:tailEnd type="triangle"/>
+          </a:ln>
+        </p:spPr>
+        <p:style>
+          <a:lnRef idx="1">
+            <a:schemeClr val="accent1"/>
+          </a:lnRef>
+          <a:fillRef idx="0">
+            <a:schemeClr val="accent1"/>
+          </a:fillRef>
+          <a:effectRef idx="0">
+            <a:schemeClr val="accent1"/>
+          </a:effectRef>
+          <a:fontRef idx="minor">
+            <a:schemeClr val="tx1"/>
+          </a:fontRef>
+        </p:style>
+      </p:cxnSp>
+      <p:cxnSp>
+        <p:nvCxnSpPr>
+          <p:cNvPr id="48" name="Conexão Reta Unidirecional 47">
+            <a:extLst>
+              <a:ext uri="{FF2B5EF4-FFF2-40B4-BE49-F238E27FC236}">
+                <a16:creationId xmlns:a16="http://schemas.microsoft.com/office/drawing/2014/main" id="{7E2F4F85-E3E0-5A01-27B7-782D8FDB6494}"/>
+              </a:ext>
+            </a:extLst>
+          </p:cNvPr>
+          <p:cNvCxnSpPr>
+            <a:cxnSpLocks/>
+            <a:stCxn id="12" idx="2"/>
+            <a:endCxn id="17" idx="0"/>
+          </p:cNvCxnSpPr>
+          <p:nvPr/>
+        </p:nvCxnSpPr>
+        <p:spPr>
+          <a:xfrm flipH="1">
+            <a:off x="7198298" y="2447097"/>
+            <a:ext cx="4" cy="300820"/>
+          </a:xfrm>
+          <a:prstGeom prst="straightConnector1">
+            <a:avLst/>
+          </a:prstGeom>
+          <a:ln w="19050">
+            <a:solidFill>
+              <a:schemeClr val="tx1"/>
+            </a:solidFill>
+            <a:tailEnd type="triangle"/>
+          </a:ln>
+        </p:spPr>
+        <p:style>
+          <a:lnRef idx="1">
+            <a:schemeClr val="accent1"/>
+          </a:lnRef>
+          <a:fillRef idx="0">
+            <a:schemeClr val="accent1"/>
+          </a:fillRef>
+          <a:effectRef idx="0">
+            <a:schemeClr val="accent1"/>
+          </a:effectRef>
+          <a:fontRef idx="minor">
+            <a:schemeClr val="tx1"/>
+          </a:fontRef>
+        </p:style>
+      </p:cxnSp>
+    </p:spTree>
+  </p:cSld>
+  <p:clrMapOvr>
+    <a:masterClrMapping/>
+  </p:clrMapOvr>
+</p:sld>
+</file>
+
+<file path=ppt/slides/slide9.xml><?xml version="1.0" encoding="utf-8"?>
+<p:sld xmlns:a="http://schemas.openxmlformats.org/drawingml/2006/main" xmlns:r="http://schemas.openxmlformats.org/officeDocument/2006/relationships" xmlns:p="http://schemas.openxmlformats.org/presentationml/2006/main">
+  <p:cSld name="Slide 10">
+    <p:bg>
+      <p:bgPr>
+        <a:gradFill>
+          <a:gsLst>
+            <a:gs pos="0">
+              <a:schemeClr val="accent3">
+                <a:lumMod val="5000"/>
+                <a:lumOff val="95000"/>
+              </a:schemeClr>
+            </a:gs>
+            <a:gs pos="74000">
+              <a:schemeClr val="accent3">
+                <a:lumMod val="45000"/>
+                <a:lumOff val="55000"/>
+              </a:schemeClr>
+            </a:gs>
+            <a:gs pos="83000">
+              <a:schemeClr val="accent3">
+                <a:lumMod val="45000"/>
+                <a:lumOff val="55000"/>
+              </a:schemeClr>
+            </a:gs>
+            <a:gs pos="100000">
+              <a:schemeClr val="accent3">
+                <a:lumMod val="30000"/>
+                <a:lumOff val="70000"/>
+              </a:schemeClr>
+            </a:gs>
+          </a:gsLst>
+          <a:lin ang="5400000" scaled="1"/>
+        </a:gradFill>
+        <a:effectLst/>
+      </p:bgPr>
+    </p:bg>
+    <p:spTree>
+      <p:nvGrpSpPr>
+        <p:cNvPr id="1" name=""/>
+        <p:cNvGrpSpPr/>
+        <p:nvPr/>
+      </p:nvGrpSpPr>
+      <p:grpSpPr>
+        <a:xfrm>
+          <a:off x="0" y="0"/>
+          <a:ext cx="0" cy="0"/>
+          <a:chOff x="0" y="0"/>
+          <a:chExt cx="0" cy="0"/>
+        </a:xfrm>
+      </p:grpSpPr>
+      <p:sp>
+        <p:nvSpPr>
+          <p:cNvPr id="2" name="Shape 0"/>
+          <p:cNvSpPr/>
+          <p:nvPr/>
+        </p:nvSpPr>
+        <p:spPr>
+          <a:xfrm>
+            <a:off x="0" y="0"/>
+            <a:ext cx="9144000" cy="822960"/>
+          </a:xfrm>
+          <a:prstGeom prst="rect">
+            <a:avLst/>
+          </a:prstGeom>
+          <a:solidFill>
+            <a:srgbClr val="1B6CA8"/>
+          </a:solidFill>
+          <a:ln w="12700">
+            <a:solidFill>
+              <a:srgbClr val="1B6CA8"/>
             </a:solidFill>
             <a:prstDash val="solid"/>
           </a:ln>
@@ -11874,61 +10209,70 @@
       </p:sp>
       <p:sp>
         <p:nvSpPr>
-          <p:cNvPr id="25" name="Text 23"/>
-          <p:cNvSpPr/>
-          <p:nvPr/>
-        </p:nvSpPr>
-        <p:spPr>
-          <a:xfrm>
-            <a:off x="2999109" y="1572768"/>
-            <a:ext cx="365760" cy="320040"/>
-          </a:xfrm>
-          <a:prstGeom prst="rect">
-            <a:avLst/>
-          </a:prstGeom>
-          <a:noFill/>
-          <a:ln/>
-        </p:spPr>
-        <p:txBody>
-          <a:bodyPr wrap="square" rtlCol="0" anchor="ctr"/>
-          <a:lstStyle/>
-          <a:p>
-            <a:pPr marL="0" indent="0" algn="ctr">
-              <a:buNone/>
-            </a:pPr>
-            <a:r>
-              <a:rPr lang="en-US" sz="1400" dirty="0">
+          <p:cNvPr id="3" name="Text 1"/>
+          <p:cNvSpPr/>
+          <p:nvPr/>
+        </p:nvSpPr>
+        <p:spPr>
+          <a:xfrm>
+            <a:off x="457200" y="0"/>
+            <a:ext cx="8229600" cy="822960"/>
+          </a:xfrm>
+          <a:prstGeom prst="rect">
+            <a:avLst/>
+          </a:prstGeom>
+          <a:noFill/>
+          <a:ln/>
+        </p:spPr>
+        <p:txBody>
+          <a:bodyPr wrap="square" lIns="0" tIns="0" rIns="0" bIns="0" rtlCol="0" anchor="ctr"/>
+          <a:lstStyle/>
+          <a:p>
+            <a:pPr marL="0" indent="0">
+              <a:buNone/>
+            </a:pPr>
+            <a:r>
+              <a:rPr lang="en-US" sz="2400" b="1" dirty="0">
                 <a:solidFill>
                   <a:srgbClr val="FFFFFF"/>
                 </a:solidFill>
               </a:rPr>
-              <a:t>→</a:t>
-            </a:r>
-            <a:endParaRPr lang="en-US" sz="1400" dirty="0"/>
-          </a:p>
-        </p:txBody>
-      </p:sp>
-      <p:sp>
-        <p:nvSpPr>
-          <p:cNvPr id="26" name="Shape 24"/>
-          <p:cNvSpPr/>
-          <p:nvPr/>
-        </p:nvSpPr>
-        <p:spPr>
-          <a:xfrm>
-            <a:off x="3090549" y="3566160"/>
-            <a:ext cx="201168" cy="0"/>
-          </a:xfrm>
-          <a:prstGeom prst="line">
-            <a:avLst/>
-          </a:prstGeom>
-          <a:noFill/>
+              <a:t>07  /  Fluxo de Execução</a:t>
+            </a:r>
+            <a:endParaRPr lang="en-US" sz="2400" dirty="0"/>
+          </a:p>
+        </p:txBody>
+      </p:sp>
+      <p:sp>
+        <p:nvSpPr>
+          <p:cNvPr id="4" name="Shape 2"/>
+          <p:cNvSpPr/>
+          <p:nvPr/>
+        </p:nvSpPr>
+        <p:spPr>
+          <a:xfrm>
+            <a:off x="274320" y="1005840"/>
+            <a:ext cx="2743200" cy="1325880"/>
+          </a:xfrm>
+          <a:prstGeom prst="rect">
+            <a:avLst/>
+          </a:prstGeom>
+          <a:solidFill>
+            <a:srgbClr val="112236"/>
+          </a:solidFill>
           <a:ln w="19050">
             <a:solidFill>
-              <a:srgbClr val="FFFFFF"/>
+              <a:srgbClr val="2D9CDB"/>
             </a:solidFill>
             <a:prstDash val="solid"/>
           </a:ln>
+          <a:effectLst>
+            <a:outerShdw blurRad="101600" dist="38100" dir="8100000" algn="bl" rotWithShape="0">
+              <a:srgbClr val="000000">
+                <a:alpha val="18000"/>
+              </a:srgbClr>
+            </a:outerShdw>
+          </a:effectLst>
         </p:spPr>
         <p:txBody>
           <a:bodyPr/>
@@ -11940,14 +10284,82 @@
       </p:sp>
       <p:sp>
         <p:nvSpPr>
-          <p:cNvPr id="27" name="Text 25"/>
-          <p:cNvSpPr/>
-          <p:nvPr/>
-        </p:nvSpPr>
-        <p:spPr>
-          <a:xfrm>
-            <a:off x="2999109" y="3401568"/>
-            <a:ext cx="365760" cy="320040"/>
+          <p:cNvPr id="5" name="Shape 3"/>
+          <p:cNvSpPr/>
+          <p:nvPr/>
+        </p:nvSpPr>
+        <p:spPr>
+          <a:xfrm>
+            <a:off x="365760" y="1097280"/>
+            <a:ext cx="502920" cy="502920"/>
+          </a:xfrm>
+          <a:prstGeom prst="ellipse">
+            <a:avLst/>
+          </a:prstGeom>
+          <a:solidFill>
+            <a:srgbClr val="2D9CDB"/>
+          </a:solidFill>
+          <a:ln w="12700">
+            <a:solidFill>
+              <a:srgbClr val="2D9CDB"/>
+            </a:solidFill>
+            <a:prstDash val="solid"/>
+          </a:ln>
+        </p:spPr>
+        <p:txBody>
+          <a:bodyPr/>
+          <a:lstStyle/>
+          <a:p>
+            <a:endParaRPr lang="pt-PT"/>
+          </a:p>
+        </p:txBody>
+      </p:sp>
+      <p:sp>
+        <p:nvSpPr>
+          <p:cNvPr id="6" name="Text 4"/>
+          <p:cNvSpPr/>
+          <p:nvPr/>
+        </p:nvSpPr>
+        <p:spPr>
+          <a:xfrm>
+            <a:off x="365760" y="1097280"/>
+            <a:ext cx="502920" cy="502920"/>
+          </a:xfrm>
+          <a:prstGeom prst="rect">
+            <a:avLst/>
+          </a:prstGeom>
+          <a:noFill/>
+          <a:ln/>
+        </p:spPr>
+        <p:txBody>
+          <a:bodyPr wrap="square" lIns="0" tIns="0" rIns="0" bIns="0" rtlCol="0" anchor="ctr"/>
+          <a:lstStyle/>
+          <a:p>
+            <a:pPr marL="0" indent="0" algn="ctr">
+              <a:buNone/>
+            </a:pPr>
+            <a:r>
+              <a:rPr lang="en-US" sz="1600" b="1" dirty="0">
+                <a:solidFill>
+                  <a:srgbClr val="0D1B2A"/>
+                </a:solidFill>
+              </a:rPr>
+              <a:t>1</a:t>
+            </a:r>
+            <a:endParaRPr lang="en-US" sz="1600" dirty="0"/>
+          </a:p>
+        </p:txBody>
+      </p:sp>
+      <p:sp>
+        <p:nvSpPr>
+          <p:cNvPr id="7" name="Text 5"/>
+          <p:cNvSpPr/>
+          <p:nvPr/>
+        </p:nvSpPr>
+        <p:spPr>
+          <a:xfrm>
+            <a:off x="960120" y="1078992"/>
+            <a:ext cx="1965960" cy="1097280"/>
           </a:xfrm>
           <a:prstGeom prst="rect">
             <a:avLst/>
@@ -11959,21 +10371,987 @@
           <a:bodyPr wrap="square" rtlCol="0" anchor="ctr"/>
           <a:lstStyle/>
           <a:p>
+            <a:pPr marL="0" indent="0">
+              <a:buNone/>
+            </a:pPr>
+            <a:r>
+              <a:rPr lang="en-US" sz="1200" dirty="0">
+                <a:solidFill>
+                  <a:srgbClr val="FFFFFF"/>
+                </a:solidFill>
+              </a:rPr>
+              <a:t>Client inicia o workflow</a:t>
+            </a:r>
+            <a:endParaRPr lang="en-US" sz="1200" dirty="0"/>
+          </a:p>
+        </p:txBody>
+      </p:sp>
+      <p:sp>
+        <p:nvSpPr>
+          <p:cNvPr id="9" name="Shape 7"/>
+          <p:cNvSpPr/>
+          <p:nvPr/>
+        </p:nvSpPr>
+        <p:spPr>
+          <a:xfrm>
+            <a:off x="3200400" y="1005840"/>
+            <a:ext cx="2743200" cy="1325880"/>
+          </a:xfrm>
+          <a:prstGeom prst="rect">
+            <a:avLst/>
+          </a:prstGeom>
+          <a:solidFill>
+            <a:srgbClr val="112236"/>
+          </a:solidFill>
+          <a:ln w="19050">
+            <a:solidFill>
+              <a:srgbClr val="1B6CA8"/>
+            </a:solidFill>
+            <a:prstDash val="solid"/>
+          </a:ln>
+          <a:effectLst>
+            <a:outerShdw blurRad="101600" dist="38100" dir="8100000" algn="bl" rotWithShape="0">
+              <a:srgbClr val="000000">
+                <a:alpha val="18000"/>
+              </a:srgbClr>
+            </a:outerShdw>
+          </a:effectLst>
+        </p:spPr>
+        <p:txBody>
+          <a:bodyPr/>
+          <a:lstStyle/>
+          <a:p>
+            <a:endParaRPr lang="pt-PT"/>
+          </a:p>
+        </p:txBody>
+      </p:sp>
+      <p:sp>
+        <p:nvSpPr>
+          <p:cNvPr id="10" name="Shape 8"/>
+          <p:cNvSpPr/>
+          <p:nvPr/>
+        </p:nvSpPr>
+        <p:spPr>
+          <a:xfrm>
+            <a:off x="3291840" y="1097280"/>
+            <a:ext cx="502920" cy="502920"/>
+          </a:xfrm>
+          <a:prstGeom prst="ellipse">
+            <a:avLst/>
+          </a:prstGeom>
+          <a:solidFill>
+            <a:srgbClr val="1B6CA8"/>
+          </a:solidFill>
+          <a:ln w="12700">
+            <a:solidFill>
+              <a:srgbClr val="1B6CA8"/>
+            </a:solidFill>
+            <a:prstDash val="solid"/>
+          </a:ln>
+        </p:spPr>
+        <p:txBody>
+          <a:bodyPr/>
+          <a:lstStyle/>
+          <a:p>
+            <a:endParaRPr lang="pt-PT"/>
+          </a:p>
+        </p:txBody>
+      </p:sp>
+      <p:sp>
+        <p:nvSpPr>
+          <p:cNvPr id="11" name="Text 9"/>
+          <p:cNvSpPr/>
+          <p:nvPr/>
+        </p:nvSpPr>
+        <p:spPr>
+          <a:xfrm>
+            <a:off x="3291840" y="1097280"/>
+            <a:ext cx="502920" cy="502920"/>
+          </a:xfrm>
+          <a:prstGeom prst="rect">
+            <a:avLst/>
+          </a:prstGeom>
+          <a:noFill/>
+          <a:ln/>
+        </p:spPr>
+        <p:txBody>
+          <a:bodyPr wrap="square" lIns="0" tIns="0" rIns="0" bIns="0" rtlCol="0" anchor="ctr"/>
+          <a:lstStyle/>
+          <a:p>
             <a:pPr marL="0" indent="0" algn="ctr">
               <a:buNone/>
             </a:pPr>
             <a:r>
-              <a:rPr lang="en-US" sz="1400" dirty="0">
+              <a:rPr lang="en-US" sz="1600" b="1" dirty="0">
+                <a:solidFill>
+                  <a:srgbClr val="0D1B2A"/>
+                </a:solidFill>
+              </a:rPr>
+              <a:t>2</a:t>
+            </a:r>
+            <a:endParaRPr lang="en-US" sz="1600" dirty="0"/>
+          </a:p>
+        </p:txBody>
+      </p:sp>
+      <p:sp>
+        <p:nvSpPr>
+          <p:cNvPr id="12" name="Text 10"/>
+          <p:cNvSpPr/>
+          <p:nvPr/>
+        </p:nvSpPr>
+        <p:spPr>
+          <a:xfrm>
+            <a:off x="3886200" y="1078992"/>
+            <a:ext cx="1965960" cy="1097280"/>
+          </a:xfrm>
+          <a:prstGeom prst="rect">
+            <a:avLst/>
+          </a:prstGeom>
+          <a:noFill/>
+          <a:ln/>
+        </p:spPr>
+        <p:txBody>
+          <a:bodyPr wrap="square" rtlCol="0" anchor="ctr"/>
+          <a:lstStyle/>
+          <a:p>
+            <a:pPr marL="0" indent="0">
+              <a:buNone/>
+            </a:pPr>
+            <a:r>
+              <a:rPr lang="en-US" sz="1200" dirty="0">
                 <a:solidFill>
                   <a:srgbClr val="FFFFFF"/>
                 </a:solidFill>
               </a:rPr>
-              <a:t>→</a:t>
-            </a:r>
-            <a:endParaRPr lang="en-US" sz="1400" dirty="0"/>
-          </a:p>
-        </p:txBody>
-      </p:sp>
+              <a:t>Temporal Service regista o evento</a:t>
+            </a:r>
+            <a:endParaRPr lang="en-US" sz="1200" dirty="0"/>
+          </a:p>
+        </p:txBody>
+      </p:sp>
+      <p:sp>
+        <p:nvSpPr>
+          <p:cNvPr id="14" name="Shape 12"/>
+          <p:cNvSpPr/>
+          <p:nvPr/>
+        </p:nvSpPr>
+        <p:spPr>
+          <a:xfrm>
+            <a:off x="6126480" y="1005840"/>
+            <a:ext cx="2743200" cy="1325880"/>
+          </a:xfrm>
+          <a:prstGeom prst="rect">
+            <a:avLst/>
+          </a:prstGeom>
+          <a:solidFill>
+            <a:srgbClr val="112236"/>
+          </a:solidFill>
+          <a:ln w="19050">
+            <a:solidFill>
+              <a:srgbClr val="9B59B6"/>
+            </a:solidFill>
+            <a:prstDash val="solid"/>
+          </a:ln>
+          <a:effectLst>
+            <a:outerShdw blurRad="101600" dist="38100" dir="8100000" algn="bl" rotWithShape="0">
+              <a:srgbClr val="000000">
+                <a:alpha val="18000"/>
+              </a:srgbClr>
+            </a:outerShdw>
+          </a:effectLst>
+        </p:spPr>
+        <p:txBody>
+          <a:bodyPr/>
+          <a:lstStyle/>
+          <a:p>
+            <a:endParaRPr lang="pt-PT"/>
+          </a:p>
+        </p:txBody>
+      </p:sp>
+      <p:sp>
+        <p:nvSpPr>
+          <p:cNvPr id="15" name="Shape 13"/>
+          <p:cNvSpPr/>
+          <p:nvPr/>
+        </p:nvSpPr>
+        <p:spPr>
+          <a:xfrm>
+            <a:off x="6217920" y="1097280"/>
+            <a:ext cx="502920" cy="502920"/>
+          </a:xfrm>
+          <a:prstGeom prst="ellipse">
+            <a:avLst/>
+          </a:prstGeom>
+          <a:solidFill>
+            <a:srgbClr val="9B59B6"/>
+          </a:solidFill>
+          <a:ln w="12700">
+            <a:solidFill>
+              <a:srgbClr val="9B59B6"/>
+            </a:solidFill>
+            <a:prstDash val="solid"/>
+          </a:ln>
+        </p:spPr>
+        <p:txBody>
+          <a:bodyPr/>
+          <a:lstStyle/>
+          <a:p>
+            <a:endParaRPr lang="pt-PT"/>
+          </a:p>
+        </p:txBody>
+      </p:sp>
+      <p:sp>
+        <p:nvSpPr>
+          <p:cNvPr id="16" name="Text 14"/>
+          <p:cNvSpPr/>
+          <p:nvPr/>
+        </p:nvSpPr>
+        <p:spPr>
+          <a:xfrm>
+            <a:off x="6217920" y="1097280"/>
+            <a:ext cx="502920" cy="502920"/>
+          </a:xfrm>
+          <a:prstGeom prst="rect">
+            <a:avLst/>
+          </a:prstGeom>
+          <a:noFill/>
+          <a:ln/>
+        </p:spPr>
+        <p:txBody>
+          <a:bodyPr wrap="square" lIns="0" tIns="0" rIns="0" bIns="0" rtlCol="0" anchor="ctr"/>
+          <a:lstStyle/>
+          <a:p>
+            <a:pPr marL="0" indent="0" algn="ctr">
+              <a:buNone/>
+            </a:pPr>
+            <a:r>
+              <a:rPr lang="en-US" sz="1600" b="1" dirty="0">
+                <a:solidFill>
+                  <a:srgbClr val="0D1B2A"/>
+                </a:solidFill>
+              </a:rPr>
+              <a:t>3</a:t>
+            </a:r>
+            <a:endParaRPr lang="en-US" sz="1600" dirty="0"/>
+          </a:p>
+        </p:txBody>
+      </p:sp>
+      <p:sp>
+        <p:nvSpPr>
+          <p:cNvPr id="17" name="Text 15"/>
+          <p:cNvSpPr/>
+          <p:nvPr/>
+        </p:nvSpPr>
+        <p:spPr>
+          <a:xfrm>
+            <a:off x="6812280" y="1078992"/>
+            <a:ext cx="1965960" cy="1097280"/>
+          </a:xfrm>
+          <a:prstGeom prst="rect">
+            <a:avLst/>
+          </a:prstGeom>
+          <a:noFill/>
+          <a:ln/>
+        </p:spPr>
+        <p:txBody>
+          <a:bodyPr wrap="square" rtlCol="0" anchor="ctr"/>
+          <a:lstStyle/>
+          <a:p>
+            <a:pPr marL="0" indent="0">
+              <a:buNone/>
+            </a:pPr>
+            <a:r>
+              <a:rPr lang="en-US" sz="1200" dirty="0">
+                <a:solidFill>
+                  <a:srgbClr val="FFFFFF"/>
+                </a:solidFill>
+              </a:rPr>
+              <a:t>Tarefas são agendadas na Task Queue</a:t>
+            </a:r>
+            <a:endParaRPr lang="en-US" sz="1200" dirty="0"/>
+          </a:p>
+        </p:txBody>
+      </p:sp>
+      <p:sp>
+        <p:nvSpPr>
+          <p:cNvPr id="18" name="Shape 16"/>
+          <p:cNvSpPr/>
+          <p:nvPr/>
+        </p:nvSpPr>
+        <p:spPr>
+          <a:xfrm>
+            <a:off x="274320" y="2651760"/>
+            <a:ext cx="2743200" cy="1325880"/>
+          </a:xfrm>
+          <a:prstGeom prst="rect">
+            <a:avLst/>
+          </a:prstGeom>
+          <a:solidFill>
+            <a:srgbClr val="112236"/>
+          </a:solidFill>
+          <a:ln w="19050">
+            <a:solidFill>
+              <a:srgbClr val="E67E22"/>
+            </a:solidFill>
+            <a:prstDash val="solid"/>
+          </a:ln>
+          <a:effectLst>
+            <a:outerShdw blurRad="101600" dist="38100" dir="8100000" algn="bl" rotWithShape="0">
+              <a:srgbClr val="000000">
+                <a:alpha val="18000"/>
+              </a:srgbClr>
+            </a:outerShdw>
+          </a:effectLst>
+        </p:spPr>
+        <p:txBody>
+          <a:bodyPr/>
+          <a:lstStyle/>
+          <a:p>
+            <a:endParaRPr lang="pt-PT"/>
+          </a:p>
+        </p:txBody>
+      </p:sp>
+      <p:sp>
+        <p:nvSpPr>
+          <p:cNvPr id="19" name="Shape 17"/>
+          <p:cNvSpPr/>
+          <p:nvPr/>
+        </p:nvSpPr>
+        <p:spPr>
+          <a:xfrm>
+            <a:off x="365760" y="2743200"/>
+            <a:ext cx="502920" cy="502920"/>
+          </a:xfrm>
+          <a:prstGeom prst="ellipse">
+            <a:avLst/>
+          </a:prstGeom>
+          <a:solidFill>
+            <a:srgbClr val="E67E22"/>
+          </a:solidFill>
+          <a:ln w="12700">
+            <a:solidFill>
+              <a:srgbClr val="E67E22"/>
+            </a:solidFill>
+            <a:prstDash val="solid"/>
+          </a:ln>
+        </p:spPr>
+        <p:txBody>
+          <a:bodyPr/>
+          <a:lstStyle/>
+          <a:p>
+            <a:endParaRPr lang="pt-PT"/>
+          </a:p>
+        </p:txBody>
+      </p:sp>
+      <p:sp>
+        <p:nvSpPr>
+          <p:cNvPr id="20" name="Text 18"/>
+          <p:cNvSpPr/>
+          <p:nvPr/>
+        </p:nvSpPr>
+        <p:spPr>
+          <a:xfrm>
+            <a:off x="365760" y="2743200"/>
+            <a:ext cx="502920" cy="502920"/>
+          </a:xfrm>
+          <a:prstGeom prst="rect">
+            <a:avLst/>
+          </a:prstGeom>
+          <a:noFill/>
+          <a:ln/>
+        </p:spPr>
+        <p:txBody>
+          <a:bodyPr wrap="square" lIns="0" tIns="0" rIns="0" bIns="0" rtlCol="0" anchor="ctr"/>
+          <a:lstStyle/>
+          <a:p>
+            <a:pPr marL="0" indent="0" algn="ctr">
+              <a:buNone/>
+            </a:pPr>
+            <a:r>
+              <a:rPr lang="en-US" sz="1600" b="1" dirty="0">
+                <a:solidFill>
+                  <a:srgbClr val="0D1B2A"/>
+                </a:solidFill>
+              </a:rPr>
+              <a:t>4</a:t>
+            </a:r>
+            <a:endParaRPr lang="en-US" sz="1600" dirty="0"/>
+          </a:p>
+        </p:txBody>
+      </p:sp>
+      <p:sp>
+        <p:nvSpPr>
+          <p:cNvPr id="21" name="Text 19"/>
+          <p:cNvSpPr/>
+          <p:nvPr/>
+        </p:nvSpPr>
+        <p:spPr>
+          <a:xfrm>
+            <a:off x="960120" y="2724912"/>
+            <a:ext cx="1965960" cy="1097280"/>
+          </a:xfrm>
+          <a:prstGeom prst="rect">
+            <a:avLst/>
+          </a:prstGeom>
+          <a:noFill/>
+          <a:ln/>
+        </p:spPr>
+        <p:txBody>
+          <a:bodyPr wrap="square" rtlCol="0" anchor="ctr"/>
+          <a:lstStyle/>
+          <a:p>
+            <a:pPr marL="0" indent="0">
+              <a:buNone/>
+            </a:pPr>
+            <a:r>
+              <a:rPr lang="en-US" sz="1200" dirty="0">
+                <a:solidFill>
+                  <a:srgbClr val="FFFFFF"/>
+                </a:solidFill>
+              </a:rPr>
+              <a:t>Worker consome e executa a tarefa</a:t>
+            </a:r>
+            <a:endParaRPr lang="en-US" sz="1200" dirty="0"/>
+          </a:p>
+        </p:txBody>
+      </p:sp>
+      <p:sp>
+        <p:nvSpPr>
+          <p:cNvPr id="23" name="Shape 21"/>
+          <p:cNvSpPr/>
+          <p:nvPr/>
+        </p:nvSpPr>
+        <p:spPr>
+          <a:xfrm>
+            <a:off x="3200400" y="2651760"/>
+            <a:ext cx="2743200" cy="1325880"/>
+          </a:xfrm>
+          <a:prstGeom prst="rect">
+            <a:avLst/>
+          </a:prstGeom>
+          <a:solidFill>
+            <a:srgbClr val="112236"/>
+          </a:solidFill>
+          <a:ln w="19050">
+            <a:solidFill>
+              <a:srgbClr val="27AE60"/>
+            </a:solidFill>
+            <a:prstDash val="solid"/>
+          </a:ln>
+          <a:effectLst>
+            <a:outerShdw blurRad="101600" dist="38100" dir="8100000" algn="bl" rotWithShape="0">
+              <a:srgbClr val="000000">
+                <a:alpha val="18000"/>
+              </a:srgbClr>
+            </a:outerShdw>
+          </a:effectLst>
+        </p:spPr>
+        <p:txBody>
+          <a:bodyPr/>
+          <a:lstStyle/>
+          <a:p>
+            <a:endParaRPr lang="pt-PT"/>
+          </a:p>
+        </p:txBody>
+      </p:sp>
+      <p:sp>
+        <p:nvSpPr>
+          <p:cNvPr id="24" name="Shape 22"/>
+          <p:cNvSpPr/>
+          <p:nvPr/>
+        </p:nvSpPr>
+        <p:spPr>
+          <a:xfrm>
+            <a:off x="3291840" y="2743200"/>
+            <a:ext cx="502920" cy="502920"/>
+          </a:xfrm>
+          <a:prstGeom prst="ellipse">
+            <a:avLst/>
+          </a:prstGeom>
+          <a:solidFill>
+            <a:srgbClr val="27AE60"/>
+          </a:solidFill>
+          <a:ln w="12700">
+            <a:solidFill>
+              <a:srgbClr val="27AE60"/>
+            </a:solidFill>
+            <a:prstDash val="solid"/>
+          </a:ln>
+        </p:spPr>
+        <p:txBody>
+          <a:bodyPr/>
+          <a:lstStyle/>
+          <a:p>
+            <a:endParaRPr lang="pt-PT"/>
+          </a:p>
+        </p:txBody>
+      </p:sp>
+      <p:sp>
+        <p:nvSpPr>
+          <p:cNvPr id="25" name="Text 23"/>
+          <p:cNvSpPr/>
+          <p:nvPr/>
+        </p:nvSpPr>
+        <p:spPr>
+          <a:xfrm>
+            <a:off x="3291840" y="2743200"/>
+            <a:ext cx="502920" cy="502920"/>
+          </a:xfrm>
+          <a:prstGeom prst="rect">
+            <a:avLst/>
+          </a:prstGeom>
+          <a:noFill/>
+          <a:ln/>
+        </p:spPr>
+        <p:txBody>
+          <a:bodyPr wrap="square" lIns="0" tIns="0" rIns="0" bIns="0" rtlCol="0" anchor="ctr"/>
+          <a:lstStyle/>
+          <a:p>
+            <a:pPr marL="0" indent="0" algn="ctr">
+              <a:buNone/>
+            </a:pPr>
+            <a:r>
+              <a:rPr lang="en-US" sz="1600" b="1" dirty="0">
+                <a:solidFill>
+                  <a:srgbClr val="0D1B2A"/>
+                </a:solidFill>
+              </a:rPr>
+              <a:t>5</a:t>
+            </a:r>
+            <a:endParaRPr lang="en-US" sz="1600" dirty="0"/>
+          </a:p>
+        </p:txBody>
+      </p:sp>
+      <p:sp>
+        <p:nvSpPr>
+          <p:cNvPr id="26" name="Text 24"/>
+          <p:cNvSpPr/>
+          <p:nvPr/>
+        </p:nvSpPr>
+        <p:spPr>
+          <a:xfrm>
+            <a:off x="3886200" y="2724912"/>
+            <a:ext cx="1965960" cy="1097280"/>
+          </a:xfrm>
+          <a:prstGeom prst="rect">
+            <a:avLst/>
+          </a:prstGeom>
+          <a:noFill/>
+          <a:ln/>
+        </p:spPr>
+        <p:txBody>
+          <a:bodyPr wrap="square" rtlCol="0" anchor="ctr"/>
+          <a:lstStyle/>
+          <a:p>
+            <a:pPr marL="0" indent="0">
+              <a:buNone/>
+            </a:pPr>
+            <a:r>
+              <a:rPr lang="en-US" sz="1200" dirty="0">
+                <a:solidFill>
+                  <a:srgbClr val="FFFFFF"/>
+                </a:solidFill>
+              </a:rPr>
+              <a:t>Activity realiza a operação externa</a:t>
+            </a:r>
+            <a:endParaRPr lang="en-US" sz="1200" dirty="0"/>
+          </a:p>
+        </p:txBody>
+      </p:sp>
+      <p:sp>
+        <p:nvSpPr>
+          <p:cNvPr id="28" name="Shape 26"/>
+          <p:cNvSpPr/>
+          <p:nvPr/>
+        </p:nvSpPr>
+        <p:spPr>
+          <a:xfrm>
+            <a:off x="6126480" y="2651760"/>
+            <a:ext cx="2743200" cy="1325880"/>
+          </a:xfrm>
+          <a:prstGeom prst="rect">
+            <a:avLst/>
+          </a:prstGeom>
+          <a:solidFill>
+            <a:srgbClr val="112236"/>
+          </a:solidFill>
+          <a:ln w="19050">
+            <a:solidFill>
+              <a:srgbClr val="00D4AA"/>
+            </a:solidFill>
+            <a:prstDash val="solid"/>
+          </a:ln>
+          <a:effectLst>
+            <a:outerShdw blurRad="101600" dist="38100" dir="8100000" algn="bl" rotWithShape="0">
+              <a:srgbClr val="000000">
+                <a:alpha val="18000"/>
+              </a:srgbClr>
+            </a:outerShdw>
+          </a:effectLst>
+        </p:spPr>
+        <p:txBody>
+          <a:bodyPr/>
+          <a:lstStyle/>
+          <a:p>
+            <a:endParaRPr lang="pt-PT"/>
+          </a:p>
+        </p:txBody>
+      </p:sp>
+      <p:sp>
+        <p:nvSpPr>
+          <p:cNvPr id="29" name="Shape 27"/>
+          <p:cNvSpPr/>
+          <p:nvPr/>
+        </p:nvSpPr>
+        <p:spPr>
+          <a:xfrm>
+            <a:off x="6217920" y="2743200"/>
+            <a:ext cx="502920" cy="502920"/>
+          </a:xfrm>
+          <a:prstGeom prst="ellipse">
+            <a:avLst/>
+          </a:prstGeom>
+          <a:solidFill>
+            <a:srgbClr val="00D4AA"/>
+          </a:solidFill>
+          <a:ln w="12700">
+            <a:solidFill>
+              <a:srgbClr val="00D4AA"/>
+            </a:solidFill>
+            <a:prstDash val="solid"/>
+          </a:ln>
+        </p:spPr>
+        <p:txBody>
+          <a:bodyPr/>
+          <a:lstStyle/>
+          <a:p>
+            <a:endParaRPr lang="pt-PT"/>
+          </a:p>
+        </p:txBody>
+      </p:sp>
+      <p:sp>
+        <p:nvSpPr>
+          <p:cNvPr id="30" name="Text 28"/>
+          <p:cNvSpPr/>
+          <p:nvPr/>
+        </p:nvSpPr>
+        <p:spPr>
+          <a:xfrm>
+            <a:off x="6217920" y="2743200"/>
+            <a:ext cx="502920" cy="502920"/>
+          </a:xfrm>
+          <a:prstGeom prst="rect">
+            <a:avLst/>
+          </a:prstGeom>
+          <a:noFill/>
+          <a:ln/>
+        </p:spPr>
+        <p:txBody>
+          <a:bodyPr wrap="square" lIns="0" tIns="0" rIns="0" bIns="0" rtlCol="0" anchor="ctr"/>
+          <a:lstStyle/>
+          <a:p>
+            <a:pPr marL="0" indent="0" algn="ctr">
+              <a:buNone/>
+            </a:pPr>
+            <a:r>
+              <a:rPr lang="en-US" sz="1600" b="1" dirty="0">
+                <a:solidFill>
+                  <a:srgbClr val="0D1B2A"/>
+                </a:solidFill>
+              </a:rPr>
+              <a:t>6</a:t>
+            </a:r>
+            <a:endParaRPr lang="en-US" sz="1600" dirty="0"/>
+          </a:p>
+        </p:txBody>
+      </p:sp>
+      <p:sp>
+        <p:nvSpPr>
+          <p:cNvPr id="31" name="Text 29"/>
+          <p:cNvSpPr/>
+          <p:nvPr/>
+        </p:nvSpPr>
+        <p:spPr>
+          <a:xfrm>
+            <a:off x="6812280" y="2724912"/>
+            <a:ext cx="1965960" cy="1097280"/>
+          </a:xfrm>
+          <a:prstGeom prst="rect">
+            <a:avLst/>
+          </a:prstGeom>
+          <a:noFill/>
+          <a:ln/>
+        </p:spPr>
+        <p:txBody>
+          <a:bodyPr wrap="square" rtlCol="0" anchor="ctr"/>
+          <a:lstStyle/>
+          <a:p>
+            <a:pPr marL="0" indent="0">
+              <a:buNone/>
+            </a:pPr>
+            <a:r>
+              <a:rPr lang="en-US" sz="1200" dirty="0">
+                <a:solidFill>
+                  <a:srgbClr val="FFFFFF"/>
+                </a:solidFill>
+              </a:rPr>
+              <a:t>Resultado retorna e histórico atualiza</a:t>
+            </a:r>
+            <a:endParaRPr lang="en-US" sz="1200" dirty="0"/>
+          </a:p>
+        </p:txBody>
+      </p:sp>
+      <p:sp>
+        <p:nvSpPr>
+          <p:cNvPr id="32" name="Shape 30"/>
+          <p:cNvSpPr/>
+          <p:nvPr/>
+        </p:nvSpPr>
+        <p:spPr>
+          <a:xfrm>
+            <a:off x="274320" y="4434840"/>
+            <a:ext cx="8595360" cy="457200"/>
+          </a:xfrm>
+          <a:prstGeom prst="rect">
+            <a:avLst/>
+          </a:prstGeom>
+          <a:solidFill>
+            <a:srgbClr val="1B6CA8"/>
+          </a:solidFill>
+          <a:ln w="12700">
+            <a:solidFill>
+              <a:srgbClr val="1B6CA8"/>
+            </a:solidFill>
+            <a:prstDash val="solid"/>
+          </a:ln>
+        </p:spPr>
+        <p:txBody>
+          <a:bodyPr/>
+          <a:lstStyle/>
+          <a:p>
+            <a:endParaRPr lang="pt-PT"/>
+          </a:p>
+        </p:txBody>
+      </p:sp>
+      <p:sp>
+        <p:nvSpPr>
+          <p:cNvPr id="33" name="Text 31"/>
+          <p:cNvSpPr/>
+          <p:nvPr/>
+        </p:nvSpPr>
+        <p:spPr>
+          <a:xfrm>
+            <a:off x="457200" y="4434840"/>
+            <a:ext cx="8229600" cy="457200"/>
+          </a:xfrm>
+          <a:prstGeom prst="rect">
+            <a:avLst/>
+          </a:prstGeom>
+          <a:noFill/>
+          <a:ln/>
+        </p:spPr>
+        <p:txBody>
+          <a:bodyPr wrap="square" rtlCol="0" anchor="ctr"/>
+          <a:lstStyle/>
+          <a:p>
+            <a:pPr marL="0" indent="0">
+              <a:buNone/>
+            </a:pPr>
+            <a:r>
+              <a:rPr lang="en-US" sz="1100" i="1" dirty="0">
+                <a:solidFill>
+                  <a:srgbClr val="FFFFFF"/>
+                </a:solidFill>
+              </a:rPr>
+              <a:t>🔄  Em caso de falha: Temporal aplica Retry Policies e retoma a execução com base no histórico de eventos.</a:t>
+            </a:r>
+            <a:endParaRPr lang="en-US" sz="1100" dirty="0"/>
+          </a:p>
+        </p:txBody>
+      </p:sp>
+      <p:cxnSp>
+        <p:nvCxnSpPr>
+          <p:cNvPr id="34" name="Conexão Reta Unidirecional 33">
+            <a:extLst>
+              <a:ext uri="{FF2B5EF4-FFF2-40B4-BE49-F238E27FC236}">
+                <a16:creationId xmlns:a16="http://schemas.microsoft.com/office/drawing/2014/main" id="{BB5C6E2A-2925-F8C5-5E9D-468D5D9D3058}"/>
+              </a:ext>
+            </a:extLst>
+          </p:cNvPr>
+          <p:cNvCxnSpPr>
+            <a:cxnSpLocks/>
+            <a:stCxn id="4" idx="3"/>
+            <a:endCxn id="9" idx="1"/>
+          </p:cNvCxnSpPr>
+          <p:nvPr/>
+        </p:nvCxnSpPr>
+        <p:spPr>
+          <a:xfrm>
+            <a:off x="3017520" y="1668780"/>
+            <a:ext cx="182880" cy="0"/>
+          </a:xfrm>
+          <a:prstGeom prst="straightConnector1">
+            <a:avLst/>
+          </a:prstGeom>
+          <a:ln w="19050">
+            <a:solidFill>
+              <a:schemeClr val="tx1"/>
+            </a:solidFill>
+            <a:tailEnd type="triangle"/>
+          </a:ln>
+        </p:spPr>
+        <p:style>
+          <a:lnRef idx="1">
+            <a:schemeClr val="accent1"/>
+          </a:lnRef>
+          <a:fillRef idx="0">
+            <a:schemeClr val="accent1"/>
+          </a:fillRef>
+          <a:effectRef idx="0">
+            <a:schemeClr val="accent1"/>
+          </a:effectRef>
+          <a:fontRef idx="minor">
+            <a:schemeClr val="tx1"/>
+          </a:fontRef>
+        </p:style>
+      </p:cxnSp>
+      <p:cxnSp>
+        <p:nvCxnSpPr>
+          <p:cNvPr id="37" name="Conexão Reta Unidirecional 36">
+            <a:extLst>
+              <a:ext uri="{FF2B5EF4-FFF2-40B4-BE49-F238E27FC236}">
+                <a16:creationId xmlns:a16="http://schemas.microsoft.com/office/drawing/2014/main" id="{1BBE1A0A-02C2-26FE-803E-1112E59E56FA}"/>
+              </a:ext>
+            </a:extLst>
+          </p:cNvPr>
+          <p:cNvCxnSpPr>
+            <a:cxnSpLocks/>
+            <a:stCxn id="9" idx="3"/>
+            <a:endCxn id="14" idx="1"/>
+          </p:cNvCxnSpPr>
+          <p:nvPr/>
+        </p:nvCxnSpPr>
+        <p:spPr>
+          <a:xfrm>
+            <a:off x="5943600" y="1668780"/>
+            <a:ext cx="182880" cy="0"/>
+          </a:xfrm>
+          <a:prstGeom prst="straightConnector1">
+            <a:avLst/>
+          </a:prstGeom>
+          <a:ln w="19050">
+            <a:solidFill>
+              <a:schemeClr val="tx1"/>
+            </a:solidFill>
+            <a:tailEnd type="triangle"/>
+          </a:ln>
+        </p:spPr>
+        <p:style>
+          <a:lnRef idx="1">
+            <a:schemeClr val="accent1"/>
+          </a:lnRef>
+          <a:fillRef idx="0">
+            <a:schemeClr val="accent1"/>
+          </a:fillRef>
+          <a:effectRef idx="0">
+            <a:schemeClr val="accent1"/>
+          </a:effectRef>
+          <a:fontRef idx="minor">
+            <a:schemeClr val="tx1"/>
+          </a:fontRef>
+        </p:style>
+      </p:cxnSp>
+      <p:cxnSp>
+        <p:nvCxnSpPr>
+          <p:cNvPr id="40" name="Conexão Reta Unidirecional 39">
+            <a:extLst>
+              <a:ext uri="{FF2B5EF4-FFF2-40B4-BE49-F238E27FC236}">
+                <a16:creationId xmlns:a16="http://schemas.microsoft.com/office/drawing/2014/main" id="{B696B6AA-6E81-E91D-16E1-3EF726F09E50}"/>
+              </a:ext>
+            </a:extLst>
+          </p:cNvPr>
+          <p:cNvCxnSpPr>
+            <a:cxnSpLocks/>
+            <a:stCxn id="18" idx="3"/>
+            <a:endCxn id="23" idx="1"/>
+          </p:cNvCxnSpPr>
+          <p:nvPr/>
+        </p:nvCxnSpPr>
+        <p:spPr>
+          <a:xfrm>
+            <a:off x="3017520" y="3314700"/>
+            <a:ext cx="182880" cy="0"/>
+          </a:xfrm>
+          <a:prstGeom prst="straightConnector1">
+            <a:avLst/>
+          </a:prstGeom>
+          <a:ln w="19050">
+            <a:solidFill>
+              <a:schemeClr val="tx1"/>
+            </a:solidFill>
+            <a:tailEnd type="triangle"/>
+          </a:ln>
+        </p:spPr>
+        <p:style>
+          <a:lnRef idx="1">
+            <a:schemeClr val="accent1"/>
+          </a:lnRef>
+          <a:fillRef idx="0">
+            <a:schemeClr val="accent1"/>
+          </a:fillRef>
+          <a:effectRef idx="0">
+            <a:schemeClr val="accent1"/>
+          </a:effectRef>
+          <a:fontRef idx="minor">
+            <a:schemeClr val="tx1"/>
+          </a:fontRef>
+        </p:style>
+      </p:cxnSp>
+      <p:cxnSp>
+        <p:nvCxnSpPr>
+          <p:cNvPr id="43" name="Conexão Reta Unidirecional 42">
+            <a:extLst>
+              <a:ext uri="{FF2B5EF4-FFF2-40B4-BE49-F238E27FC236}">
+                <a16:creationId xmlns:a16="http://schemas.microsoft.com/office/drawing/2014/main" id="{83159633-415F-2D3D-D3A9-EA4F4EA99351}"/>
+              </a:ext>
+            </a:extLst>
+          </p:cNvPr>
+          <p:cNvCxnSpPr>
+            <a:cxnSpLocks/>
+            <a:stCxn id="23" idx="3"/>
+          </p:cNvCxnSpPr>
+          <p:nvPr/>
+        </p:nvCxnSpPr>
+        <p:spPr>
+          <a:xfrm flipV="1">
+            <a:off x="5943600" y="3310944"/>
+            <a:ext cx="182880" cy="3756"/>
+          </a:xfrm>
+          <a:prstGeom prst="straightConnector1">
+            <a:avLst/>
+          </a:prstGeom>
+          <a:ln w="19050">
+            <a:solidFill>
+              <a:schemeClr val="tx1"/>
+            </a:solidFill>
+            <a:tailEnd type="triangle"/>
+          </a:ln>
+        </p:spPr>
+        <p:style>
+          <a:lnRef idx="1">
+            <a:schemeClr val="accent1"/>
+          </a:lnRef>
+          <a:fillRef idx="0">
+            <a:schemeClr val="accent1"/>
+          </a:fillRef>
+          <a:effectRef idx="0">
+            <a:schemeClr val="accent1"/>
+          </a:effectRef>
+          <a:fontRef idx="minor">
+            <a:schemeClr val="tx1"/>
+          </a:fontRef>
+        </p:style>
+      </p:cxnSp>
     </p:spTree>
   </p:cSld>
   <p:clrMapOvr>

--- a/Temporal_IO_pt.pptx
+++ b/Temporal_IO_pt.pptx
@@ -1968,7 +1968,7 @@
                   <a:srgbClr val="8FA3B3"/>
                 </a:solidFill>
               </a:rPr>
-              <a:t>Apresentação técnica  •  2025</a:t>
+              <a:t>Apresentação técnica  •  2026</a:t>
             </a:r>
             <a:endParaRPr lang="en-US" sz="1100" dirty="0"/>
           </a:p>

--- a/Temporal_IO_pt.pptx
+++ b/Temporal_IO_pt.pptx
@@ -5,20 +5,21 @@
     <p:sldMasterId id="2147483648" r:id="rId1"/>
   </p:sldMasterIdLst>
   <p:notesMasterIdLst>
-    <p:notesMasterId r:id="rId13"/>
+    <p:notesMasterId r:id="rId14"/>
   </p:notesMasterIdLst>
   <p:sldIdLst>
     <p:sldId id="256" r:id="rId2"/>
     <p:sldId id="257" r:id="rId3"/>
     <p:sldId id="258" r:id="rId4"/>
-    <p:sldId id="268" r:id="rId5"/>
-    <p:sldId id="259" r:id="rId6"/>
-    <p:sldId id="260" r:id="rId7"/>
-    <p:sldId id="261" r:id="rId8"/>
-    <p:sldId id="264" r:id="rId9"/>
-    <p:sldId id="265" r:id="rId10"/>
-    <p:sldId id="266" r:id="rId11"/>
-    <p:sldId id="267" r:id="rId12"/>
+    <p:sldId id="269" r:id="rId5"/>
+    <p:sldId id="268" r:id="rId6"/>
+    <p:sldId id="259" r:id="rId7"/>
+    <p:sldId id="260" r:id="rId8"/>
+    <p:sldId id="261" r:id="rId9"/>
+    <p:sldId id="264" r:id="rId10"/>
+    <p:sldId id="265" r:id="rId11"/>
+    <p:sldId id="266" r:id="rId12"/>
+    <p:sldId id="267" r:id="rId13"/>
   </p:sldIdLst>
   <p:sldSz cx="9144000" cy="5143500" type="screen16x9"/>
   <p:notesSz cx="5143500" cy="9144000"/>
@@ -499,6 +500,90 @@
 </p:notes>
 </file>
 
+<file path=ppt/notesSlides/notesSlide12.xml><?xml version="1.0" encoding="utf-8"?>
+<p:notes xmlns:a="http://schemas.openxmlformats.org/drawingml/2006/main" xmlns:r="http://schemas.openxmlformats.org/officeDocument/2006/relationships" xmlns:p="http://schemas.openxmlformats.org/presentationml/2006/main">
+  <p:cSld>
+    <p:spTree>
+      <p:nvGrpSpPr>
+        <p:cNvPr id="1" name=""/>
+        <p:cNvGrpSpPr/>
+        <p:nvPr/>
+      </p:nvGrpSpPr>
+      <p:grpSpPr>
+        <a:xfrm>
+          <a:off x="0" y="0"/>
+          <a:ext cx="0" cy="0"/>
+          <a:chOff x="0" y="0"/>
+          <a:chExt cx="0" cy="0"/>
+        </a:xfrm>
+      </p:grpSpPr>
+      <p:sp>
+        <p:nvSpPr>
+          <p:cNvPr id="2" name="Slide Image Placeholder 1"/>
+          <p:cNvSpPr>
+            <a:spLocks noGrp="1" noRot="1" noChangeAspect="1"/>
+          </p:cNvSpPr>
+          <p:nvPr>
+            <p:ph type="sldImg"/>
+          </p:nvPr>
+        </p:nvSpPr>
+        <p:spPr/>
+      </p:sp>
+      <p:sp>
+        <p:nvSpPr>
+          <p:cNvPr id="3" name="Notes Placeholder 2"/>
+          <p:cNvSpPr>
+            <a:spLocks noGrp="1"/>
+          </p:cNvSpPr>
+          <p:nvPr>
+            <p:ph type="body" idx="1"/>
+          </p:nvPr>
+        </p:nvSpPr>
+        <p:spPr/>
+        <p:txBody>
+          <a:bodyPr/>
+          <a:lstStyle/>
+          <a:p>
+            <a:endParaRPr lang="en-US" dirty="0"/>
+          </a:p>
+        </p:txBody>
+      </p:sp>
+      <p:sp>
+        <p:nvSpPr>
+          <p:cNvPr id="4" name="Slide Number Placeholder 3"/>
+          <p:cNvSpPr>
+            <a:spLocks noGrp="1"/>
+          </p:cNvSpPr>
+          <p:nvPr>
+            <p:ph type="sldNum" sz="quarter" idx="10"/>
+          </p:nvPr>
+        </p:nvSpPr>
+        <p:spPr/>
+        <p:txBody>
+          <a:bodyPr/>
+          <a:lstStyle/>
+          <a:p>
+            <a:fld id="{F7021451-1387-4CA6-816F-3879F97B5CBC}" type="slidenum">
+              <a:rPr lang="en-US"/>
+              <a:t>12</a:t>
+            </a:fld>
+            <a:endParaRPr lang="en-US"/>
+          </a:p>
+        </p:txBody>
+      </p:sp>
+    </p:spTree>
+    <p:extLst>
+      <p:ext uri="{BB962C8B-B14F-4D97-AF65-F5344CB8AC3E}">
+        <p14:creationId xmlns:p14="http://schemas.microsoft.com/office/powerpoint/2010/main" val="1024086991"/>
+      </p:ext>
+    </p:extLst>
+  </p:cSld>
+  <p:clrMapOvr>
+    <a:masterClrMapping/>
+  </p:clrMapOvr>
+</p:notes>
+</file>
+
 <file path=ppt/notesSlides/notesSlide2.xml><?xml version="1.0" encoding="utf-8"?>
 <p:notes xmlns:a="http://schemas.openxmlformats.org/drawingml/2006/main" xmlns:r="http://schemas.openxmlformats.org/officeDocument/2006/relationships" xmlns:p="http://schemas.openxmlformats.org/presentationml/2006/main">
   <p:cSld>
@@ -675,6 +760,114 @@
         <p:cNvPr id="1" name="">
           <a:extLst>
             <a:ext uri="{FF2B5EF4-FFF2-40B4-BE49-F238E27FC236}">
+              <a16:creationId xmlns:a16="http://schemas.microsoft.com/office/drawing/2014/main" id="{CB4E9D78-97CB-7BC1-5731-9415C4FB6CA0}"/>
+            </a:ext>
+          </a:extLst>
+        </p:cNvPr>
+        <p:cNvGrpSpPr/>
+        <p:nvPr/>
+      </p:nvGrpSpPr>
+      <p:grpSpPr>
+        <a:xfrm>
+          <a:off x="0" y="0"/>
+          <a:ext cx="0" cy="0"/>
+          <a:chOff x="0" y="0"/>
+          <a:chExt cx="0" cy="0"/>
+        </a:xfrm>
+      </p:grpSpPr>
+      <p:sp>
+        <p:nvSpPr>
+          <p:cNvPr id="2" name="Slide Image Placeholder 1">
+            <a:extLst>
+              <a:ext uri="{FF2B5EF4-FFF2-40B4-BE49-F238E27FC236}">
+                <a16:creationId xmlns:a16="http://schemas.microsoft.com/office/drawing/2014/main" id="{702AFE0F-325D-51AB-6EB5-0C6DAD7B089F}"/>
+              </a:ext>
+            </a:extLst>
+          </p:cNvPr>
+          <p:cNvSpPr>
+            <a:spLocks noGrp="1" noRot="1" noChangeAspect="1"/>
+          </p:cNvSpPr>
+          <p:nvPr>
+            <p:ph type="sldImg"/>
+          </p:nvPr>
+        </p:nvSpPr>
+        <p:spPr/>
+      </p:sp>
+      <p:sp>
+        <p:nvSpPr>
+          <p:cNvPr id="3" name="Notes Placeholder 2">
+            <a:extLst>
+              <a:ext uri="{FF2B5EF4-FFF2-40B4-BE49-F238E27FC236}">
+                <a16:creationId xmlns:a16="http://schemas.microsoft.com/office/drawing/2014/main" id="{7204B7FF-DD1E-2CEB-9686-78D443C455E5}"/>
+              </a:ext>
+            </a:extLst>
+          </p:cNvPr>
+          <p:cNvSpPr>
+            <a:spLocks noGrp="1"/>
+          </p:cNvSpPr>
+          <p:nvPr>
+            <p:ph type="body" idx="1"/>
+          </p:nvPr>
+        </p:nvSpPr>
+        <p:spPr/>
+        <p:txBody>
+          <a:bodyPr/>
+          <a:lstStyle/>
+          <a:p>
+            <a:endParaRPr lang="en-US" dirty="0"/>
+          </a:p>
+        </p:txBody>
+      </p:sp>
+      <p:sp>
+        <p:nvSpPr>
+          <p:cNvPr id="4" name="Slide Number Placeholder 3">
+            <a:extLst>
+              <a:ext uri="{FF2B5EF4-FFF2-40B4-BE49-F238E27FC236}">
+                <a16:creationId xmlns:a16="http://schemas.microsoft.com/office/drawing/2014/main" id="{2F5184A5-0661-7CB1-C542-2A79823F4A90}"/>
+              </a:ext>
+            </a:extLst>
+          </p:cNvPr>
+          <p:cNvSpPr>
+            <a:spLocks noGrp="1"/>
+          </p:cNvSpPr>
+          <p:nvPr>
+            <p:ph type="sldNum" sz="quarter" idx="10"/>
+          </p:nvPr>
+        </p:nvSpPr>
+        <p:spPr/>
+        <p:txBody>
+          <a:bodyPr/>
+          <a:lstStyle/>
+          <a:p>
+            <a:fld id="{F7021451-1387-4CA6-816F-3879F97B5CBC}" type="slidenum">
+              <a:rPr lang="en-US"/>
+              <a:t>4</a:t>
+            </a:fld>
+            <a:endParaRPr lang="en-US"/>
+          </a:p>
+        </p:txBody>
+      </p:sp>
+    </p:spTree>
+    <p:extLst>
+      <p:ext uri="{BB962C8B-B14F-4D97-AF65-F5344CB8AC3E}">
+        <p14:creationId xmlns:p14="http://schemas.microsoft.com/office/powerpoint/2010/main" val="2605223742"/>
+      </p:ext>
+    </p:extLst>
+  </p:cSld>
+  <p:clrMapOvr>
+    <a:masterClrMapping/>
+  </p:clrMapOvr>
+</p:notes>
+</file>
+
+<file path=ppt/notesSlides/notesSlide5.xml><?xml version="1.0" encoding="utf-8"?>
+<p:notes xmlns:a="http://schemas.openxmlformats.org/drawingml/2006/main" xmlns:r="http://schemas.openxmlformats.org/officeDocument/2006/relationships" xmlns:p="http://schemas.openxmlformats.org/presentationml/2006/main">
+  <p:cSld>
+    <p:spTree>
+      <p:nvGrpSpPr>
+        <p:cNvPr id="1" name="">
+          <a:extLst>
+            <a:ext uri="{FF2B5EF4-FFF2-40B4-BE49-F238E27FC236}">
               <a16:creationId xmlns:a16="http://schemas.microsoft.com/office/drawing/2014/main" id="{482D1124-F660-C6C8-7958-8F694056A934}"/>
             </a:ext>
           </a:extLst>
@@ -756,7 +949,7 @@
           <a:p>
             <a:fld id="{F7021451-1387-4CA6-816F-3879F97B5CBC}" type="slidenum">
               <a:rPr lang="en-US"/>
-              <a:t>4</a:t>
+              <a:t>5</a:t>
             </a:fld>
             <a:endParaRPr lang="en-US"/>
           </a:p>
@@ -766,90 +959,6 @@
     <p:extLst>
       <p:ext uri="{BB962C8B-B14F-4D97-AF65-F5344CB8AC3E}">
         <p14:creationId xmlns:p14="http://schemas.microsoft.com/office/powerpoint/2010/main" val="3901548064"/>
-      </p:ext>
-    </p:extLst>
-  </p:cSld>
-  <p:clrMapOvr>
-    <a:masterClrMapping/>
-  </p:clrMapOvr>
-</p:notes>
-</file>
-
-<file path=ppt/notesSlides/notesSlide5.xml><?xml version="1.0" encoding="utf-8"?>
-<p:notes xmlns:a="http://schemas.openxmlformats.org/drawingml/2006/main" xmlns:r="http://schemas.openxmlformats.org/officeDocument/2006/relationships" xmlns:p="http://schemas.openxmlformats.org/presentationml/2006/main">
-  <p:cSld>
-    <p:spTree>
-      <p:nvGrpSpPr>
-        <p:cNvPr id="1" name=""/>
-        <p:cNvGrpSpPr/>
-        <p:nvPr/>
-      </p:nvGrpSpPr>
-      <p:grpSpPr>
-        <a:xfrm>
-          <a:off x="0" y="0"/>
-          <a:ext cx="0" cy="0"/>
-          <a:chOff x="0" y="0"/>
-          <a:chExt cx="0" cy="0"/>
-        </a:xfrm>
-      </p:grpSpPr>
-      <p:sp>
-        <p:nvSpPr>
-          <p:cNvPr id="2" name="Slide Image Placeholder 1"/>
-          <p:cNvSpPr>
-            <a:spLocks noGrp="1" noRot="1" noChangeAspect="1"/>
-          </p:cNvSpPr>
-          <p:nvPr>
-            <p:ph type="sldImg"/>
-          </p:nvPr>
-        </p:nvSpPr>
-        <p:spPr/>
-      </p:sp>
-      <p:sp>
-        <p:nvSpPr>
-          <p:cNvPr id="3" name="Notes Placeholder 2"/>
-          <p:cNvSpPr>
-            <a:spLocks noGrp="1"/>
-          </p:cNvSpPr>
-          <p:nvPr>
-            <p:ph type="body" idx="1"/>
-          </p:nvPr>
-        </p:nvSpPr>
-        <p:spPr/>
-        <p:txBody>
-          <a:bodyPr/>
-          <a:lstStyle/>
-          <a:p>
-            <a:endParaRPr lang="en-US" dirty="0"/>
-          </a:p>
-        </p:txBody>
-      </p:sp>
-      <p:sp>
-        <p:nvSpPr>
-          <p:cNvPr id="4" name="Slide Number Placeholder 3"/>
-          <p:cNvSpPr>
-            <a:spLocks noGrp="1"/>
-          </p:cNvSpPr>
-          <p:nvPr>
-            <p:ph type="sldNum" sz="quarter" idx="10"/>
-          </p:nvPr>
-        </p:nvSpPr>
-        <p:spPr/>
-        <p:txBody>
-          <a:bodyPr/>
-          <a:lstStyle/>
-          <a:p>
-            <a:fld id="{F7021451-1387-4CA6-816F-3879F97B5CBC}" type="slidenum">
-              <a:rPr lang="en-US"/>
-              <a:t>5</a:t>
-            </a:fld>
-            <a:endParaRPr lang="en-US"/>
-          </a:p>
-        </p:txBody>
-      </p:sp>
-    </p:spTree>
-    <p:extLst>
-      <p:ext uri="{BB962C8B-B14F-4D97-AF65-F5344CB8AC3E}">
-        <p14:creationId xmlns:p14="http://schemas.microsoft.com/office/powerpoint/2010/main" val="1024086991"/>
       </p:ext>
     </p:extLst>
   </p:cSld>
@@ -1984,6 +2093,1242 @@
 
 <file path=ppt/slides/slide10.xml><?xml version="1.0" encoding="utf-8"?>
 <p:sld xmlns:a="http://schemas.openxmlformats.org/drawingml/2006/main" xmlns:r="http://schemas.openxmlformats.org/officeDocument/2006/relationships" xmlns:p="http://schemas.openxmlformats.org/presentationml/2006/main">
+  <p:cSld name="Slide 10">
+    <p:bg>
+      <p:bgPr>
+        <a:gradFill>
+          <a:gsLst>
+            <a:gs pos="0">
+              <a:schemeClr val="accent3">
+                <a:lumMod val="5000"/>
+                <a:lumOff val="95000"/>
+              </a:schemeClr>
+            </a:gs>
+            <a:gs pos="74000">
+              <a:schemeClr val="accent3">
+                <a:lumMod val="45000"/>
+                <a:lumOff val="55000"/>
+              </a:schemeClr>
+            </a:gs>
+            <a:gs pos="83000">
+              <a:schemeClr val="accent3">
+                <a:lumMod val="45000"/>
+                <a:lumOff val="55000"/>
+              </a:schemeClr>
+            </a:gs>
+            <a:gs pos="100000">
+              <a:schemeClr val="accent3">
+                <a:lumMod val="30000"/>
+                <a:lumOff val="70000"/>
+              </a:schemeClr>
+            </a:gs>
+          </a:gsLst>
+          <a:lin ang="5400000" scaled="1"/>
+        </a:gradFill>
+        <a:effectLst/>
+      </p:bgPr>
+    </p:bg>
+    <p:spTree>
+      <p:nvGrpSpPr>
+        <p:cNvPr id="1" name=""/>
+        <p:cNvGrpSpPr/>
+        <p:nvPr/>
+      </p:nvGrpSpPr>
+      <p:grpSpPr>
+        <a:xfrm>
+          <a:off x="0" y="0"/>
+          <a:ext cx="0" cy="0"/>
+          <a:chOff x="0" y="0"/>
+          <a:chExt cx="0" cy="0"/>
+        </a:xfrm>
+      </p:grpSpPr>
+      <p:sp>
+        <p:nvSpPr>
+          <p:cNvPr id="2" name="Shape 0"/>
+          <p:cNvSpPr/>
+          <p:nvPr/>
+        </p:nvSpPr>
+        <p:spPr>
+          <a:xfrm>
+            <a:off x="0" y="0"/>
+            <a:ext cx="9144000" cy="822960"/>
+          </a:xfrm>
+          <a:prstGeom prst="rect">
+            <a:avLst/>
+          </a:prstGeom>
+          <a:solidFill>
+            <a:srgbClr val="1B6CA8"/>
+          </a:solidFill>
+          <a:ln w="12700">
+            <a:solidFill>
+              <a:srgbClr val="1B6CA8"/>
+            </a:solidFill>
+            <a:prstDash val="solid"/>
+          </a:ln>
+        </p:spPr>
+        <p:txBody>
+          <a:bodyPr/>
+          <a:lstStyle/>
+          <a:p>
+            <a:endParaRPr lang="pt-PT"/>
+          </a:p>
+        </p:txBody>
+      </p:sp>
+      <p:sp>
+        <p:nvSpPr>
+          <p:cNvPr id="3" name="Text 1"/>
+          <p:cNvSpPr/>
+          <p:nvPr/>
+        </p:nvSpPr>
+        <p:spPr>
+          <a:xfrm>
+            <a:off x="457200" y="0"/>
+            <a:ext cx="8229600" cy="822960"/>
+          </a:xfrm>
+          <a:prstGeom prst="rect">
+            <a:avLst/>
+          </a:prstGeom>
+          <a:noFill/>
+          <a:ln/>
+        </p:spPr>
+        <p:txBody>
+          <a:bodyPr wrap="square" lIns="0" tIns="0" rIns="0" bIns="0" rtlCol="0" anchor="ctr"/>
+          <a:lstStyle/>
+          <a:p>
+            <a:pPr marL="0" indent="0">
+              <a:buNone/>
+            </a:pPr>
+            <a:r>
+              <a:rPr lang="en-US" sz="2400" b="1" dirty="0">
+                <a:solidFill>
+                  <a:srgbClr val="FFFFFF"/>
+                </a:solidFill>
+              </a:rPr>
+              <a:t>07  /  Fluxo de Execução</a:t>
+            </a:r>
+            <a:endParaRPr lang="en-US" sz="2400" dirty="0"/>
+          </a:p>
+        </p:txBody>
+      </p:sp>
+      <p:sp>
+        <p:nvSpPr>
+          <p:cNvPr id="4" name="Shape 2"/>
+          <p:cNvSpPr/>
+          <p:nvPr/>
+        </p:nvSpPr>
+        <p:spPr>
+          <a:xfrm>
+            <a:off x="274320" y="1005840"/>
+            <a:ext cx="2743200" cy="1325880"/>
+          </a:xfrm>
+          <a:prstGeom prst="rect">
+            <a:avLst/>
+          </a:prstGeom>
+          <a:solidFill>
+            <a:srgbClr val="112236"/>
+          </a:solidFill>
+          <a:ln w="19050">
+            <a:solidFill>
+              <a:srgbClr val="2D9CDB"/>
+            </a:solidFill>
+            <a:prstDash val="solid"/>
+          </a:ln>
+          <a:effectLst>
+            <a:outerShdw blurRad="101600" dist="38100" dir="8100000" algn="bl" rotWithShape="0">
+              <a:srgbClr val="000000">
+                <a:alpha val="18000"/>
+              </a:srgbClr>
+            </a:outerShdw>
+          </a:effectLst>
+        </p:spPr>
+        <p:txBody>
+          <a:bodyPr/>
+          <a:lstStyle/>
+          <a:p>
+            <a:endParaRPr lang="pt-PT"/>
+          </a:p>
+        </p:txBody>
+      </p:sp>
+      <p:sp>
+        <p:nvSpPr>
+          <p:cNvPr id="5" name="Shape 3"/>
+          <p:cNvSpPr/>
+          <p:nvPr/>
+        </p:nvSpPr>
+        <p:spPr>
+          <a:xfrm>
+            <a:off x="365760" y="1097280"/>
+            <a:ext cx="502920" cy="502920"/>
+          </a:xfrm>
+          <a:prstGeom prst="ellipse">
+            <a:avLst/>
+          </a:prstGeom>
+          <a:solidFill>
+            <a:srgbClr val="2D9CDB"/>
+          </a:solidFill>
+          <a:ln w="12700">
+            <a:solidFill>
+              <a:srgbClr val="2D9CDB"/>
+            </a:solidFill>
+            <a:prstDash val="solid"/>
+          </a:ln>
+        </p:spPr>
+        <p:txBody>
+          <a:bodyPr/>
+          <a:lstStyle/>
+          <a:p>
+            <a:endParaRPr lang="pt-PT"/>
+          </a:p>
+        </p:txBody>
+      </p:sp>
+      <p:sp>
+        <p:nvSpPr>
+          <p:cNvPr id="6" name="Text 4"/>
+          <p:cNvSpPr/>
+          <p:nvPr/>
+        </p:nvSpPr>
+        <p:spPr>
+          <a:xfrm>
+            <a:off x="365760" y="1097280"/>
+            <a:ext cx="502920" cy="502920"/>
+          </a:xfrm>
+          <a:prstGeom prst="rect">
+            <a:avLst/>
+          </a:prstGeom>
+          <a:noFill/>
+          <a:ln/>
+        </p:spPr>
+        <p:txBody>
+          <a:bodyPr wrap="square" lIns="0" tIns="0" rIns="0" bIns="0" rtlCol="0" anchor="ctr"/>
+          <a:lstStyle/>
+          <a:p>
+            <a:pPr marL="0" indent="0" algn="ctr">
+              <a:buNone/>
+            </a:pPr>
+            <a:r>
+              <a:rPr lang="en-US" sz="1600" b="1" dirty="0">
+                <a:solidFill>
+                  <a:srgbClr val="0D1B2A"/>
+                </a:solidFill>
+              </a:rPr>
+              <a:t>1</a:t>
+            </a:r>
+            <a:endParaRPr lang="en-US" sz="1600" dirty="0"/>
+          </a:p>
+        </p:txBody>
+      </p:sp>
+      <p:sp>
+        <p:nvSpPr>
+          <p:cNvPr id="7" name="Text 5"/>
+          <p:cNvSpPr/>
+          <p:nvPr/>
+        </p:nvSpPr>
+        <p:spPr>
+          <a:xfrm>
+            <a:off x="960120" y="1078992"/>
+            <a:ext cx="1965960" cy="1097280"/>
+          </a:xfrm>
+          <a:prstGeom prst="rect">
+            <a:avLst/>
+          </a:prstGeom>
+          <a:noFill/>
+          <a:ln/>
+        </p:spPr>
+        <p:txBody>
+          <a:bodyPr wrap="square" rtlCol="0" anchor="ctr"/>
+          <a:lstStyle/>
+          <a:p>
+            <a:pPr marL="0" indent="0">
+              <a:buNone/>
+            </a:pPr>
+            <a:r>
+              <a:rPr lang="en-US" sz="1200" dirty="0">
+                <a:solidFill>
+                  <a:srgbClr val="FFFFFF"/>
+                </a:solidFill>
+              </a:rPr>
+              <a:t>Client inicia o workflow</a:t>
+            </a:r>
+            <a:endParaRPr lang="en-US" sz="1200" dirty="0"/>
+          </a:p>
+        </p:txBody>
+      </p:sp>
+      <p:sp>
+        <p:nvSpPr>
+          <p:cNvPr id="9" name="Shape 7"/>
+          <p:cNvSpPr/>
+          <p:nvPr/>
+        </p:nvSpPr>
+        <p:spPr>
+          <a:xfrm>
+            <a:off x="3200400" y="1005840"/>
+            <a:ext cx="2743200" cy="1325880"/>
+          </a:xfrm>
+          <a:prstGeom prst="rect">
+            <a:avLst/>
+          </a:prstGeom>
+          <a:solidFill>
+            <a:srgbClr val="112236"/>
+          </a:solidFill>
+          <a:ln w="19050">
+            <a:solidFill>
+              <a:srgbClr val="1B6CA8"/>
+            </a:solidFill>
+            <a:prstDash val="solid"/>
+          </a:ln>
+          <a:effectLst>
+            <a:outerShdw blurRad="101600" dist="38100" dir="8100000" algn="bl" rotWithShape="0">
+              <a:srgbClr val="000000">
+                <a:alpha val="18000"/>
+              </a:srgbClr>
+            </a:outerShdw>
+          </a:effectLst>
+        </p:spPr>
+        <p:txBody>
+          <a:bodyPr/>
+          <a:lstStyle/>
+          <a:p>
+            <a:endParaRPr lang="pt-PT"/>
+          </a:p>
+        </p:txBody>
+      </p:sp>
+      <p:sp>
+        <p:nvSpPr>
+          <p:cNvPr id="10" name="Shape 8"/>
+          <p:cNvSpPr/>
+          <p:nvPr/>
+        </p:nvSpPr>
+        <p:spPr>
+          <a:xfrm>
+            <a:off x="3291840" y="1097280"/>
+            <a:ext cx="502920" cy="502920"/>
+          </a:xfrm>
+          <a:prstGeom prst="ellipse">
+            <a:avLst/>
+          </a:prstGeom>
+          <a:solidFill>
+            <a:srgbClr val="1B6CA8"/>
+          </a:solidFill>
+          <a:ln w="12700">
+            <a:solidFill>
+              <a:srgbClr val="1B6CA8"/>
+            </a:solidFill>
+            <a:prstDash val="solid"/>
+          </a:ln>
+        </p:spPr>
+        <p:txBody>
+          <a:bodyPr/>
+          <a:lstStyle/>
+          <a:p>
+            <a:endParaRPr lang="pt-PT"/>
+          </a:p>
+        </p:txBody>
+      </p:sp>
+      <p:sp>
+        <p:nvSpPr>
+          <p:cNvPr id="11" name="Text 9"/>
+          <p:cNvSpPr/>
+          <p:nvPr/>
+        </p:nvSpPr>
+        <p:spPr>
+          <a:xfrm>
+            <a:off x="3291840" y="1097280"/>
+            <a:ext cx="502920" cy="502920"/>
+          </a:xfrm>
+          <a:prstGeom prst="rect">
+            <a:avLst/>
+          </a:prstGeom>
+          <a:noFill/>
+          <a:ln/>
+        </p:spPr>
+        <p:txBody>
+          <a:bodyPr wrap="square" lIns="0" tIns="0" rIns="0" bIns="0" rtlCol="0" anchor="ctr"/>
+          <a:lstStyle/>
+          <a:p>
+            <a:pPr marL="0" indent="0" algn="ctr">
+              <a:buNone/>
+            </a:pPr>
+            <a:r>
+              <a:rPr lang="en-US" sz="1600" b="1" dirty="0">
+                <a:solidFill>
+                  <a:srgbClr val="0D1B2A"/>
+                </a:solidFill>
+              </a:rPr>
+              <a:t>2</a:t>
+            </a:r>
+            <a:endParaRPr lang="en-US" sz="1600" dirty="0"/>
+          </a:p>
+        </p:txBody>
+      </p:sp>
+      <p:sp>
+        <p:nvSpPr>
+          <p:cNvPr id="12" name="Text 10"/>
+          <p:cNvSpPr/>
+          <p:nvPr/>
+        </p:nvSpPr>
+        <p:spPr>
+          <a:xfrm>
+            <a:off x="3886200" y="1078992"/>
+            <a:ext cx="1965960" cy="1097280"/>
+          </a:xfrm>
+          <a:prstGeom prst="rect">
+            <a:avLst/>
+          </a:prstGeom>
+          <a:noFill/>
+          <a:ln/>
+        </p:spPr>
+        <p:txBody>
+          <a:bodyPr wrap="square" rtlCol="0" anchor="ctr"/>
+          <a:lstStyle/>
+          <a:p>
+            <a:pPr marL="0" indent="0">
+              <a:buNone/>
+            </a:pPr>
+            <a:r>
+              <a:rPr lang="en-US" sz="1200" dirty="0">
+                <a:solidFill>
+                  <a:srgbClr val="FFFFFF"/>
+                </a:solidFill>
+              </a:rPr>
+              <a:t>Temporal Service regista o evento</a:t>
+            </a:r>
+            <a:endParaRPr lang="en-US" sz="1200" dirty="0"/>
+          </a:p>
+        </p:txBody>
+      </p:sp>
+      <p:sp>
+        <p:nvSpPr>
+          <p:cNvPr id="14" name="Shape 12"/>
+          <p:cNvSpPr/>
+          <p:nvPr/>
+        </p:nvSpPr>
+        <p:spPr>
+          <a:xfrm>
+            <a:off x="6126480" y="1005840"/>
+            <a:ext cx="2743200" cy="1325880"/>
+          </a:xfrm>
+          <a:prstGeom prst="rect">
+            <a:avLst/>
+          </a:prstGeom>
+          <a:solidFill>
+            <a:srgbClr val="112236"/>
+          </a:solidFill>
+          <a:ln w="19050">
+            <a:solidFill>
+              <a:srgbClr val="9B59B6"/>
+            </a:solidFill>
+            <a:prstDash val="solid"/>
+          </a:ln>
+          <a:effectLst>
+            <a:outerShdw blurRad="101600" dist="38100" dir="8100000" algn="bl" rotWithShape="0">
+              <a:srgbClr val="000000">
+                <a:alpha val="18000"/>
+              </a:srgbClr>
+            </a:outerShdw>
+          </a:effectLst>
+        </p:spPr>
+        <p:txBody>
+          <a:bodyPr/>
+          <a:lstStyle/>
+          <a:p>
+            <a:endParaRPr lang="pt-PT"/>
+          </a:p>
+        </p:txBody>
+      </p:sp>
+      <p:sp>
+        <p:nvSpPr>
+          <p:cNvPr id="15" name="Shape 13"/>
+          <p:cNvSpPr/>
+          <p:nvPr/>
+        </p:nvSpPr>
+        <p:spPr>
+          <a:xfrm>
+            <a:off x="6217920" y="1097280"/>
+            <a:ext cx="502920" cy="502920"/>
+          </a:xfrm>
+          <a:prstGeom prst="ellipse">
+            <a:avLst/>
+          </a:prstGeom>
+          <a:solidFill>
+            <a:srgbClr val="9B59B6"/>
+          </a:solidFill>
+          <a:ln w="12700">
+            <a:solidFill>
+              <a:srgbClr val="9B59B6"/>
+            </a:solidFill>
+            <a:prstDash val="solid"/>
+          </a:ln>
+        </p:spPr>
+        <p:txBody>
+          <a:bodyPr/>
+          <a:lstStyle/>
+          <a:p>
+            <a:endParaRPr lang="pt-PT"/>
+          </a:p>
+        </p:txBody>
+      </p:sp>
+      <p:sp>
+        <p:nvSpPr>
+          <p:cNvPr id="16" name="Text 14"/>
+          <p:cNvSpPr/>
+          <p:nvPr/>
+        </p:nvSpPr>
+        <p:spPr>
+          <a:xfrm>
+            <a:off x="6217920" y="1097280"/>
+            <a:ext cx="502920" cy="502920"/>
+          </a:xfrm>
+          <a:prstGeom prst="rect">
+            <a:avLst/>
+          </a:prstGeom>
+          <a:noFill/>
+          <a:ln/>
+        </p:spPr>
+        <p:txBody>
+          <a:bodyPr wrap="square" lIns="0" tIns="0" rIns="0" bIns="0" rtlCol="0" anchor="ctr"/>
+          <a:lstStyle/>
+          <a:p>
+            <a:pPr marL="0" indent="0" algn="ctr">
+              <a:buNone/>
+            </a:pPr>
+            <a:r>
+              <a:rPr lang="en-US" sz="1600" b="1" dirty="0">
+                <a:solidFill>
+                  <a:srgbClr val="0D1B2A"/>
+                </a:solidFill>
+              </a:rPr>
+              <a:t>3</a:t>
+            </a:r>
+            <a:endParaRPr lang="en-US" sz="1600" dirty="0"/>
+          </a:p>
+        </p:txBody>
+      </p:sp>
+      <p:sp>
+        <p:nvSpPr>
+          <p:cNvPr id="17" name="Text 15"/>
+          <p:cNvSpPr/>
+          <p:nvPr/>
+        </p:nvSpPr>
+        <p:spPr>
+          <a:xfrm>
+            <a:off x="6812280" y="1078992"/>
+            <a:ext cx="1965960" cy="1097280"/>
+          </a:xfrm>
+          <a:prstGeom prst="rect">
+            <a:avLst/>
+          </a:prstGeom>
+          <a:noFill/>
+          <a:ln/>
+        </p:spPr>
+        <p:txBody>
+          <a:bodyPr wrap="square" rtlCol="0" anchor="ctr"/>
+          <a:lstStyle/>
+          <a:p>
+            <a:pPr marL="0" indent="0">
+              <a:buNone/>
+            </a:pPr>
+            <a:r>
+              <a:rPr lang="en-US" sz="1200" dirty="0">
+                <a:solidFill>
+                  <a:srgbClr val="FFFFFF"/>
+                </a:solidFill>
+              </a:rPr>
+              <a:t>Tarefas são agendadas na Task Queue</a:t>
+            </a:r>
+            <a:endParaRPr lang="en-US" sz="1200" dirty="0"/>
+          </a:p>
+        </p:txBody>
+      </p:sp>
+      <p:sp>
+        <p:nvSpPr>
+          <p:cNvPr id="18" name="Shape 16"/>
+          <p:cNvSpPr/>
+          <p:nvPr/>
+        </p:nvSpPr>
+        <p:spPr>
+          <a:xfrm>
+            <a:off x="274320" y="2651760"/>
+            <a:ext cx="2743200" cy="1325880"/>
+          </a:xfrm>
+          <a:prstGeom prst="rect">
+            <a:avLst/>
+          </a:prstGeom>
+          <a:solidFill>
+            <a:srgbClr val="112236"/>
+          </a:solidFill>
+          <a:ln w="19050">
+            <a:solidFill>
+              <a:srgbClr val="E67E22"/>
+            </a:solidFill>
+            <a:prstDash val="solid"/>
+          </a:ln>
+          <a:effectLst>
+            <a:outerShdw blurRad="101600" dist="38100" dir="8100000" algn="bl" rotWithShape="0">
+              <a:srgbClr val="000000">
+                <a:alpha val="18000"/>
+              </a:srgbClr>
+            </a:outerShdw>
+          </a:effectLst>
+        </p:spPr>
+        <p:txBody>
+          <a:bodyPr/>
+          <a:lstStyle/>
+          <a:p>
+            <a:endParaRPr lang="pt-PT"/>
+          </a:p>
+        </p:txBody>
+      </p:sp>
+      <p:sp>
+        <p:nvSpPr>
+          <p:cNvPr id="19" name="Shape 17"/>
+          <p:cNvSpPr/>
+          <p:nvPr/>
+        </p:nvSpPr>
+        <p:spPr>
+          <a:xfrm>
+            <a:off x="365760" y="2743200"/>
+            <a:ext cx="502920" cy="502920"/>
+          </a:xfrm>
+          <a:prstGeom prst="ellipse">
+            <a:avLst/>
+          </a:prstGeom>
+          <a:solidFill>
+            <a:srgbClr val="E67E22"/>
+          </a:solidFill>
+          <a:ln w="12700">
+            <a:solidFill>
+              <a:srgbClr val="E67E22"/>
+            </a:solidFill>
+            <a:prstDash val="solid"/>
+          </a:ln>
+        </p:spPr>
+        <p:txBody>
+          <a:bodyPr/>
+          <a:lstStyle/>
+          <a:p>
+            <a:endParaRPr lang="pt-PT"/>
+          </a:p>
+        </p:txBody>
+      </p:sp>
+      <p:sp>
+        <p:nvSpPr>
+          <p:cNvPr id="20" name="Text 18"/>
+          <p:cNvSpPr/>
+          <p:nvPr/>
+        </p:nvSpPr>
+        <p:spPr>
+          <a:xfrm>
+            <a:off x="365760" y="2743200"/>
+            <a:ext cx="502920" cy="502920"/>
+          </a:xfrm>
+          <a:prstGeom prst="rect">
+            <a:avLst/>
+          </a:prstGeom>
+          <a:noFill/>
+          <a:ln/>
+        </p:spPr>
+        <p:txBody>
+          <a:bodyPr wrap="square" lIns="0" tIns="0" rIns="0" bIns="0" rtlCol="0" anchor="ctr"/>
+          <a:lstStyle/>
+          <a:p>
+            <a:pPr marL="0" indent="0" algn="ctr">
+              <a:buNone/>
+            </a:pPr>
+            <a:r>
+              <a:rPr lang="en-US" sz="1600" b="1" dirty="0">
+                <a:solidFill>
+                  <a:srgbClr val="0D1B2A"/>
+                </a:solidFill>
+              </a:rPr>
+              <a:t>4</a:t>
+            </a:r>
+            <a:endParaRPr lang="en-US" sz="1600" dirty="0"/>
+          </a:p>
+        </p:txBody>
+      </p:sp>
+      <p:sp>
+        <p:nvSpPr>
+          <p:cNvPr id="21" name="Text 19"/>
+          <p:cNvSpPr/>
+          <p:nvPr/>
+        </p:nvSpPr>
+        <p:spPr>
+          <a:xfrm>
+            <a:off x="960120" y="2724912"/>
+            <a:ext cx="1965960" cy="1097280"/>
+          </a:xfrm>
+          <a:prstGeom prst="rect">
+            <a:avLst/>
+          </a:prstGeom>
+          <a:noFill/>
+          <a:ln/>
+        </p:spPr>
+        <p:txBody>
+          <a:bodyPr wrap="square" rtlCol="0" anchor="ctr"/>
+          <a:lstStyle/>
+          <a:p>
+            <a:pPr marL="0" indent="0">
+              <a:buNone/>
+            </a:pPr>
+            <a:r>
+              <a:rPr lang="en-US" sz="1200" dirty="0">
+                <a:solidFill>
+                  <a:srgbClr val="FFFFFF"/>
+                </a:solidFill>
+              </a:rPr>
+              <a:t>Worker consome e executa a tarefa</a:t>
+            </a:r>
+            <a:endParaRPr lang="en-US" sz="1200" dirty="0"/>
+          </a:p>
+        </p:txBody>
+      </p:sp>
+      <p:sp>
+        <p:nvSpPr>
+          <p:cNvPr id="23" name="Shape 21"/>
+          <p:cNvSpPr/>
+          <p:nvPr/>
+        </p:nvSpPr>
+        <p:spPr>
+          <a:xfrm>
+            <a:off x="3200400" y="2651760"/>
+            <a:ext cx="2743200" cy="1325880"/>
+          </a:xfrm>
+          <a:prstGeom prst="rect">
+            <a:avLst/>
+          </a:prstGeom>
+          <a:solidFill>
+            <a:srgbClr val="112236"/>
+          </a:solidFill>
+          <a:ln w="19050">
+            <a:solidFill>
+              <a:srgbClr val="27AE60"/>
+            </a:solidFill>
+            <a:prstDash val="solid"/>
+          </a:ln>
+          <a:effectLst>
+            <a:outerShdw blurRad="101600" dist="38100" dir="8100000" algn="bl" rotWithShape="0">
+              <a:srgbClr val="000000">
+                <a:alpha val="18000"/>
+              </a:srgbClr>
+            </a:outerShdw>
+          </a:effectLst>
+        </p:spPr>
+        <p:txBody>
+          <a:bodyPr/>
+          <a:lstStyle/>
+          <a:p>
+            <a:endParaRPr lang="pt-PT"/>
+          </a:p>
+        </p:txBody>
+      </p:sp>
+      <p:sp>
+        <p:nvSpPr>
+          <p:cNvPr id="24" name="Shape 22"/>
+          <p:cNvSpPr/>
+          <p:nvPr/>
+        </p:nvSpPr>
+        <p:spPr>
+          <a:xfrm>
+            <a:off x="3291840" y="2743200"/>
+            <a:ext cx="502920" cy="502920"/>
+          </a:xfrm>
+          <a:prstGeom prst="ellipse">
+            <a:avLst/>
+          </a:prstGeom>
+          <a:solidFill>
+            <a:srgbClr val="27AE60"/>
+          </a:solidFill>
+          <a:ln w="12700">
+            <a:solidFill>
+              <a:srgbClr val="27AE60"/>
+            </a:solidFill>
+            <a:prstDash val="solid"/>
+          </a:ln>
+        </p:spPr>
+        <p:txBody>
+          <a:bodyPr/>
+          <a:lstStyle/>
+          <a:p>
+            <a:endParaRPr lang="pt-PT"/>
+          </a:p>
+        </p:txBody>
+      </p:sp>
+      <p:sp>
+        <p:nvSpPr>
+          <p:cNvPr id="25" name="Text 23"/>
+          <p:cNvSpPr/>
+          <p:nvPr/>
+        </p:nvSpPr>
+        <p:spPr>
+          <a:xfrm>
+            <a:off x="3291840" y="2743200"/>
+            <a:ext cx="502920" cy="502920"/>
+          </a:xfrm>
+          <a:prstGeom prst="rect">
+            <a:avLst/>
+          </a:prstGeom>
+          <a:noFill/>
+          <a:ln/>
+        </p:spPr>
+        <p:txBody>
+          <a:bodyPr wrap="square" lIns="0" tIns="0" rIns="0" bIns="0" rtlCol="0" anchor="ctr"/>
+          <a:lstStyle/>
+          <a:p>
+            <a:pPr marL="0" indent="0" algn="ctr">
+              <a:buNone/>
+            </a:pPr>
+            <a:r>
+              <a:rPr lang="en-US" sz="1600" b="1" dirty="0">
+                <a:solidFill>
+                  <a:srgbClr val="0D1B2A"/>
+                </a:solidFill>
+              </a:rPr>
+              <a:t>5</a:t>
+            </a:r>
+            <a:endParaRPr lang="en-US" sz="1600" dirty="0"/>
+          </a:p>
+        </p:txBody>
+      </p:sp>
+      <p:sp>
+        <p:nvSpPr>
+          <p:cNvPr id="26" name="Text 24"/>
+          <p:cNvSpPr/>
+          <p:nvPr/>
+        </p:nvSpPr>
+        <p:spPr>
+          <a:xfrm>
+            <a:off x="3886200" y="2724912"/>
+            <a:ext cx="1965960" cy="1097280"/>
+          </a:xfrm>
+          <a:prstGeom prst="rect">
+            <a:avLst/>
+          </a:prstGeom>
+          <a:noFill/>
+          <a:ln/>
+        </p:spPr>
+        <p:txBody>
+          <a:bodyPr wrap="square" rtlCol="0" anchor="ctr"/>
+          <a:lstStyle/>
+          <a:p>
+            <a:pPr marL="0" indent="0">
+              <a:buNone/>
+            </a:pPr>
+            <a:r>
+              <a:rPr lang="en-US" sz="1200" dirty="0">
+                <a:solidFill>
+                  <a:srgbClr val="FFFFFF"/>
+                </a:solidFill>
+              </a:rPr>
+              <a:t>Activity realiza a operação externa</a:t>
+            </a:r>
+            <a:endParaRPr lang="en-US" sz="1200" dirty="0"/>
+          </a:p>
+        </p:txBody>
+      </p:sp>
+      <p:sp>
+        <p:nvSpPr>
+          <p:cNvPr id="28" name="Shape 26"/>
+          <p:cNvSpPr/>
+          <p:nvPr/>
+        </p:nvSpPr>
+        <p:spPr>
+          <a:xfrm>
+            <a:off x="6126480" y="2651760"/>
+            <a:ext cx="2743200" cy="1325880"/>
+          </a:xfrm>
+          <a:prstGeom prst="rect">
+            <a:avLst/>
+          </a:prstGeom>
+          <a:solidFill>
+            <a:srgbClr val="112236"/>
+          </a:solidFill>
+          <a:ln w="19050">
+            <a:solidFill>
+              <a:srgbClr val="00D4AA"/>
+            </a:solidFill>
+            <a:prstDash val="solid"/>
+          </a:ln>
+          <a:effectLst>
+            <a:outerShdw blurRad="101600" dist="38100" dir="8100000" algn="bl" rotWithShape="0">
+              <a:srgbClr val="000000">
+                <a:alpha val="18000"/>
+              </a:srgbClr>
+            </a:outerShdw>
+          </a:effectLst>
+        </p:spPr>
+        <p:txBody>
+          <a:bodyPr/>
+          <a:lstStyle/>
+          <a:p>
+            <a:endParaRPr lang="pt-PT"/>
+          </a:p>
+        </p:txBody>
+      </p:sp>
+      <p:sp>
+        <p:nvSpPr>
+          <p:cNvPr id="29" name="Shape 27"/>
+          <p:cNvSpPr/>
+          <p:nvPr/>
+        </p:nvSpPr>
+        <p:spPr>
+          <a:xfrm>
+            <a:off x="6217920" y="2743200"/>
+            <a:ext cx="502920" cy="502920"/>
+          </a:xfrm>
+          <a:prstGeom prst="ellipse">
+            <a:avLst/>
+          </a:prstGeom>
+          <a:solidFill>
+            <a:srgbClr val="00D4AA"/>
+          </a:solidFill>
+          <a:ln w="12700">
+            <a:solidFill>
+              <a:srgbClr val="00D4AA"/>
+            </a:solidFill>
+            <a:prstDash val="solid"/>
+          </a:ln>
+        </p:spPr>
+        <p:txBody>
+          <a:bodyPr/>
+          <a:lstStyle/>
+          <a:p>
+            <a:endParaRPr lang="pt-PT"/>
+          </a:p>
+        </p:txBody>
+      </p:sp>
+      <p:sp>
+        <p:nvSpPr>
+          <p:cNvPr id="30" name="Text 28"/>
+          <p:cNvSpPr/>
+          <p:nvPr/>
+        </p:nvSpPr>
+        <p:spPr>
+          <a:xfrm>
+            <a:off x="6217920" y="2743200"/>
+            <a:ext cx="502920" cy="502920"/>
+          </a:xfrm>
+          <a:prstGeom prst="rect">
+            <a:avLst/>
+          </a:prstGeom>
+          <a:noFill/>
+          <a:ln/>
+        </p:spPr>
+        <p:txBody>
+          <a:bodyPr wrap="square" lIns="0" tIns="0" rIns="0" bIns="0" rtlCol="0" anchor="ctr"/>
+          <a:lstStyle/>
+          <a:p>
+            <a:pPr marL="0" indent="0" algn="ctr">
+              <a:buNone/>
+            </a:pPr>
+            <a:r>
+              <a:rPr lang="en-US" sz="1600" b="1" dirty="0">
+                <a:solidFill>
+                  <a:srgbClr val="0D1B2A"/>
+                </a:solidFill>
+              </a:rPr>
+              <a:t>6</a:t>
+            </a:r>
+            <a:endParaRPr lang="en-US" sz="1600" dirty="0"/>
+          </a:p>
+        </p:txBody>
+      </p:sp>
+      <p:sp>
+        <p:nvSpPr>
+          <p:cNvPr id="31" name="Text 29"/>
+          <p:cNvSpPr/>
+          <p:nvPr/>
+        </p:nvSpPr>
+        <p:spPr>
+          <a:xfrm>
+            <a:off x="6812280" y="2724912"/>
+            <a:ext cx="1965960" cy="1097280"/>
+          </a:xfrm>
+          <a:prstGeom prst="rect">
+            <a:avLst/>
+          </a:prstGeom>
+          <a:noFill/>
+          <a:ln/>
+        </p:spPr>
+        <p:txBody>
+          <a:bodyPr wrap="square" rtlCol="0" anchor="ctr"/>
+          <a:lstStyle/>
+          <a:p>
+            <a:pPr marL="0" indent="0">
+              <a:buNone/>
+            </a:pPr>
+            <a:r>
+              <a:rPr lang="en-US" sz="1200" dirty="0">
+                <a:solidFill>
+                  <a:srgbClr val="FFFFFF"/>
+                </a:solidFill>
+              </a:rPr>
+              <a:t>Resultado retorna e histórico atualiza</a:t>
+            </a:r>
+            <a:endParaRPr lang="en-US" sz="1200" dirty="0"/>
+          </a:p>
+        </p:txBody>
+      </p:sp>
+      <p:sp>
+        <p:nvSpPr>
+          <p:cNvPr id="32" name="Shape 30"/>
+          <p:cNvSpPr/>
+          <p:nvPr/>
+        </p:nvSpPr>
+        <p:spPr>
+          <a:xfrm>
+            <a:off x="274320" y="4434840"/>
+            <a:ext cx="8595360" cy="457200"/>
+          </a:xfrm>
+          <a:prstGeom prst="rect">
+            <a:avLst/>
+          </a:prstGeom>
+          <a:solidFill>
+            <a:srgbClr val="1B6CA8"/>
+          </a:solidFill>
+          <a:ln w="12700">
+            <a:solidFill>
+              <a:srgbClr val="1B6CA8"/>
+            </a:solidFill>
+            <a:prstDash val="solid"/>
+          </a:ln>
+        </p:spPr>
+        <p:txBody>
+          <a:bodyPr/>
+          <a:lstStyle/>
+          <a:p>
+            <a:endParaRPr lang="pt-PT"/>
+          </a:p>
+        </p:txBody>
+      </p:sp>
+      <p:sp>
+        <p:nvSpPr>
+          <p:cNvPr id="33" name="Text 31"/>
+          <p:cNvSpPr/>
+          <p:nvPr/>
+        </p:nvSpPr>
+        <p:spPr>
+          <a:xfrm>
+            <a:off x="457200" y="4434840"/>
+            <a:ext cx="8229600" cy="457200"/>
+          </a:xfrm>
+          <a:prstGeom prst="rect">
+            <a:avLst/>
+          </a:prstGeom>
+          <a:noFill/>
+          <a:ln/>
+        </p:spPr>
+        <p:txBody>
+          <a:bodyPr wrap="square" rtlCol="0" anchor="ctr"/>
+          <a:lstStyle/>
+          <a:p>
+            <a:pPr marL="0" indent="0">
+              <a:buNone/>
+            </a:pPr>
+            <a:r>
+              <a:rPr lang="en-US" sz="1100" i="1" dirty="0">
+                <a:solidFill>
+                  <a:srgbClr val="FFFFFF"/>
+                </a:solidFill>
+              </a:rPr>
+              <a:t>🔄  Em caso de falha: Temporal aplica Retry Policies e retoma a execução com base no histórico de eventos.</a:t>
+            </a:r>
+            <a:endParaRPr lang="en-US" sz="1100" dirty="0"/>
+          </a:p>
+        </p:txBody>
+      </p:sp>
+      <p:cxnSp>
+        <p:nvCxnSpPr>
+          <p:cNvPr id="34" name="Conexão Reta Unidirecional 33">
+            <a:extLst>
+              <a:ext uri="{FF2B5EF4-FFF2-40B4-BE49-F238E27FC236}">
+                <a16:creationId xmlns:a16="http://schemas.microsoft.com/office/drawing/2014/main" id="{BB5C6E2A-2925-F8C5-5E9D-468D5D9D3058}"/>
+              </a:ext>
+            </a:extLst>
+          </p:cNvPr>
+          <p:cNvCxnSpPr>
+            <a:cxnSpLocks/>
+            <a:stCxn id="4" idx="3"/>
+            <a:endCxn id="9" idx="1"/>
+          </p:cNvCxnSpPr>
+          <p:nvPr/>
+        </p:nvCxnSpPr>
+        <p:spPr>
+          <a:xfrm>
+            <a:off x="3017520" y="1668780"/>
+            <a:ext cx="182880" cy="0"/>
+          </a:xfrm>
+          <a:prstGeom prst="straightConnector1">
+            <a:avLst/>
+          </a:prstGeom>
+          <a:ln w="19050">
+            <a:solidFill>
+              <a:schemeClr val="tx1"/>
+            </a:solidFill>
+            <a:tailEnd type="triangle"/>
+          </a:ln>
+        </p:spPr>
+        <p:style>
+          <a:lnRef idx="1">
+            <a:schemeClr val="accent1"/>
+          </a:lnRef>
+          <a:fillRef idx="0">
+            <a:schemeClr val="accent1"/>
+          </a:fillRef>
+          <a:effectRef idx="0">
+            <a:schemeClr val="accent1"/>
+          </a:effectRef>
+          <a:fontRef idx="minor">
+            <a:schemeClr val="tx1"/>
+          </a:fontRef>
+        </p:style>
+      </p:cxnSp>
+      <p:cxnSp>
+        <p:nvCxnSpPr>
+          <p:cNvPr id="37" name="Conexão Reta Unidirecional 36">
+            <a:extLst>
+              <a:ext uri="{FF2B5EF4-FFF2-40B4-BE49-F238E27FC236}">
+                <a16:creationId xmlns:a16="http://schemas.microsoft.com/office/drawing/2014/main" id="{1BBE1A0A-02C2-26FE-803E-1112E59E56FA}"/>
+              </a:ext>
+            </a:extLst>
+          </p:cNvPr>
+          <p:cNvCxnSpPr>
+            <a:cxnSpLocks/>
+            <a:stCxn id="9" idx="3"/>
+            <a:endCxn id="14" idx="1"/>
+          </p:cNvCxnSpPr>
+          <p:nvPr/>
+        </p:nvCxnSpPr>
+        <p:spPr>
+          <a:xfrm>
+            <a:off x="5943600" y="1668780"/>
+            <a:ext cx="182880" cy="0"/>
+          </a:xfrm>
+          <a:prstGeom prst="straightConnector1">
+            <a:avLst/>
+          </a:prstGeom>
+          <a:ln w="19050">
+            <a:solidFill>
+              <a:schemeClr val="tx1"/>
+            </a:solidFill>
+            <a:tailEnd type="triangle"/>
+          </a:ln>
+        </p:spPr>
+        <p:style>
+          <a:lnRef idx="1">
+            <a:schemeClr val="accent1"/>
+          </a:lnRef>
+          <a:fillRef idx="0">
+            <a:schemeClr val="accent1"/>
+          </a:fillRef>
+          <a:effectRef idx="0">
+            <a:schemeClr val="accent1"/>
+          </a:effectRef>
+          <a:fontRef idx="minor">
+            <a:schemeClr val="tx1"/>
+          </a:fontRef>
+        </p:style>
+      </p:cxnSp>
+      <p:cxnSp>
+        <p:nvCxnSpPr>
+          <p:cNvPr id="40" name="Conexão Reta Unidirecional 39">
+            <a:extLst>
+              <a:ext uri="{FF2B5EF4-FFF2-40B4-BE49-F238E27FC236}">
+                <a16:creationId xmlns:a16="http://schemas.microsoft.com/office/drawing/2014/main" id="{B696B6AA-6E81-E91D-16E1-3EF726F09E50}"/>
+              </a:ext>
+            </a:extLst>
+          </p:cNvPr>
+          <p:cNvCxnSpPr>
+            <a:cxnSpLocks/>
+            <a:stCxn id="18" idx="3"/>
+            <a:endCxn id="23" idx="1"/>
+          </p:cNvCxnSpPr>
+          <p:nvPr/>
+        </p:nvCxnSpPr>
+        <p:spPr>
+          <a:xfrm>
+            <a:off x="3017520" y="3314700"/>
+            <a:ext cx="182880" cy="0"/>
+          </a:xfrm>
+          <a:prstGeom prst="straightConnector1">
+            <a:avLst/>
+          </a:prstGeom>
+          <a:ln w="19050">
+            <a:solidFill>
+              <a:schemeClr val="tx1"/>
+            </a:solidFill>
+            <a:tailEnd type="triangle"/>
+          </a:ln>
+        </p:spPr>
+        <p:style>
+          <a:lnRef idx="1">
+            <a:schemeClr val="accent1"/>
+          </a:lnRef>
+          <a:fillRef idx="0">
+            <a:schemeClr val="accent1"/>
+          </a:fillRef>
+          <a:effectRef idx="0">
+            <a:schemeClr val="accent1"/>
+          </a:effectRef>
+          <a:fontRef idx="minor">
+            <a:schemeClr val="tx1"/>
+          </a:fontRef>
+        </p:style>
+      </p:cxnSp>
+      <p:cxnSp>
+        <p:nvCxnSpPr>
+          <p:cNvPr id="43" name="Conexão Reta Unidirecional 42">
+            <a:extLst>
+              <a:ext uri="{FF2B5EF4-FFF2-40B4-BE49-F238E27FC236}">
+                <a16:creationId xmlns:a16="http://schemas.microsoft.com/office/drawing/2014/main" id="{83159633-415F-2D3D-D3A9-EA4F4EA99351}"/>
+              </a:ext>
+            </a:extLst>
+          </p:cNvPr>
+          <p:cNvCxnSpPr>
+            <a:cxnSpLocks/>
+            <a:stCxn id="23" idx="3"/>
+          </p:cNvCxnSpPr>
+          <p:nvPr/>
+        </p:nvCxnSpPr>
+        <p:spPr>
+          <a:xfrm flipV="1">
+            <a:off x="5943600" y="3310944"/>
+            <a:ext cx="182880" cy="3756"/>
+          </a:xfrm>
+          <a:prstGeom prst="straightConnector1">
+            <a:avLst/>
+          </a:prstGeom>
+          <a:ln w="19050">
+            <a:solidFill>
+              <a:schemeClr val="tx1"/>
+            </a:solidFill>
+            <a:tailEnd type="triangle"/>
+          </a:ln>
+        </p:spPr>
+        <p:style>
+          <a:lnRef idx="1">
+            <a:schemeClr val="accent1"/>
+          </a:lnRef>
+          <a:fillRef idx="0">
+            <a:schemeClr val="accent1"/>
+          </a:fillRef>
+          <a:effectRef idx="0">
+            <a:schemeClr val="accent1"/>
+          </a:effectRef>
+          <a:fontRef idx="minor">
+            <a:schemeClr val="tx1"/>
+          </a:fontRef>
+        </p:style>
+      </p:cxnSp>
+    </p:spTree>
+  </p:cSld>
+  <p:clrMapOvr>
+    <a:masterClrMapping/>
+  </p:clrMapOvr>
+</p:sld>
+</file>
+
+<file path=ppt/slides/slide11.xml><?xml version="1.0" encoding="utf-8"?>
+<p:sld xmlns:a="http://schemas.openxmlformats.org/drawingml/2006/main" xmlns:r="http://schemas.openxmlformats.org/officeDocument/2006/relationships" xmlns:p="http://schemas.openxmlformats.org/presentationml/2006/main">
   <p:cSld name="Slide 11">
     <p:bg>
       <p:bgPr>
@@ -2223,7 +3568,7 @@
         </p:nvSpPr>
         <p:spPr>
           <a:xfrm>
-            <a:off x="365760" y="2148840"/>
+            <a:off x="365760" y="2157307"/>
             <a:ext cx="3977640" cy="457200"/>
           </a:xfrm>
           <a:prstGeom prst="rect">
@@ -2650,7 +3995,7 @@
 </p:sld>
 </file>
 
-<file path=ppt/slides/slide11.xml><?xml version="1.0" encoding="utf-8"?>
+<file path=ppt/slides/slide12.xml><?xml version="1.0" encoding="utf-8"?>
 <p:sld xmlns:a="http://schemas.openxmlformats.org/drawingml/2006/main" xmlns:r="http://schemas.openxmlformats.org/officeDocument/2006/relationships" xmlns:p="http://schemas.openxmlformats.org/presentationml/2006/main">
   <p:cSld name="Slide 12">
     <p:bg>
@@ -4063,7 +5408,7 @@
         </p:nvSpPr>
         <p:spPr>
           <a:xfrm>
-            <a:off x="457200" y="1109556"/>
+            <a:off x="457200" y="1097282"/>
             <a:ext cx="4114800" cy="777240"/>
           </a:xfrm>
           <a:prstGeom prst="rect">
@@ -4108,7 +5453,7 @@
         </p:nvSpPr>
         <p:spPr>
           <a:xfrm>
-            <a:off x="457200" y="1109556"/>
+            <a:off x="457200" y="1097282"/>
             <a:ext cx="502920" cy="777240"/>
           </a:xfrm>
           <a:prstGeom prst="rect">
@@ -4146,7 +5491,7 @@
         </p:nvSpPr>
         <p:spPr>
           <a:xfrm>
-            <a:off x="457200" y="1109556"/>
+            <a:off x="457200" y="1097282"/>
             <a:ext cx="502920" cy="777240"/>
           </a:xfrm>
           <a:prstGeom prst="rect">
@@ -4188,7 +5533,7 @@
         </p:nvSpPr>
         <p:spPr>
           <a:xfrm>
-            <a:off x="1051560" y="1109556"/>
+            <a:off x="1051560" y="1097282"/>
             <a:ext cx="3429000" cy="777240"/>
           </a:xfrm>
           <a:prstGeom prst="rect">
@@ -4875,6 +6220,218 @@
           </a:prstGeom>
         </p:spPr>
       </p:pic>
+      <p:sp>
+        <p:nvSpPr>
+          <p:cNvPr id="5" name="Shape 2">
+            <a:extLst>
+              <a:ext uri="{FF2B5EF4-FFF2-40B4-BE49-F238E27FC236}">
+                <a16:creationId xmlns:a16="http://schemas.microsoft.com/office/drawing/2014/main" id="{A75CD7B1-A2D8-D876-F74B-5C89A679D3EC}"/>
+              </a:ext>
+            </a:extLst>
+          </p:cNvPr>
+          <p:cNvSpPr/>
+          <p:nvPr/>
+        </p:nvSpPr>
+        <p:spPr>
+          <a:xfrm>
+            <a:off x="296342" y="2900166"/>
+            <a:ext cx="3818458" cy="1886625"/>
+          </a:xfrm>
+          <a:prstGeom prst="rect">
+            <a:avLst/>
+          </a:prstGeom>
+          <a:solidFill>
+            <a:srgbClr val="112236"/>
+          </a:solidFill>
+          <a:ln w="25400">
+            <a:solidFill>
+              <a:srgbClr val="00D4AA"/>
+            </a:solidFill>
+            <a:prstDash val="solid"/>
+          </a:ln>
+          <a:effectLst>
+            <a:outerShdw blurRad="101600" dist="38100" dir="8100000" algn="bl" rotWithShape="0">
+              <a:srgbClr val="000000">
+                <a:alpha val="18000"/>
+              </a:srgbClr>
+            </a:outerShdw>
+          </a:effectLst>
+        </p:spPr>
+        <p:txBody>
+          <a:bodyPr/>
+          <a:lstStyle/>
+          <a:p>
+            <a:endParaRPr lang="pt-PT"/>
+          </a:p>
+        </p:txBody>
+      </p:sp>
+      <p:sp>
+        <p:nvSpPr>
+          <p:cNvPr id="6" name="Text 3">
+            <a:extLst>
+              <a:ext uri="{FF2B5EF4-FFF2-40B4-BE49-F238E27FC236}">
+                <a16:creationId xmlns:a16="http://schemas.microsoft.com/office/drawing/2014/main" id="{FB855145-09FA-D8FB-D5EE-292359F5E10B}"/>
+              </a:ext>
+            </a:extLst>
+          </p:cNvPr>
+          <p:cNvSpPr/>
+          <p:nvPr/>
+        </p:nvSpPr>
+        <p:spPr>
+          <a:xfrm>
+            <a:off x="457200" y="2986085"/>
+            <a:ext cx="3254644" cy="1696380"/>
+          </a:xfrm>
+          <a:prstGeom prst="rect">
+            <a:avLst/>
+          </a:prstGeom>
+          <a:noFill/>
+          <a:ln/>
+        </p:spPr>
+        <p:txBody>
+          <a:bodyPr wrap="square" rtlCol="0" anchor="ctr"/>
+          <a:lstStyle/>
+          <a:p>
+            <a:r>
+              <a:rPr lang="pt-PT" sz="1400" b="1" dirty="0">
+                <a:solidFill>
+                  <a:schemeClr val="bg1"/>
+                </a:solidFill>
+              </a:rPr>
+              <a:t>Problema sem Temporal</a:t>
+            </a:r>
+          </a:p>
+          <a:p>
+            <a:r>
+              <a:rPr lang="pt-PT" sz="1400" dirty="0">
+                <a:solidFill>
+                  <a:schemeClr val="bg1"/>
+                </a:solidFill>
+              </a:rPr>
+              <a:t>Se o pagamento falhar depois da reserva de stock:</a:t>
+            </a:r>
+          </a:p>
+          <a:p>
+            <a:pPr>
+              <a:buFont typeface="Arial" panose="020B0604020202020204" pitchFamily="34" charset="0"/>
+              <a:buChar char="•"/>
+            </a:pPr>
+            <a:r>
+              <a:rPr lang="pt-PT" sz="1400" dirty="0">
+                <a:solidFill>
+                  <a:schemeClr val="bg1"/>
+                </a:solidFill>
+              </a:rPr>
+              <a:t>o sistema fica num </a:t>
+            </a:r>
+            <a:r>
+              <a:rPr lang="pt-PT" sz="1400" b="1" dirty="0">
+                <a:solidFill>
+                  <a:schemeClr val="bg1"/>
+                </a:solidFill>
+              </a:rPr>
+              <a:t>estado intermédio</a:t>
+            </a:r>
+            <a:r>
+              <a:rPr lang="pt-PT" sz="1400" dirty="0">
+                <a:solidFill>
+                  <a:schemeClr val="bg1"/>
+                </a:solidFill>
+              </a:rPr>
+              <a:t> </a:t>
+            </a:r>
+          </a:p>
+          <a:p>
+            <a:pPr>
+              <a:buFont typeface="Arial" panose="020B0604020202020204" pitchFamily="34" charset="0"/>
+              <a:buChar char="•"/>
+            </a:pPr>
+            <a:r>
+              <a:rPr lang="pt-PT" sz="1400" dirty="0">
+                <a:solidFill>
+                  <a:schemeClr val="bg1"/>
+                </a:solidFill>
+              </a:rPr>
+              <a:t>é preciso decidir entre </a:t>
+            </a:r>
+            <a:r>
+              <a:rPr lang="pt-PT" sz="1400" b="1" dirty="0">
+                <a:solidFill>
+                  <a:schemeClr val="bg1"/>
+                </a:solidFill>
+              </a:rPr>
+              <a:t>retry</a:t>
+            </a:r>
+            <a:r>
+              <a:rPr lang="pt-PT" sz="1400" dirty="0">
+                <a:solidFill>
+                  <a:schemeClr val="bg1"/>
+                </a:solidFill>
+              </a:rPr>
+              <a:t> ou </a:t>
+            </a:r>
+            <a:r>
+              <a:rPr lang="pt-PT" sz="1400" b="1" dirty="0">
+                <a:solidFill>
+                  <a:schemeClr val="bg1"/>
+                </a:solidFill>
+              </a:rPr>
+              <a:t>compensação</a:t>
+            </a:r>
+            <a:r>
+              <a:rPr lang="pt-PT" sz="1400" dirty="0">
+                <a:solidFill>
+                  <a:schemeClr val="bg1"/>
+                </a:solidFill>
+              </a:rPr>
+              <a:t> </a:t>
+            </a:r>
+          </a:p>
+          <a:p>
+            <a:pPr>
+              <a:buFont typeface="Arial" panose="020B0604020202020204" pitchFamily="34" charset="0"/>
+              <a:buChar char="•"/>
+            </a:pPr>
+            <a:r>
+              <a:rPr lang="pt-PT" sz="1400" dirty="0">
+                <a:solidFill>
+                  <a:schemeClr val="bg1"/>
+                </a:solidFill>
+              </a:rPr>
+              <a:t>é necessário evitar </a:t>
+            </a:r>
+            <a:r>
+              <a:rPr lang="pt-PT" sz="1400" b="1" dirty="0">
+                <a:solidFill>
+                  <a:schemeClr val="bg1"/>
+                </a:solidFill>
+              </a:rPr>
+              <a:t>duplicações</a:t>
+            </a:r>
+            <a:r>
+              <a:rPr lang="pt-PT" sz="1400" dirty="0">
+                <a:solidFill>
+                  <a:schemeClr val="bg1"/>
+                </a:solidFill>
+              </a:rPr>
+              <a:t> e saber </a:t>
+            </a:r>
+            <a:r>
+              <a:rPr lang="pt-PT" sz="1400" b="1" dirty="0">
+                <a:solidFill>
+                  <a:schemeClr val="bg1"/>
+                </a:solidFill>
+              </a:rPr>
+              <a:t>onde retomar</a:t>
+            </a:r>
+            <a:endParaRPr lang="pt-PT" sz="1400" dirty="0">
+              <a:solidFill>
+                <a:schemeClr val="bg1"/>
+              </a:solidFill>
+            </a:endParaRPr>
+          </a:p>
+        </p:txBody>
+      </p:sp>
     </p:spTree>
   </p:cSld>
   <p:clrMapOvr>
@@ -4884,6 +6441,499 @@
 </file>
 
 <file path=ppt/slides/slide4.xml><?xml version="1.0" encoding="utf-8"?>
+<p:sld xmlns:a="http://schemas.openxmlformats.org/drawingml/2006/main" xmlns:r="http://schemas.openxmlformats.org/officeDocument/2006/relationships" xmlns:p="http://schemas.openxmlformats.org/presentationml/2006/main">
+  <p:cSld>
+    <p:bg>
+      <p:bgPr>
+        <a:gradFill>
+          <a:gsLst>
+            <a:gs pos="0">
+              <a:schemeClr val="accent3">
+                <a:lumMod val="5000"/>
+                <a:lumOff val="95000"/>
+              </a:schemeClr>
+            </a:gs>
+            <a:gs pos="74000">
+              <a:schemeClr val="accent3">
+                <a:lumMod val="45000"/>
+                <a:lumOff val="55000"/>
+              </a:schemeClr>
+            </a:gs>
+            <a:gs pos="83000">
+              <a:schemeClr val="accent3">
+                <a:lumMod val="45000"/>
+                <a:lumOff val="55000"/>
+              </a:schemeClr>
+            </a:gs>
+            <a:gs pos="100000">
+              <a:schemeClr val="accent3">
+                <a:lumMod val="30000"/>
+                <a:lumOff val="70000"/>
+              </a:schemeClr>
+            </a:gs>
+          </a:gsLst>
+          <a:lin ang="5400000" scaled="1"/>
+        </a:gradFill>
+        <a:effectLst/>
+      </p:bgPr>
+    </p:bg>
+    <p:spTree>
+      <p:nvGrpSpPr>
+        <p:cNvPr id="1" name="">
+          <a:extLst>
+            <a:ext uri="{FF2B5EF4-FFF2-40B4-BE49-F238E27FC236}">
+              <a16:creationId xmlns:a16="http://schemas.microsoft.com/office/drawing/2014/main" id="{CC3F1EAA-D0AD-6646-40E2-1886C702A1E5}"/>
+            </a:ext>
+          </a:extLst>
+        </p:cNvPr>
+        <p:cNvGrpSpPr/>
+        <p:nvPr/>
+      </p:nvGrpSpPr>
+      <p:grpSpPr>
+        <a:xfrm>
+          <a:off x="0" y="0"/>
+          <a:ext cx="0" cy="0"/>
+          <a:chOff x="0" y="0"/>
+          <a:chExt cx="0" cy="0"/>
+        </a:xfrm>
+      </p:grpSpPr>
+      <p:sp>
+        <p:nvSpPr>
+          <p:cNvPr id="2" name="Shape 0">
+            <a:extLst>
+              <a:ext uri="{FF2B5EF4-FFF2-40B4-BE49-F238E27FC236}">
+                <a16:creationId xmlns:a16="http://schemas.microsoft.com/office/drawing/2014/main" id="{ED8C9ED9-A036-D733-7F14-4EF10CEE4D8C}"/>
+              </a:ext>
+            </a:extLst>
+          </p:cNvPr>
+          <p:cNvSpPr/>
+          <p:nvPr/>
+        </p:nvSpPr>
+        <p:spPr>
+          <a:xfrm>
+            <a:off x="0" y="0"/>
+            <a:ext cx="9144000" cy="822960"/>
+          </a:xfrm>
+          <a:prstGeom prst="rect">
+            <a:avLst/>
+          </a:prstGeom>
+          <a:solidFill>
+            <a:srgbClr val="1B6CA8"/>
+          </a:solidFill>
+          <a:ln w="12700">
+            <a:solidFill>
+              <a:srgbClr val="1B6CA8"/>
+            </a:solidFill>
+            <a:prstDash val="solid"/>
+          </a:ln>
+        </p:spPr>
+        <p:txBody>
+          <a:bodyPr/>
+          <a:lstStyle/>
+          <a:p>
+            <a:endParaRPr lang="pt-PT"/>
+          </a:p>
+        </p:txBody>
+      </p:sp>
+      <p:sp>
+        <p:nvSpPr>
+          <p:cNvPr id="3" name="Text 1">
+            <a:extLst>
+              <a:ext uri="{FF2B5EF4-FFF2-40B4-BE49-F238E27FC236}">
+                <a16:creationId xmlns:a16="http://schemas.microsoft.com/office/drawing/2014/main" id="{7F29BEB5-FF40-92AE-F496-5A611B310339}"/>
+              </a:ext>
+            </a:extLst>
+          </p:cNvPr>
+          <p:cNvSpPr/>
+          <p:nvPr/>
+        </p:nvSpPr>
+        <p:spPr>
+          <a:xfrm>
+            <a:off x="457200" y="0"/>
+            <a:ext cx="8229600" cy="822960"/>
+          </a:xfrm>
+          <a:prstGeom prst="rect">
+            <a:avLst/>
+          </a:prstGeom>
+          <a:noFill/>
+          <a:ln/>
+        </p:spPr>
+        <p:txBody>
+          <a:bodyPr wrap="square" lIns="0" tIns="0" rIns="0" bIns="0" rtlCol="0" anchor="ctr"/>
+          <a:lstStyle/>
+          <a:p>
+            <a:pPr marL="0" indent="0">
+              <a:buNone/>
+            </a:pPr>
+            <a:r>
+              <a:rPr lang="en-US" sz="2400" b="1" dirty="0">
+                <a:solidFill>
+                  <a:srgbClr val="FFFFFF"/>
+                </a:solidFill>
+              </a:rPr>
+              <a:t>01  /  </a:t>
+            </a:r>
+            <a:r>
+              <a:rPr lang="en-US" sz="2400" b="1" dirty="0" err="1">
+                <a:solidFill>
+                  <a:srgbClr val="FFFFFF"/>
+                </a:solidFill>
+              </a:rPr>
+              <a:t>Problema</a:t>
+            </a:r>
+            <a:r>
+              <a:rPr lang="en-US" sz="2400" b="1" dirty="0">
+                <a:solidFill>
+                  <a:srgbClr val="FFFFFF"/>
+                </a:solidFill>
+              </a:rPr>
+              <a:t> real </a:t>
+            </a:r>
+            <a:r>
+              <a:rPr lang="en-US" sz="2400" b="1" dirty="0" err="1">
+                <a:solidFill>
+                  <a:srgbClr val="FFFFFF"/>
+                </a:solidFill>
+              </a:rPr>
+              <a:t>nos</a:t>
+            </a:r>
+            <a:r>
+              <a:rPr lang="en-US" sz="2400" b="1" dirty="0">
+                <a:solidFill>
+                  <a:srgbClr val="FFFFFF"/>
+                </a:solidFill>
+              </a:rPr>
+              <a:t> </a:t>
+            </a:r>
+            <a:r>
+              <a:rPr lang="en-US" sz="2400" b="1" dirty="0" err="1">
+                <a:solidFill>
+                  <a:srgbClr val="FFFFFF"/>
+                </a:solidFill>
+              </a:rPr>
+              <a:t>microservicos</a:t>
+            </a:r>
+            <a:endParaRPr lang="en-US" sz="2400" dirty="0"/>
+          </a:p>
+        </p:txBody>
+      </p:sp>
+      <p:pic>
+        <p:nvPicPr>
+          <p:cNvPr id="17" name="Imagem 16">
+            <a:extLst>
+              <a:ext uri="{FF2B5EF4-FFF2-40B4-BE49-F238E27FC236}">
+                <a16:creationId xmlns:a16="http://schemas.microsoft.com/office/drawing/2014/main" id="{CA13B47F-8135-EB99-0CED-53077771A4FA}"/>
+              </a:ext>
+            </a:extLst>
+          </p:cNvPr>
+          <p:cNvPicPr>
+            <a:picLocks noChangeAspect="1"/>
+          </p:cNvPicPr>
+          <p:nvPr/>
+        </p:nvPicPr>
+        <p:blipFill>
+          <a:blip r:embed="rId3"/>
+          <a:stretch>
+            <a:fillRect/>
+          </a:stretch>
+        </p:blipFill>
+        <p:spPr>
+          <a:xfrm>
+            <a:off x="4572000" y="1029778"/>
+            <a:ext cx="4347835" cy="3491101"/>
+          </a:xfrm>
+          <a:prstGeom prst="rect">
+            <a:avLst/>
+          </a:prstGeom>
+        </p:spPr>
+      </p:pic>
+      <p:sp>
+        <p:nvSpPr>
+          <p:cNvPr id="4" name="Shape 3">
+            <a:extLst>
+              <a:ext uri="{FF2B5EF4-FFF2-40B4-BE49-F238E27FC236}">
+                <a16:creationId xmlns:a16="http://schemas.microsoft.com/office/drawing/2014/main" id="{8887D62C-15A8-6734-3362-F493B5DF38B7}"/>
+              </a:ext>
+            </a:extLst>
+          </p:cNvPr>
+          <p:cNvSpPr/>
+          <p:nvPr/>
+        </p:nvSpPr>
+        <p:spPr>
+          <a:xfrm>
+            <a:off x="296342" y="1029778"/>
+            <a:ext cx="3818458" cy="457200"/>
+          </a:xfrm>
+          <a:prstGeom prst="rect">
+            <a:avLst/>
+          </a:prstGeom>
+          <a:solidFill>
+            <a:srgbClr val="00D4AA"/>
+          </a:solidFill>
+          <a:ln w="12700">
+            <a:solidFill>
+              <a:srgbClr val="00D4AA"/>
+            </a:solidFill>
+            <a:prstDash val="solid"/>
+          </a:ln>
+        </p:spPr>
+        <p:txBody>
+          <a:bodyPr/>
+          <a:lstStyle/>
+          <a:p>
+            <a:endParaRPr lang="pt-PT" dirty="0"/>
+          </a:p>
+        </p:txBody>
+      </p:sp>
+      <p:sp>
+        <p:nvSpPr>
+          <p:cNvPr id="5" name="CaixaDeTexto 4">
+            <a:extLst>
+              <a:ext uri="{FF2B5EF4-FFF2-40B4-BE49-F238E27FC236}">
+                <a16:creationId xmlns:a16="http://schemas.microsoft.com/office/drawing/2014/main" id="{12B878AB-42D1-0FD3-F2F8-62288356B5A2}"/>
+              </a:ext>
+            </a:extLst>
+          </p:cNvPr>
+          <p:cNvSpPr txBox="1"/>
+          <p:nvPr/>
+        </p:nvSpPr>
+        <p:spPr>
+          <a:xfrm>
+            <a:off x="400580" y="1091240"/>
+            <a:ext cx="3518863" cy="307777"/>
+          </a:xfrm>
+          <a:prstGeom prst="rect">
+            <a:avLst/>
+          </a:prstGeom>
+          <a:noFill/>
+        </p:spPr>
+        <p:txBody>
+          <a:bodyPr wrap="square">
+            <a:spAutoFit/>
+          </a:bodyPr>
+          <a:lstStyle/>
+          <a:p>
+            <a:r>
+              <a:rPr lang="en-US" sz="1400" b="1" dirty="0">
+                <a:solidFill>
+                  <a:srgbClr val="0D1B2A"/>
+                </a:solidFill>
+              </a:rPr>
+              <a:t>Caso de </a:t>
+            </a:r>
+            <a:r>
+              <a:rPr lang="en-US" sz="1400" b="1" dirty="0" err="1">
+                <a:solidFill>
+                  <a:srgbClr val="0D1B2A"/>
+                </a:solidFill>
+              </a:rPr>
+              <a:t>Uso</a:t>
+            </a:r>
+            <a:r>
+              <a:rPr lang="pt-PT" sz="1400" dirty="0"/>
+              <a:t> </a:t>
+            </a:r>
+            <a:r>
+              <a:rPr lang="en-US" sz="1400" b="1" dirty="0">
+                <a:solidFill>
+                  <a:srgbClr val="0D1B2A"/>
+                </a:solidFill>
+              </a:rPr>
+              <a:t>– </a:t>
+            </a:r>
+            <a:r>
+              <a:rPr lang="en-US" sz="1400" b="1" dirty="0" err="1">
+                <a:solidFill>
+                  <a:srgbClr val="0D1B2A"/>
+                </a:solidFill>
+              </a:rPr>
+              <a:t>Pagamento</a:t>
+            </a:r>
+            <a:r>
+              <a:rPr lang="en-US" sz="1400" b="1" dirty="0">
+                <a:solidFill>
+                  <a:srgbClr val="0D1B2A"/>
+                </a:solidFill>
+              </a:rPr>
+              <a:t> </a:t>
+            </a:r>
+            <a:r>
+              <a:rPr lang="en-US" sz="1400" b="1" dirty="0" err="1">
+                <a:solidFill>
+                  <a:srgbClr val="0D1B2A"/>
+                </a:solidFill>
+              </a:rPr>
+              <a:t>Encomenda</a:t>
+            </a:r>
+            <a:r>
+              <a:rPr lang="en-US" sz="1400" b="1" dirty="0">
+                <a:solidFill>
+                  <a:srgbClr val="0D1B2A"/>
+                </a:solidFill>
+              </a:rPr>
+              <a:t> / Saga</a:t>
+            </a:r>
+            <a:endParaRPr lang="pt-PT" sz="1400" dirty="0"/>
+          </a:p>
+        </p:txBody>
+      </p:sp>
+      <p:sp>
+        <p:nvSpPr>
+          <p:cNvPr id="6" name="Shape 2">
+            <a:extLst>
+              <a:ext uri="{FF2B5EF4-FFF2-40B4-BE49-F238E27FC236}">
+                <a16:creationId xmlns:a16="http://schemas.microsoft.com/office/drawing/2014/main" id="{2B4AD246-C258-A354-C339-66A7DF4E2433}"/>
+              </a:ext>
+            </a:extLst>
+          </p:cNvPr>
+          <p:cNvSpPr/>
+          <p:nvPr/>
+        </p:nvSpPr>
+        <p:spPr>
+          <a:xfrm>
+            <a:off x="296342" y="1488239"/>
+            <a:ext cx="3818458" cy="1868652"/>
+          </a:xfrm>
+          <a:prstGeom prst="rect">
+            <a:avLst/>
+          </a:prstGeom>
+          <a:solidFill>
+            <a:srgbClr val="112236"/>
+          </a:solidFill>
+          <a:ln w="25400">
+            <a:solidFill>
+              <a:srgbClr val="00D4AA"/>
+            </a:solidFill>
+            <a:prstDash val="solid"/>
+          </a:ln>
+          <a:effectLst>
+            <a:outerShdw blurRad="101600" dist="38100" dir="8100000" algn="bl" rotWithShape="0">
+              <a:srgbClr val="000000">
+                <a:alpha val="18000"/>
+              </a:srgbClr>
+            </a:outerShdw>
+          </a:effectLst>
+        </p:spPr>
+        <p:txBody>
+          <a:bodyPr/>
+          <a:lstStyle/>
+          <a:p>
+            <a:endParaRPr lang="pt-PT"/>
+          </a:p>
+        </p:txBody>
+      </p:sp>
+      <p:sp>
+        <p:nvSpPr>
+          <p:cNvPr id="7" name="Text 3">
+            <a:extLst>
+              <a:ext uri="{FF2B5EF4-FFF2-40B4-BE49-F238E27FC236}">
+                <a16:creationId xmlns:a16="http://schemas.microsoft.com/office/drawing/2014/main" id="{5737D986-4144-A67D-5611-18C3320C8B41}"/>
+              </a:ext>
+            </a:extLst>
+          </p:cNvPr>
+          <p:cNvSpPr/>
+          <p:nvPr/>
+        </p:nvSpPr>
+        <p:spPr>
+          <a:xfrm>
+            <a:off x="457200" y="1546302"/>
+            <a:ext cx="3254644" cy="1663304"/>
+          </a:xfrm>
+          <a:prstGeom prst="rect">
+            <a:avLst/>
+          </a:prstGeom>
+          <a:noFill/>
+          <a:ln/>
+        </p:spPr>
+        <p:txBody>
+          <a:bodyPr wrap="square" rtlCol="0" anchor="ctr"/>
+          <a:lstStyle/>
+          <a:p>
+            <a:r>
+              <a:rPr lang="pt-PT" sz="1400" b="1" dirty="0">
+                <a:solidFill>
+                  <a:schemeClr val="bg1"/>
+                </a:solidFill>
+              </a:rPr>
+              <a:t>Com Temporal</a:t>
+            </a:r>
+          </a:p>
+          <a:p>
+            <a:r>
+              <a:rPr lang="pt-PT" sz="1400" dirty="0">
+                <a:solidFill>
+                  <a:schemeClr val="bg1"/>
+                </a:solidFill>
+              </a:rPr>
+              <a:t>O workflow é persistido automaticamente e pode:</a:t>
+            </a:r>
+          </a:p>
+          <a:p>
+            <a:pPr>
+              <a:buFont typeface="Arial" panose="020B0604020202020204" pitchFamily="34" charset="0"/>
+              <a:buChar char="•"/>
+            </a:pPr>
+            <a:r>
+              <a:rPr lang="pt-PT" sz="1400" dirty="0" err="1">
+                <a:solidFill>
+                  <a:schemeClr val="bg1"/>
+                </a:solidFill>
+              </a:rPr>
+              <a:t>retentar</a:t>
+            </a:r>
+            <a:r>
+              <a:rPr lang="pt-PT" sz="1400" dirty="0">
+                <a:solidFill>
+                  <a:schemeClr val="bg1"/>
+                </a:solidFill>
+              </a:rPr>
+              <a:t> falhas transitórias </a:t>
+            </a:r>
+          </a:p>
+          <a:p>
+            <a:pPr>
+              <a:buFont typeface="Arial" panose="020B0604020202020204" pitchFamily="34" charset="0"/>
+              <a:buChar char="•"/>
+            </a:pPr>
+            <a:r>
+              <a:rPr lang="pt-PT" sz="1400" dirty="0">
+                <a:solidFill>
+                  <a:schemeClr val="bg1"/>
+                </a:solidFill>
+              </a:rPr>
+              <a:t>falhar de forma controlada em erros de negócio </a:t>
+            </a:r>
+          </a:p>
+          <a:p>
+            <a:pPr>
+              <a:buFont typeface="Arial" panose="020B0604020202020204" pitchFamily="34" charset="0"/>
+              <a:buChar char="•"/>
+            </a:pPr>
+            <a:r>
+              <a:rPr lang="pt-PT" sz="1400" dirty="0">
+                <a:solidFill>
+                  <a:schemeClr val="bg1"/>
+                </a:solidFill>
+              </a:rPr>
+              <a:t>continuar do ponto certo com base no histórico</a:t>
+            </a:r>
+          </a:p>
+        </p:txBody>
+      </p:sp>
+    </p:spTree>
+    <p:extLst>
+      <p:ext uri="{BB962C8B-B14F-4D97-AF65-F5344CB8AC3E}">
+        <p14:creationId xmlns:p14="http://schemas.microsoft.com/office/powerpoint/2010/main" val="3225558161"/>
+      </p:ext>
+    </p:extLst>
+  </p:cSld>
+  <p:clrMapOvr>
+    <a:masterClrMapping/>
+  </p:clrMapOvr>
+</p:sld>
+</file>
+
+<file path=ppt/slides/slide5.xml><?xml version="1.0" encoding="utf-8"?>
 <p:sld xmlns:a="http://schemas.openxmlformats.org/drawingml/2006/main" xmlns:r="http://schemas.openxmlformats.org/officeDocument/2006/relationships" xmlns:p="http://schemas.openxmlformats.org/presentationml/2006/main">
   <p:cSld>
     <p:bg>
@@ -5918,7 +7968,7 @@
 </p:sld>
 </file>
 
-<file path=ppt/slides/slide5.xml><?xml version="1.0" encoding="utf-8"?>
+<file path=ppt/slides/slide6.xml><?xml version="1.0" encoding="utf-8"?>
 <p:sld xmlns:a="http://schemas.openxmlformats.org/drawingml/2006/main" xmlns:r="http://schemas.openxmlformats.org/officeDocument/2006/relationships" xmlns:p="http://schemas.openxmlformats.org/presentationml/2006/main">
   <p:cSld name="Slide 4">
     <p:bg>
@@ -6711,7 +8761,7 @@
 </p:sld>
 </file>
 
-<file path=ppt/slides/slide6.xml><?xml version="1.0" encoding="utf-8"?>
+<file path=ppt/slides/slide7.xml><?xml version="1.0" encoding="utf-8"?>
 <p:sld xmlns:a="http://schemas.openxmlformats.org/drawingml/2006/main" xmlns:r="http://schemas.openxmlformats.org/officeDocument/2006/relationships" xmlns:p="http://schemas.openxmlformats.org/presentationml/2006/main">
   <p:cSld name="Slide 5">
     <p:bg>
@@ -7360,7 +9410,7 @@
 </p:sld>
 </file>
 
-<file path=ppt/slides/slide7.xml><?xml version="1.0" encoding="utf-8"?>
+<file path=ppt/slides/slide8.xml><?xml version="1.0" encoding="utf-8"?>
 <p:sld xmlns:a="http://schemas.openxmlformats.org/drawingml/2006/main" xmlns:r="http://schemas.openxmlformats.org/officeDocument/2006/relationships" xmlns:p="http://schemas.openxmlformats.org/presentationml/2006/main">
   <p:cSld name="Slide 6">
     <p:bg>
@@ -9098,7 +11148,7 @@
 </p:sld>
 </file>
 
-<file path=ppt/slides/slide8.xml><?xml version="1.0" encoding="utf-8"?>
+<file path=ppt/slides/slide9.xml><?xml version="1.0" encoding="utf-8"?>
 <p:sld xmlns:a="http://schemas.openxmlformats.org/drawingml/2006/main" xmlns:r="http://schemas.openxmlformats.org/officeDocument/2006/relationships" xmlns:p="http://schemas.openxmlformats.org/presentationml/2006/main">
   <p:cSld name="Slide 9">
     <p:bg>
@@ -10090,1242 +12140,6 @@
           <a:xfrm flipH="1">
             <a:off x="7198298" y="2447097"/>
             <a:ext cx="4" cy="300820"/>
-          </a:xfrm>
-          <a:prstGeom prst="straightConnector1">
-            <a:avLst/>
-          </a:prstGeom>
-          <a:ln w="19050">
-            <a:solidFill>
-              <a:schemeClr val="tx1"/>
-            </a:solidFill>
-            <a:tailEnd type="triangle"/>
-          </a:ln>
-        </p:spPr>
-        <p:style>
-          <a:lnRef idx="1">
-            <a:schemeClr val="accent1"/>
-          </a:lnRef>
-          <a:fillRef idx="0">
-            <a:schemeClr val="accent1"/>
-          </a:fillRef>
-          <a:effectRef idx="0">
-            <a:schemeClr val="accent1"/>
-          </a:effectRef>
-          <a:fontRef idx="minor">
-            <a:schemeClr val="tx1"/>
-          </a:fontRef>
-        </p:style>
-      </p:cxnSp>
-    </p:spTree>
-  </p:cSld>
-  <p:clrMapOvr>
-    <a:masterClrMapping/>
-  </p:clrMapOvr>
-</p:sld>
-</file>
-
-<file path=ppt/slides/slide9.xml><?xml version="1.0" encoding="utf-8"?>
-<p:sld xmlns:a="http://schemas.openxmlformats.org/drawingml/2006/main" xmlns:r="http://schemas.openxmlformats.org/officeDocument/2006/relationships" xmlns:p="http://schemas.openxmlformats.org/presentationml/2006/main">
-  <p:cSld name="Slide 10">
-    <p:bg>
-      <p:bgPr>
-        <a:gradFill>
-          <a:gsLst>
-            <a:gs pos="0">
-              <a:schemeClr val="accent3">
-                <a:lumMod val="5000"/>
-                <a:lumOff val="95000"/>
-              </a:schemeClr>
-            </a:gs>
-            <a:gs pos="74000">
-              <a:schemeClr val="accent3">
-                <a:lumMod val="45000"/>
-                <a:lumOff val="55000"/>
-              </a:schemeClr>
-            </a:gs>
-            <a:gs pos="83000">
-              <a:schemeClr val="accent3">
-                <a:lumMod val="45000"/>
-                <a:lumOff val="55000"/>
-              </a:schemeClr>
-            </a:gs>
-            <a:gs pos="100000">
-              <a:schemeClr val="accent3">
-                <a:lumMod val="30000"/>
-                <a:lumOff val="70000"/>
-              </a:schemeClr>
-            </a:gs>
-          </a:gsLst>
-          <a:lin ang="5400000" scaled="1"/>
-        </a:gradFill>
-        <a:effectLst/>
-      </p:bgPr>
-    </p:bg>
-    <p:spTree>
-      <p:nvGrpSpPr>
-        <p:cNvPr id="1" name=""/>
-        <p:cNvGrpSpPr/>
-        <p:nvPr/>
-      </p:nvGrpSpPr>
-      <p:grpSpPr>
-        <a:xfrm>
-          <a:off x="0" y="0"/>
-          <a:ext cx="0" cy="0"/>
-          <a:chOff x="0" y="0"/>
-          <a:chExt cx="0" cy="0"/>
-        </a:xfrm>
-      </p:grpSpPr>
-      <p:sp>
-        <p:nvSpPr>
-          <p:cNvPr id="2" name="Shape 0"/>
-          <p:cNvSpPr/>
-          <p:nvPr/>
-        </p:nvSpPr>
-        <p:spPr>
-          <a:xfrm>
-            <a:off x="0" y="0"/>
-            <a:ext cx="9144000" cy="822960"/>
-          </a:xfrm>
-          <a:prstGeom prst="rect">
-            <a:avLst/>
-          </a:prstGeom>
-          <a:solidFill>
-            <a:srgbClr val="1B6CA8"/>
-          </a:solidFill>
-          <a:ln w="12700">
-            <a:solidFill>
-              <a:srgbClr val="1B6CA8"/>
-            </a:solidFill>
-            <a:prstDash val="solid"/>
-          </a:ln>
-        </p:spPr>
-        <p:txBody>
-          <a:bodyPr/>
-          <a:lstStyle/>
-          <a:p>
-            <a:endParaRPr lang="pt-PT"/>
-          </a:p>
-        </p:txBody>
-      </p:sp>
-      <p:sp>
-        <p:nvSpPr>
-          <p:cNvPr id="3" name="Text 1"/>
-          <p:cNvSpPr/>
-          <p:nvPr/>
-        </p:nvSpPr>
-        <p:spPr>
-          <a:xfrm>
-            <a:off x="457200" y="0"/>
-            <a:ext cx="8229600" cy="822960"/>
-          </a:xfrm>
-          <a:prstGeom prst="rect">
-            <a:avLst/>
-          </a:prstGeom>
-          <a:noFill/>
-          <a:ln/>
-        </p:spPr>
-        <p:txBody>
-          <a:bodyPr wrap="square" lIns="0" tIns="0" rIns="0" bIns="0" rtlCol="0" anchor="ctr"/>
-          <a:lstStyle/>
-          <a:p>
-            <a:pPr marL="0" indent="0">
-              <a:buNone/>
-            </a:pPr>
-            <a:r>
-              <a:rPr lang="en-US" sz="2400" b="1" dirty="0">
-                <a:solidFill>
-                  <a:srgbClr val="FFFFFF"/>
-                </a:solidFill>
-              </a:rPr>
-              <a:t>07  /  Fluxo de Execução</a:t>
-            </a:r>
-            <a:endParaRPr lang="en-US" sz="2400" dirty="0"/>
-          </a:p>
-        </p:txBody>
-      </p:sp>
-      <p:sp>
-        <p:nvSpPr>
-          <p:cNvPr id="4" name="Shape 2"/>
-          <p:cNvSpPr/>
-          <p:nvPr/>
-        </p:nvSpPr>
-        <p:spPr>
-          <a:xfrm>
-            <a:off x="274320" y="1005840"/>
-            <a:ext cx="2743200" cy="1325880"/>
-          </a:xfrm>
-          <a:prstGeom prst="rect">
-            <a:avLst/>
-          </a:prstGeom>
-          <a:solidFill>
-            <a:srgbClr val="112236"/>
-          </a:solidFill>
-          <a:ln w="19050">
-            <a:solidFill>
-              <a:srgbClr val="2D9CDB"/>
-            </a:solidFill>
-            <a:prstDash val="solid"/>
-          </a:ln>
-          <a:effectLst>
-            <a:outerShdw blurRad="101600" dist="38100" dir="8100000" algn="bl" rotWithShape="0">
-              <a:srgbClr val="000000">
-                <a:alpha val="18000"/>
-              </a:srgbClr>
-            </a:outerShdw>
-          </a:effectLst>
-        </p:spPr>
-        <p:txBody>
-          <a:bodyPr/>
-          <a:lstStyle/>
-          <a:p>
-            <a:endParaRPr lang="pt-PT"/>
-          </a:p>
-        </p:txBody>
-      </p:sp>
-      <p:sp>
-        <p:nvSpPr>
-          <p:cNvPr id="5" name="Shape 3"/>
-          <p:cNvSpPr/>
-          <p:nvPr/>
-        </p:nvSpPr>
-        <p:spPr>
-          <a:xfrm>
-            <a:off x="365760" y="1097280"/>
-            <a:ext cx="502920" cy="502920"/>
-          </a:xfrm>
-          <a:prstGeom prst="ellipse">
-            <a:avLst/>
-          </a:prstGeom>
-          <a:solidFill>
-            <a:srgbClr val="2D9CDB"/>
-          </a:solidFill>
-          <a:ln w="12700">
-            <a:solidFill>
-              <a:srgbClr val="2D9CDB"/>
-            </a:solidFill>
-            <a:prstDash val="solid"/>
-          </a:ln>
-        </p:spPr>
-        <p:txBody>
-          <a:bodyPr/>
-          <a:lstStyle/>
-          <a:p>
-            <a:endParaRPr lang="pt-PT"/>
-          </a:p>
-        </p:txBody>
-      </p:sp>
-      <p:sp>
-        <p:nvSpPr>
-          <p:cNvPr id="6" name="Text 4"/>
-          <p:cNvSpPr/>
-          <p:nvPr/>
-        </p:nvSpPr>
-        <p:spPr>
-          <a:xfrm>
-            <a:off x="365760" y="1097280"/>
-            <a:ext cx="502920" cy="502920"/>
-          </a:xfrm>
-          <a:prstGeom prst="rect">
-            <a:avLst/>
-          </a:prstGeom>
-          <a:noFill/>
-          <a:ln/>
-        </p:spPr>
-        <p:txBody>
-          <a:bodyPr wrap="square" lIns="0" tIns="0" rIns="0" bIns="0" rtlCol="0" anchor="ctr"/>
-          <a:lstStyle/>
-          <a:p>
-            <a:pPr marL="0" indent="0" algn="ctr">
-              <a:buNone/>
-            </a:pPr>
-            <a:r>
-              <a:rPr lang="en-US" sz="1600" b="1" dirty="0">
-                <a:solidFill>
-                  <a:srgbClr val="0D1B2A"/>
-                </a:solidFill>
-              </a:rPr>
-              <a:t>1</a:t>
-            </a:r>
-            <a:endParaRPr lang="en-US" sz="1600" dirty="0"/>
-          </a:p>
-        </p:txBody>
-      </p:sp>
-      <p:sp>
-        <p:nvSpPr>
-          <p:cNvPr id="7" name="Text 5"/>
-          <p:cNvSpPr/>
-          <p:nvPr/>
-        </p:nvSpPr>
-        <p:spPr>
-          <a:xfrm>
-            <a:off x="960120" y="1078992"/>
-            <a:ext cx="1965960" cy="1097280"/>
-          </a:xfrm>
-          <a:prstGeom prst="rect">
-            <a:avLst/>
-          </a:prstGeom>
-          <a:noFill/>
-          <a:ln/>
-        </p:spPr>
-        <p:txBody>
-          <a:bodyPr wrap="square" rtlCol="0" anchor="ctr"/>
-          <a:lstStyle/>
-          <a:p>
-            <a:pPr marL="0" indent="0">
-              <a:buNone/>
-            </a:pPr>
-            <a:r>
-              <a:rPr lang="en-US" sz="1200" dirty="0">
-                <a:solidFill>
-                  <a:srgbClr val="FFFFFF"/>
-                </a:solidFill>
-              </a:rPr>
-              <a:t>Client inicia o workflow</a:t>
-            </a:r>
-            <a:endParaRPr lang="en-US" sz="1200" dirty="0"/>
-          </a:p>
-        </p:txBody>
-      </p:sp>
-      <p:sp>
-        <p:nvSpPr>
-          <p:cNvPr id="9" name="Shape 7"/>
-          <p:cNvSpPr/>
-          <p:nvPr/>
-        </p:nvSpPr>
-        <p:spPr>
-          <a:xfrm>
-            <a:off x="3200400" y="1005840"/>
-            <a:ext cx="2743200" cy="1325880"/>
-          </a:xfrm>
-          <a:prstGeom prst="rect">
-            <a:avLst/>
-          </a:prstGeom>
-          <a:solidFill>
-            <a:srgbClr val="112236"/>
-          </a:solidFill>
-          <a:ln w="19050">
-            <a:solidFill>
-              <a:srgbClr val="1B6CA8"/>
-            </a:solidFill>
-            <a:prstDash val="solid"/>
-          </a:ln>
-          <a:effectLst>
-            <a:outerShdw blurRad="101600" dist="38100" dir="8100000" algn="bl" rotWithShape="0">
-              <a:srgbClr val="000000">
-                <a:alpha val="18000"/>
-              </a:srgbClr>
-            </a:outerShdw>
-          </a:effectLst>
-        </p:spPr>
-        <p:txBody>
-          <a:bodyPr/>
-          <a:lstStyle/>
-          <a:p>
-            <a:endParaRPr lang="pt-PT"/>
-          </a:p>
-        </p:txBody>
-      </p:sp>
-      <p:sp>
-        <p:nvSpPr>
-          <p:cNvPr id="10" name="Shape 8"/>
-          <p:cNvSpPr/>
-          <p:nvPr/>
-        </p:nvSpPr>
-        <p:spPr>
-          <a:xfrm>
-            <a:off x="3291840" y="1097280"/>
-            <a:ext cx="502920" cy="502920"/>
-          </a:xfrm>
-          <a:prstGeom prst="ellipse">
-            <a:avLst/>
-          </a:prstGeom>
-          <a:solidFill>
-            <a:srgbClr val="1B6CA8"/>
-          </a:solidFill>
-          <a:ln w="12700">
-            <a:solidFill>
-              <a:srgbClr val="1B6CA8"/>
-            </a:solidFill>
-            <a:prstDash val="solid"/>
-          </a:ln>
-        </p:spPr>
-        <p:txBody>
-          <a:bodyPr/>
-          <a:lstStyle/>
-          <a:p>
-            <a:endParaRPr lang="pt-PT"/>
-          </a:p>
-        </p:txBody>
-      </p:sp>
-      <p:sp>
-        <p:nvSpPr>
-          <p:cNvPr id="11" name="Text 9"/>
-          <p:cNvSpPr/>
-          <p:nvPr/>
-        </p:nvSpPr>
-        <p:spPr>
-          <a:xfrm>
-            <a:off x="3291840" y="1097280"/>
-            <a:ext cx="502920" cy="502920"/>
-          </a:xfrm>
-          <a:prstGeom prst="rect">
-            <a:avLst/>
-          </a:prstGeom>
-          <a:noFill/>
-          <a:ln/>
-        </p:spPr>
-        <p:txBody>
-          <a:bodyPr wrap="square" lIns="0" tIns="0" rIns="0" bIns="0" rtlCol="0" anchor="ctr"/>
-          <a:lstStyle/>
-          <a:p>
-            <a:pPr marL="0" indent="0" algn="ctr">
-              <a:buNone/>
-            </a:pPr>
-            <a:r>
-              <a:rPr lang="en-US" sz="1600" b="1" dirty="0">
-                <a:solidFill>
-                  <a:srgbClr val="0D1B2A"/>
-                </a:solidFill>
-              </a:rPr>
-              <a:t>2</a:t>
-            </a:r>
-            <a:endParaRPr lang="en-US" sz="1600" dirty="0"/>
-          </a:p>
-        </p:txBody>
-      </p:sp>
-      <p:sp>
-        <p:nvSpPr>
-          <p:cNvPr id="12" name="Text 10"/>
-          <p:cNvSpPr/>
-          <p:nvPr/>
-        </p:nvSpPr>
-        <p:spPr>
-          <a:xfrm>
-            <a:off x="3886200" y="1078992"/>
-            <a:ext cx="1965960" cy="1097280"/>
-          </a:xfrm>
-          <a:prstGeom prst="rect">
-            <a:avLst/>
-          </a:prstGeom>
-          <a:noFill/>
-          <a:ln/>
-        </p:spPr>
-        <p:txBody>
-          <a:bodyPr wrap="square" rtlCol="0" anchor="ctr"/>
-          <a:lstStyle/>
-          <a:p>
-            <a:pPr marL="0" indent="0">
-              <a:buNone/>
-            </a:pPr>
-            <a:r>
-              <a:rPr lang="en-US" sz="1200" dirty="0">
-                <a:solidFill>
-                  <a:srgbClr val="FFFFFF"/>
-                </a:solidFill>
-              </a:rPr>
-              <a:t>Temporal Service regista o evento</a:t>
-            </a:r>
-            <a:endParaRPr lang="en-US" sz="1200" dirty="0"/>
-          </a:p>
-        </p:txBody>
-      </p:sp>
-      <p:sp>
-        <p:nvSpPr>
-          <p:cNvPr id="14" name="Shape 12"/>
-          <p:cNvSpPr/>
-          <p:nvPr/>
-        </p:nvSpPr>
-        <p:spPr>
-          <a:xfrm>
-            <a:off x="6126480" y="1005840"/>
-            <a:ext cx="2743200" cy="1325880"/>
-          </a:xfrm>
-          <a:prstGeom prst="rect">
-            <a:avLst/>
-          </a:prstGeom>
-          <a:solidFill>
-            <a:srgbClr val="112236"/>
-          </a:solidFill>
-          <a:ln w="19050">
-            <a:solidFill>
-              <a:srgbClr val="9B59B6"/>
-            </a:solidFill>
-            <a:prstDash val="solid"/>
-          </a:ln>
-          <a:effectLst>
-            <a:outerShdw blurRad="101600" dist="38100" dir="8100000" algn="bl" rotWithShape="0">
-              <a:srgbClr val="000000">
-                <a:alpha val="18000"/>
-              </a:srgbClr>
-            </a:outerShdw>
-          </a:effectLst>
-        </p:spPr>
-        <p:txBody>
-          <a:bodyPr/>
-          <a:lstStyle/>
-          <a:p>
-            <a:endParaRPr lang="pt-PT"/>
-          </a:p>
-        </p:txBody>
-      </p:sp>
-      <p:sp>
-        <p:nvSpPr>
-          <p:cNvPr id="15" name="Shape 13"/>
-          <p:cNvSpPr/>
-          <p:nvPr/>
-        </p:nvSpPr>
-        <p:spPr>
-          <a:xfrm>
-            <a:off x="6217920" y="1097280"/>
-            <a:ext cx="502920" cy="502920"/>
-          </a:xfrm>
-          <a:prstGeom prst="ellipse">
-            <a:avLst/>
-          </a:prstGeom>
-          <a:solidFill>
-            <a:srgbClr val="9B59B6"/>
-          </a:solidFill>
-          <a:ln w="12700">
-            <a:solidFill>
-              <a:srgbClr val="9B59B6"/>
-            </a:solidFill>
-            <a:prstDash val="solid"/>
-          </a:ln>
-        </p:spPr>
-        <p:txBody>
-          <a:bodyPr/>
-          <a:lstStyle/>
-          <a:p>
-            <a:endParaRPr lang="pt-PT"/>
-          </a:p>
-        </p:txBody>
-      </p:sp>
-      <p:sp>
-        <p:nvSpPr>
-          <p:cNvPr id="16" name="Text 14"/>
-          <p:cNvSpPr/>
-          <p:nvPr/>
-        </p:nvSpPr>
-        <p:spPr>
-          <a:xfrm>
-            <a:off x="6217920" y="1097280"/>
-            <a:ext cx="502920" cy="502920"/>
-          </a:xfrm>
-          <a:prstGeom prst="rect">
-            <a:avLst/>
-          </a:prstGeom>
-          <a:noFill/>
-          <a:ln/>
-        </p:spPr>
-        <p:txBody>
-          <a:bodyPr wrap="square" lIns="0" tIns="0" rIns="0" bIns="0" rtlCol="0" anchor="ctr"/>
-          <a:lstStyle/>
-          <a:p>
-            <a:pPr marL="0" indent="0" algn="ctr">
-              <a:buNone/>
-            </a:pPr>
-            <a:r>
-              <a:rPr lang="en-US" sz="1600" b="1" dirty="0">
-                <a:solidFill>
-                  <a:srgbClr val="0D1B2A"/>
-                </a:solidFill>
-              </a:rPr>
-              <a:t>3</a:t>
-            </a:r>
-            <a:endParaRPr lang="en-US" sz="1600" dirty="0"/>
-          </a:p>
-        </p:txBody>
-      </p:sp>
-      <p:sp>
-        <p:nvSpPr>
-          <p:cNvPr id="17" name="Text 15"/>
-          <p:cNvSpPr/>
-          <p:nvPr/>
-        </p:nvSpPr>
-        <p:spPr>
-          <a:xfrm>
-            <a:off x="6812280" y="1078992"/>
-            <a:ext cx="1965960" cy="1097280"/>
-          </a:xfrm>
-          <a:prstGeom prst="rect">
-            <a:avLst/>
-          </a:prstGeom>
-          <a:noFill/>
-          <a:ln/>
-        </p:spPr>
-        <p:txBody>
-          <a:bodyPr wrap="square" rtlCol="0" anchor="ctr"/>
-          <a:lstStyle/>
-          <a:p>
-            <a:pPr marL="0" indent="0">
-              <a:buNone/>
-            </a:pPr>
-            <a:r>
-              <a:rPr lang="en-US" sz="1200" dirty="0">
-                <a:solidFill>
-                  <a:srgbClr val="FFFFFF"/>
-                </a:solidFill>
-              </a:rPr>
-              <a:t>Tarefas são agendadas na Task Queue</a:t>
-            </a:r>
-            <a:endParaRPr lang="en-US" sz="1200" dirty="0"/>
-          </a:p>
-        </p:txBody>
-      </p:sp>
-      <p:sp>
-        <p:nvSpPr>
-          <p:cNvPr id="18" name="Shape 16"/>
-          <p:cNvSpPr/>
-          <p:nvPr/>
-        </p:nvSpPr>
-        <p:spPr>
-          <a:xfrm>
-            <a:off x="274320" y="2651760"/>
-            <a:ext cx="2743200" cy="1325880"/>
-          </a:xfrm>
-          <a:prstGeom prst="rect">
-            <a:avLst/>
-          </a:prstGeom>
-          <a:solidFill>
-            <a:srgbClr val="112236"/>
-          </a:solidFill>
-          <a:ln w="19050">
-            <a:solidFill>
-              <a:srgbClr val="E67E22"/>
-            </a:solidFill>
-            <a:prstDash val="solid"/>
-          </a:ln>
-          <a:effectLst>
-            <a:outerShdw blurRad="101600" dist="38100" dir="8100000" algn="bl" rotWithShape="0">
-              <a:srgbClr val="000000">
-                <a:alpha val="18000"/>
-              </a:srgbClr>
-            </a:outerShdw>
-          </a:effectLst>
-        </p:spPr>
-        <p:txBody>
-          <a:bodyPr/>
-          <a:lstStyle/>
-          <a:p>
-            <a:endParaRPr lang="pt-PT"/>
-          </a:p>
-        </p:txBody>
-      </p:sp>
-      <p:sp>
-        <p:nvSpPr>
-          <p:cNvPr id="19" name="Shape 17"/>
-          <p:cNvSpPr/>
-          <p:nvPr/>
-        </p:nvSpPr>
-        <p:spPr>
-          <a:xfrm>
-            <a:off x="365760" y="2743200"/>
-            <a:ext cx="502920" cy="502920"/>
-          </a:xfrm>
-          <a:prstGeom prst="ellipse">
-            <a:avLst/>
-          </a:prstGeom>
-          <a:solidFill>
-            <a:srgbClr val="E67E22"/>
-          </a:solidFill>
-          <a:ln w="12700">
-            <a:solidFill>
-              <a:srgbClr val="E67E22"/>
-            </a:solidFill>
-            <a:prstDash val="solid"/>
-          </a:ln>
-        </p:spPr>
-        <p:txBody>
-          <a:bodyPr/>
-          <a:lstStyle/>
-          <a:p>
-            <a:endParaRPr lang="pt-PT"/>
-          </a:p>
-        </p:txBody>
-      </p:sp>
-      <p:sp>
-        <p:nvSpPr>
-          <p:cNvPr id="20" name="Text 18"/>
-          <p:cNvSpPr/>
-          <p:nvPr/>
-        </p:nvSpPr>
-        <p:spPr>
-          <a:xfrm>
-            <a:off x="365760" y="2743200"/>
-            <a:ext cx="502920" cy="502920"/>
-          </a:xfrm>
-          <a:prstGeom prst="rect">
-            <a:avLst/>
-          </a:prstGeom>
-          <a:noFill/>
-          <a:ln/>
-        </p:spPr>
-        <p:txBody>
-          <a:bodyPr wrap="square" lIns="0" tIns="0" rIns="0" bIns="0" rtlCol="0" anchor="ctr"/>
-          <a:lstStyle/>
-          <a:p>
-            <a:pPr marL="0" indent="0" algn="ctr">
-              <a:buNone/>
-            </a:pPr>
-            <a:r>
-              <a:rPr lang="en-US" sz="1600" b="1" dirty="0">
-                <a:solidFill>
-                  <a:srgbClr val="0D1B2A"/>
-                </a:solidFill>
-              </a:rPr>
-              <a:t>4</a:t>
-            </a:r>
-            <a:endParaRPr lang="en-US" sz="1600" dirty="0"/>
-          </a:p>
-        </p:txBody>
-      </p:sp>
-      <p:sp>
-        <p:nvSpPr>
-          <p:cNvPr id="21" name="Text 19"/>
-          <p:cNvSpPr/>
-          <p:nvPr/>
-        </p:nvSpPr>
-        <p:spPr>
-          <a:xfrm>
-            <a:off x="960120" y="2724912"/>
-            <a:ext cx="1965960" cy="1097280"/>
-          </a:xfrm>
-          <a:prstGeom prst="rect">
-            <a:avLst/>
-          </a:prstGeom>
-          <a:noFill/>
-          <a:ln/>
-        </p:spPr>
-        <p:txBody>
-          <a:bodyPr wrap="square" rtlCol="0" anchor="ctr"/>
-          <a:lstStyle/>
-          <a:p>
-            <a:pPr marL="0" indent="0">
-              <a:buNone/>
-            </a:pPr>
-            <a:r>
-              <a:rPr lang="en-US" sz="1200" dirty="0">
-                <a:solidFill>
-                  <a:srgbClr val="FFFFFF"/>
-                </a:solidFill>
-              </a:rPr>
-              <a:t>Worker consome e executa a tarefa</a:t>
-            </a:r>
-            <a:endParaRPr lang="en-US" sz="1200" dirty="0"/>
-          </a:p>
-        </p:txBody>
-      </p:sp>
-      <p:sp>
-        <p:nvSpPr>
-          <p:cNvPr id="23" name="Shape 21"/>
-          <p:cNvSpPr/>
-          <p:nvPr/>
-        </p:nvSpPr>
-        <p:spPr>
-          <a:xfrm>
-            <a:off x="3200400" y="2651760"/>
-            <a:ext cx="2743200" cy="1325880"/>
-          </a:xfrm>
-          <a:prstGeom prst="rect">
-            <a:avLst/>
-          </a:prstGeom>
-          <a:solidFill>
-            <a:srgbClr val="112236"/>
-          </a:solidFill>
-          <a:ln w="19050">
-            <a:solidFill>
-              <a:srgbClr val="27AE60"/>
-            </a:solidFill>
-            <a:prstDash val="solid"/>
-          </a:ln>
-          <a:effectLst>
-            <a:outerShdw blurRad="101600" dist="38100" dir="8100000" algn="bl" rotWithShape="0">
-              <a:srgbClr val="000000">
-                <a:alpha val="18000"/>
-              </a:srgbClr>
-            </a:outerShdw>
-          </a:effectLst>
-        </p:spPr>
-        <p:txBody>
-          <a:bodyPr/>
-          <a:lstStyle/>
-          <a:p>
-            <a:endParaRPr lang="pt-PT"/>
-          </a:p>
-        </p:txBody>
-      </p:sp>
-      <p:sp>
-        <p:nvSpPr>
-          <p:cNvPr id="24" name="Shape 22"/>
-          <p:cNvSpPr/>
-          <p:nvPr/>
-        </p:nvSpPr>
-        <p:spPr>
-          <a:xfrm>
-            <a:off x="3291840" y="2743200"/>
-            <a:ext cx="502920" cy="502920"/>
-          </a:xfrm>
-          <a:prstGeom prst="ellipse">
-            <a:avLst/>
-          </a:prstGeom>
-          <a:solidFill>
-            <a:srgbClr val="27AE60"/>
-          </a:solidFill>
-          <a:ln w="12700">
-            <a:solidFill>
-              <a:srgbClr val="27AE60"/>
-            </a:solidFill>
-            <a:prstDash val="solid"/>
-          </a:ln>
-        </p:spPr>
-        <p:txBody>
-          <a:bodyPr/>
-          <a:lstStyle/>
-          <a:p>
-            <a:endParaRPr lang="pt-PT"/>
-          </a:p>
-        </p:txBody>
-      </p:sp>
-      <p:sp>
-        <p:nvSpPr>
-          <p:cNvPr id="25" name="Text 23"/>
-          <p:cNvSpPr/>
-          <p:nvPr/>
-        </p:nvSpPr>
-        <p:spPr>
-          <a:xfrm>
-            <a:off x="3291840" y="2743200"/>
-            <a:ext cx="502920" cy="502920"/>
-          </a:xfrm>
-          <a:prstGeom prst="rect">
-            <a:avLst/>
-          </a:prstGeom>
-          <a:noFill/>
-          <a:ln/>
-        </p:spPr>
-        <p:txBody>
-          <a:bodyPr wrap="square" lIns="0" tIns="0" rIns="0" bIns="0" rtlCol="0" anchor="ctr"/>
-          <a:lstStyle/>
-          <a:p>
-            <a:pPr marL="0" indent="0" algn="ctr">
-              <a:buNone/>
-            </a:pPr>
-            <a:r>
-              <a:rPr lang="en-US" sz="1600" b="1" dirty="0">
-                <a:solidFill>
-                  <a:srgbClr val="0D1B2A"/>
-                </a:solidFill>
-              </a:rPr>
-              <a:t>5</a:t>
-            </a:r>
-            <a:endParaRPr lang="en-US" sz="1600" dirty="0"/>
-          </a:p>
-        </p:txBody>
-      </p:sp>
-      <p:sp>
-        <p:nvSpPr>
-          <p:cNvPr id="26" name="Text 24"/>
-          <p:cNvSpPr/>
-          <p:nvPr/>
-        </p:nvSpPr>
-        <p:spPr>
-          <a:xfrm>
-            <a:off x="3886200" y="2724912"/>
-            <a:ext cx="1965960" cy="1097280"/>
-          </a:xfrm>
-          <a:prstGeom prst="rect">
-            <a:avLst/>
-          </a:prstGeom>
-          <a:noFill/>
-          <a:ln/>
-        </p:spPr>
-        <p:txBody>
-          <a:bodyPr wrap="square" rtlCol="0" anchor="ctr"/>
-          <a:lstStyle/>
-          <a:p>
-            <a:pPr marL="0" indent="0">
-              <a:buNone/>
-            </a:pPr>
-            <a:r>
-              <a:rPr lang="en-US" sz="1200" dirty="0">
-                <a:solidFill>
-                  <a:srgbClr val="FFFFFF"/>
-                </a:solidFill>
-              </a:rPr>
-              <a:t>Activity realiza a operação externa</a:t>
-            </a:r>
-            <a:endParaRPr lang="en-US" sz="1200" dirty="0"/>
-          </a:p>
-        </p:txBody>
-      </p:sp>
-      <p:sp>
-        <p:nvSpPr>
-          <p:cNvPr id="28" name="Shape 26"/>
-          <p:cNvSpPr/>
-          <p:nvPr/>
-        </p:nvSpPr>
-        <p:spPr>
-          <a:xfrm>
-            <a:off x="6126480" y="2651760"/>
-            <a:ext cx="2743200" cy="1325880"/>
-          </a:xfrm>
-          <a:prstGeom prst="rect">
-            <a:avLst/>
-          </a:prstGeom>
-          <a:solidFill>
-            <a:srgbClr val="112236"/>
-          </a:solidFill>
-          <a:ln w="19050">
-            <a:solidFill>
-              <a:srgbClr val="00D4AA"/>
-            </a:solidFill>
-            <a:prstDash val="solid"/>
-          </a:ln>
-          <a:effectLst>
-            <a:outerShdw blurRad="101600" dist="38100" dir="8100000" algn="bl" rotWithShape="0">
-              <a:srgbClr val="000000">
-                <a:alpha val="18000"/>
-              </a:srgbClr>
-            </a:outerShdw>
-          </a:effectLst>
-        </p:spPr>
-        <p:txBody>
-          <a:bodyPr/>
-          <a:lstStyle/>
-          <a:p>
-            <a:endParaRPr lang="pt-PT"/>
-          </a:p>
-        </p:txBody>
-      </p:sp>
-      <p:sp>
-        <p:nvSpPr>
-          <p:cNvPr id="29" name="Shape 27"/>
-          <p:cNvSpPr/>
-          <p:nvPr/>
-        </p:nvSpPr>
-        <p:spPr>
-          <a:xfrm>
-            <a:off x="6217920" y="2743200"/>
-            <a:ext cx="502920" cy="502920"/>
-          </a:xfrm>
-          <a:prstGeom prst="ellipse">
-            <a:avLst/>
-          </a:prstGeom>
-          <a:solidFill>
-            <a:srgbClr val="00D4AA"/>
-          </a:solidFill>
-          <a:ln w="12700">
-            <a:solidFill>
-              <a:srgbClr val="00D4AA"/>
-            </a:solidFill>
-            <a:prstDash val="solid"/>
-          </a:ln>
-        </p:spPr>
-        <p:txBody>
-          <a:bodyPr/>
-          <a:lstStyle/>
-          <a:p>
-            <a:endParaRPr lang="pt-PT"/>
-          </a:p>
-        </p:txBody>
-      </p:sp>
-      <p:sp>
-        <p:nvSpPr>
-          <p:cNvPr id="30" name="Text 28"/>
-          <p:cNvSpPr/>
-          <p:nvPr/>
-        </p:nvSpPr>
-        <p:spPr>
-          <a:xfrm>
-            <a:off x="6217920" y="2743200"/>
-            <a:ext cx="502920" cy="502920"/>
-          </a:xfrm>
-          <a:prstGeom prst="rect">
-            <a:avLst/>
-          </a:prstGeom>
-          <a:noFill/>
-          <a:ln/>
-        </p:spPr>
-        <p:txBody>
-          <a:bodyPr wrap="square" lIns="0" tIns="0" rIns="0" bIns="0" rtlCol="0" anchor="ctr"/>
-          <a:lstStyle/>
-          <a:p>
-            <a:pPr marL="0" indent="0" algn="ctr">
-              <a:buNone/>
-            </a:pPr>
-            <a:r>
-              <a:rPr lang="en-US" sz="1600" b="1" dirty="0">
-                <a:solidFill>
-                  <a:srgbClr val="0D1B2A"/>
-                </a:solidFill>
-              </a:rPr>
-              <a:t>6</a:t>
-            </a:r>
-            <a:endParaRPr lang="en-US" sz="1600" dirty="0"/>
-          </a:p>
-        </p:txBody>
-      </p:sp>
-      <p:sp>
-        <p:nvSpPr>
-          <p:cNvPr id="31" name="Text 29"/>
-          <p:cNvSpPr/>
-          <p:nvPr/>
-        </p:nvSpPr>
-        <p:spPr>
-          <a:xfrm>
-            <a:off x="6812280" y="2724912"/>
-            <a:ext cx="1965960" cy="1097280"/>
-          </a:xfrm>
-          <a:prstGeom prst="rect">
-            <a:avLst/>
-          </a:prstGeom>
-          <a:noFill/>
-          <a:ln/>
-        </p:spPr>
-        <p:txBody>
-          <a:bodyPr wrap="square" rtlCol="0" anchor="ctr"/>
-          <a:lstStyle/>
-          <a:p>
-            <a:pPr marL="0" indent="0">
-              <a:buNone/>
-            </a:pPr>
-            <a:r>
-              <a:rPr lang="en-US" sz="1200" dirty="0">
-                <a:solidFill>
-                  <a:srgbClr val="FFFFFF"/>
-                </a:solidFill>
-              </a:rPr>
-              <a:t>Resultado retorna e histórico atualiza</a:t>
-            </a:r>
-            <a:endParaRPr lang="en-US" sz="1200" dirty="0"/>
-          </a:p>
-        </p:txBody>
-      </p:sp>
-      <p:sp>
-        <p:nvSpPr>
-          <p:cNvPr id="32" name="Shape 30"/>
-          <p:cNvSpPr/>
-          <p:nvPr/>
-        </p:nvSpPr>
-        <p:spPr>
-          <a:xfrm>
-            <a:off x="274320" y="4434840"/>
-            <a:ext cx="8595360" cy="457200"/>
-          </a:xfrm>
-          <a:prstGeom prst="rect">
-            <a:avLst/>
-          </a:prstGeom>
-          <a:solidFill>
-            <a:srgbClr val="1B6CA8"/>
-          </a:solidFill>
-          <a:ln w="12700">
-            <a:solidFill>
-              <a:srgbClr val="1B6CA8"/>
-            </a:solidFill>
-            <a:prstDash val="solid"/>
-          </a:ln>
-        </p:spPr>
-        <p:txBody>
-          <a:bodyPr/>
-          <a:lstStyle/>
-          <a:p>
-            <a:endParaRPr lang="pt-PT"/>
-          </a:p>
-        </p:txBody>
-      </p:sp>
-      <p:sp>
-        <p:nvSpPr>
-          <p:cNvPr id="33" name="Text 31"/>
-          <p:cNvSpPr/>
-          <p:nvPr/>
-        </p:nvSpPr>
-        <p:spPr>
-          <a:xfrm>
-            <a:off x="457200" y="4434840"/>
-            <a:ext cx="8229600" cy="457200"/>
-          </a:xfrm>
-          <a:prstGeom prst="rect">
-            <a:avLst/>
-          </a:prstGeom>
-          <a:noFill/>
-          <a:ln/>
-        </p:spPr>
-        <p:txBody>
-          <a:bodyPr wrap="square" rtlCol="0" anchor="ctr"/>
-          <a:lstStyle/>
-          <a:p>
-            <a:pPr marL="0" indent="0">
-              <a:buNone/>
-            </a:pPr>
-            <a:r>
-              <a:rPr lang="en-US" sz="1100" i="1" dirty="0">
-                <a:solidFill>
-                  <a:srgbClr val="FFFFFF"/>
-                </a:solidFill>
-              </a:rPr>
-              <a:t>🔄  Em caso de falha: Temporal aplica Retry Policies e retoma a execução com base no histórico de eventos.</a:t>
-            </a:r>
-            <a:endParaRPr lang="en-US" sz="1100" dirty="0"/>
-          </a:p>
-        </p:txBody>
-      </p:sp>
-      <p:cxnSp>
-        <p:nvCxnSpPr>
-          <p:cNvPr id="34" name="Conexão Reta Unidirecional 33">
-            <a:extLst>
-              <a:ext uri="{FF2B5EF4-FFF2-40B4-BE49-F238E27FC236}">
-                <a16:creationId xmlns:a16="http://schemas.microsoft.com/office/drawing/2014/main" id="{BB5C6E2A-2925-F8C5-5E9D-468D5D9D3058}"/>
-              </a:ext>
-            </a:extLst>
-          </p:cNvPr>
-          <p:cNvCxnSpPr>
-            <a:cxnSpLocks/>
-            <a:stCxn id="4" idx="3"/>
-            <a:endCxn id="9" idx="1"/>
-          </p:cNvCxnSpPr>
-          <p:nvPr/>
-        </p:nvCxnSpPr>
-        <p:spPr>
-          <a:xfrm>
-            <a:off x="3017520" y="1668780"/>
-            <a:ext cx="182880" cy="0"/>
-          </a:xfrm>
-          <a:prstGeom prst="straightConnector1">
-            <a:avLst/>
-          </a:prstGeom>
-          <a:ln w="19050">
-            <a:solidFill>
-              <a:schemeClr val="tx1"/>
-            </a:solidFill>
-            <a:tailEnd type="triangle"/>
-          </a:ln>
-        </p:spPr>
-        <p:style>
-          <a:lnRef idx="1">
-            <a:schemeClr val="accent1"/>
-          </a:lnRef>
-          <a:fillRef idx="0">
-            <a:schemeClr val="accent1"/>
-          </a:fillRef>
-          <a:effectRef idx="0">
-            <a:schemeClr val="accent1"/>
-          </a:effectRef>
-          <a:fontRef idx="minor">
-            <a:schemeClr val="tx1"/>
-          </a:fontRef>
-        </p:style>
-      </p:cxnSp>
-      <p:cxnSp>
-        <p:nvCxnSpPr>
-          <p:cNvPr id="37" name="Conexão Reta Unidirecional 36">
-            <a:extLst>
-              <a:ext uri="{FF2B5EF4-FFF2-40B4-BE49-F238E27FC236}">
-                <a16:creationId xmlns:a16="http://schemas.microsoft.com/office/drawing/2014/main" id="{1BBE1A0A-02C2-26FE-803E-1112E59E56FA}"/>
-              </a:ext>
-            </a:extLst>
-          </p:cNvPr>
-          <p:cNvCxnSpPr>
-            <a:cxnSpLocks/>
-            <a:stCxn id="9" idx="3"/>
-            <a:endCxn id="14" idx="1"/>
-          </p:cNvCxnSpPr>
-          <p:nvPr/>
-        </p:nvCxnSpPr>
-        <p:spPr>
-          <a:xfrm>
-            <a:off x="5943600" y="1668780"/>
-            <a:ext cx="182880" cy="0"/>
-          </a:xfrm>
-          <a:prstGeom prst="straightConnector1">
-            <a:avLst/>
-          </a:prstGeom>
-          <a:ln w="19050">
-            <a:solidFill>
-              <a:schemeClr val="tx1"/>
-            </a:solidFill>
-            <a:tailEnd type="triangle"/>
-          </a:ln>
-        </p:spPr>
-        <p:style>
-          <a:lnRef idx="1">
-            <a:schemeClr val="accent1"/>
-          </a:lnRef>
-          <a:fillRef idx="0">
-            <a:schemeClr val="accent1"/>
-          </a:fillRef>
-          <a:effectRef idx="0">
-            <a:schemeClr val="accent1"/>
-          </a:effectRef>
-          <a:fontRef idx="minor">
-            <a:schemeClr val="tx1"/>
-          </a:fontRef>
-        </p:style>
-      </p:cxnSp>
-      <p:cxnSp>
-        <p:nvCxnSpPr>
-          <p:cNvPr id="40" name="Conexão Reta Unidirecional 39">
-            <a:extLst>
-              <a:ext uri="{FF2B5EF4-FFF2-40B4-BE49-F238E27FC236}">
-                <a16:creationId xmlns:a16="http://schemas.microsoft.com/office/drawing/2014/main" id="{B696B6AA-6E81-E91D-16E1-3EF726F09E50}"/>
-              </a:ext>
-            </a:extLst>
-          </p:cNvPr>
-          <p:cNvCxnSpPr>
-            <a:cxnSpLocks/>
-            <a:stCxn id="18" idx="3"/>
-            <a:endCxn id="23" idx="1"/>
-          </p:cNvCxnSpPr>
-          <p:nvPr/>
-        </p:nvCxnSpPr>
-        <p:spPr>
-          <a:xfrm>
-            <a:off x="3017520" y="3314700"/>
-            <a:ext cx="182880" cy="0"/>
-          </a:xfrm>
-          <a:prstGeom prst="straightConnector1">
-            <a:avLst/>
-          </a:prstGeom>
-          <a:ln w="19050">
-            <a:solidFill>
-              <a:schemeClr val="tx1"/>
-            </a:solidFill>
-            <a:tailEnd type="triangle"/>
-          </a:ln>
-        </p:spPr>
-        <p:style>
-          <a:lnRef idx="1">
-            <a:schemeClr val="accent1"/>
-          </a:lnRef>
-          <a:fillRef idx="0">
-            <a:schemeClr val="accent1"/>
-          </a:fillRef>
-          <a:effectRef idx="0">
-            <a:schemeClr val="accent1"/>
-          </a:effectRef>
-          <a:fontRef idx="minor">
-            <a:schemeClr val="tx1"/>
-          </a:fontRef>
-        </p:style>
-      </p:cxnSp>
-      <p:cxnSp>
-        <p:nvCxnSpPr>
-          <p:cNvPr id="43" name="Conexão Reta Unidirecional 42">
-            <a:extLst>
-              <a:ext uri="{FF2B5EF4-FFF2-40B4-BE49-F238E27FC236}">
-                <a16:creationId xmlns:a16="http://schemas.microsoft.com/office/drawing/2014/main" id="{83159633-415F-2D3D-D3A9-EA4F4EA99351}"/>
-              </a:ext>
-            </a:extLst>
-          </p:cNvPr>
-          <p:cNvCxnSpPr>
-            <a:cxnSpLocks/>
-            <a:stCxn id="23" idx="3"/>
-          </p:cNvCxnSpPr>
-          <p:nvPr/>
-        </p:nvCxnSpPr>
-        <p:spPr>
-          <a:xfrm flipV="1">
-            <a:off x="5943600" y="3310944"/>
-            <a:ext cx="182880" cy="3756"/>
           </a:xfrm>
           <a:prstGeom prst="straightConnector1">
             <a:avLst/>
